--- a/content/05-teaching-resources/slides/core/12-mechatronics.pptx
+++ b/content/05-teaching-resources/slides/core/12-mechatronics.pptx
@@ -8,12 +8,18 @@
     <p:sldId id="256" r:id="rId7"/>
     <p:sldId id="257" r:id="rId8"/>
     <p:sldId id="258" r:id="rId9"/>
-    <p:sldId id="259" r:id="rId11"/>
+    <p:sldId id="259" r:id="rId10"/>
     <p:sldId id="260" r:id="rId12"/>
     <p:sldId id="261" r:id="rId13"/>
     <p:sldId id="262" r:id="rId14"/>
     <p:sldId id="263" r:id="rId15"/>
     <p:sldId id="264" r:id="rId16"/>
+    <p:sldId id="265" r:id="rId17"/>
+    <p:sldId id="266" r:id="rId18"/>
+    <p:sldId id="267" r:id="rId19"/>
+    <p:sldId id="268" r:id="rId20"/>
+    <p:sldId id="269" r:id="rId21"/>
+    <p:sldId id="270" r:id="rId22"/>
   </p:sldIdLst>
   <p:sldSz cx="12191695" cy="6858000" type="screen4x3"/>
   <p:notesSz cx="6858000" cy="9144000"/>
@@ -580,7 +586,22 @@
           <a:lstStyle/>
           <a:p>
             <a:r>
-              <a:t>Compared with dedicated ICs or computers, PLCs are rugged, easily reprogrammed and built for industrial I/O, but cost more than a simple dedicated circuit.</a:t>
+              <a:t>Answers:</a:t>
+            </a:r>
+          </a:p>
+          <a:p>
+            <a:r>
+              <a:t>1. Creates movement.</a:t>
+            </a:r>
+          </a:p>
+          <a:p>
+            <a:r>
+              <a:t>2. A servo motor.</a:t>
+            </a:r>
+          </a:p>
+          <a:p>
+            <a:r>
+              <a:t>3. Converts one form of energy or signal into another.</a:t>
             </a:r>
           </a:p>
         </p:txBody>
@@ -650,7 +671,7 @@
           <a:lstStyle/>
           <a:p>
             <a:r>
-              <a:t>Components: valves, pumps, actuators, cylinders, compressors. Students should recognise them on schematic diagrams.</a:t>
+              <a:t>Compared with dedicated ICs or computers, PLCs are rugged, easily reprogrammed and built for industrial I/O, but cost more than a simple dedicated circuit.</a:t>
             </a:r>
           </a:p>
         </p:txBody>
@@ -720,7 +741,22 @@
           <a:lstStyle/>
           <a:p>
             <a:r>
-              <a:t>Give students a few minutes to answer on mini whiteboards or paper, then reveal the answers on the next slide.</a:t>
+              <a:t>Answers:</a:t>
+            </a:r>
+          </a:p>
+          <a:p>
+            <a:r>
+              <a:t>1. Unitary is all-in-one; modular is built from plug-in modules.</a:t>
+            </a:r>
+          </a:p>
+          <a:p>
+            <a:r>
+              <a:t>2. E.g. robotic arms, conveyors, packaging.</a:t>
+            </a:r>
+          </a:p>
+          <a:p>
+            <a:r>
+              <a:t>3. Rugged and easy to reprogram.</a:t>
             </a:r>
           </a:p>
         </p:txBody>
@@ -790,7 +826,7 @@
           <a:lstStyle/>
           <a:p>
             <a:r>
-              <a:t>Talk through any answers the class found difficult.</a:t>
+              <a:t>Components: valves, pumps, actuators, cylinders, compressors. Students should recognise them on schematic diagrams.</a:t>
             </a:r>
           </a:p>
         </p:txBody>
@@ -816,6 +852,231 @@
 </file>
 
 <file path=ppt/notesSlides/notesSlide6.xml><?xml version="1.0" encoding="utf-8"?>
+<p:notes xmlns:a="http://schemas.openxmlformats.org/drawingml/2006/main" xmlns:p="http://schemas.openxmlformats.org/presentationml/2006/main" xmlns:r="http://schemas.openxmlformats.org/officeDocument/2006/relationships">
+  <p:cSld>
+    <p:spTree>
+      <p:nvGrpSpPr>
+        <p:cNvPr id="1" name=""/>
+        <p:cNvGrpSpPr/>
+        <p:nvPr/>
+      </p:nvGrpSpPr>
+      <p:grpSpPr>
+        <a:xfrm>
+          <a:off x="0" y="0"/>
+          <a:ext cx="0" cy="0"/>
+          <a:chOff x="0" y="0"/>
+          <a:chExt cx="0" cy="0"/>
+        </a:xfrm>
+      </p:grpSpPr>
+      <p:sp>
+        <p:nvSpPr>
+          <p:cNvPr id="2" name="Slide Image Placeholder 1"/>
+          <p:cNvSpPr>
+            <a:spLocks noGrp="1"/>
+          </p:cNvSpPr>
+          <p:nvPr>
+            <p:ph type="sldImg" idx="2"/>
+          </p:nvPr>
+        </p:nvSpPr>
+        <p:spPr/>
+      </p:sp>
+      <p:sp>
+        <p:nvSpPr>
+          <p:cNvPr id="3" name="Notes Placeholder 2"/>
+          <p:cNvSpPr>
+            <a:spLocks noGrp="1"/>
+          </p:cNvSpPr>
+          <p:nvPr>
+            <p:ph type="body" idx="3" sz="quarter"/>
+          </p:nvPr>
+        </p:nvSpPr>
+        <p:spPr/>
+        <p:txBody>
+          <a:bodyPr/>
+          <a:lstStyle/>
+          <a:p>
+            <a:r>
+              <a:t>Answers:</a:t>
+            </a:r>
+          </a:p>
+          <a:p>
+            <a:r>
+              <a:t>1. Hydraulics.</a:t>
+            </a:r>
+          </a:p>
+          <a:p>
+            <a:r>
+              <a:t>2. E.g. fast, clean, cheap.</a:t>
+            </a:r>
+          </a:p>
+          <a:p>
+            <a:r>
+              <a:t>3. Air is compressible.</a:t>
+            </a:r>
+          </a:p>
+        </p:txBody>
+      </p:sp>
+      <p:sp>
+        <p:nvSpPr>
+          <p:cNvPr id="4" name="Slide Number Placeholder 3"/>
+          <p:cNvSpPr>
+            <a:spLocks noGrp="1"/>
+          </p:cNvSpPr>
+          <p:nvPr>
+            <p:ph type="sldNum" idx="5" sz="quarter"/>
+          </p:nvPr>
+        </p:nvSpPr>
+        <p:spPr/>
+      </p:sp>
+    </p:spTree>
+  </p:cSld>
+  <p:clrMapOvr>
+    <a:masterClrMapping/>
+  </p:clrMapOvr>
+</p:notes>
+</file>
+
+<file path=ppt/notesSlides/notesSlide7.xml><?xml version="1.0" encoding="utf-8"?>
+<p:notes xmlns:a="http://schemas.openxmlformats.org/drawingml/2006/main" xmlns:p="http://schemas.openxmlformats.org/presentationml/2006/main" xmlns:r="http://schemas.openxmlformats.org/officeDocument/2006/relationships">
+  <p:cSld>
+    <p:spTree>
+      <p:nvGrpSpPr>
+        <p:cNvPr id="1" name=""/>
+        <p:cNvGrpSpPr/>
+        <p:nvPr/>
+      </p:nvGrpSpPr>
+      <p:grpSpPr>
+        <a:xfrm>
+          <a:off x="0" y="0"/>
+          <a:ext cx="0" cy="0"/>
+          <a:chOff x="0" y="0"/>
+          <a:chExt cx="0" cy="0"/>
+        </a:xfrm>
+      </p:grpSpPr>
+      <p:sp>
+        <p:nvSpPr>
+          <p:cNvPr id="2" name="Slide Image Placeholder 1"/>
+          <p:cNvSpPr>
+            <a:spLocks noGrp="1"/>
+          </p:cNvSpPr>
+          <p:nvPr>
+            <p:ph type="sldImg" idx="2"/>
+          </p:nvPr>
+        </p:nvSpPr>
+        <p:spPr/>
+      </p:sp>
+      <p:sp>
+        <p:nvSpPr>
+          <p:cNvPr id="3" name="Notes Placeholder 2"/>
+          <p:cNvSpPr>
+            <a:spLocks noGrp="1"/>
+          </p:cNvSpPr>
+          <p:nvPr>
+            <p:ph type="body" idx="3" sz="quarter"/>
+          </p:nvPr>
+        </p:nvSpPr>
+        <p:spPr/>
+        <p:txBody>
+          <a:bodyPr/>
+          <a:lstStyle/>
+          <a:p>
+            <a:r>
+              <a:t>Give students a few minutes to answer on mini whiteboards or paper, then reveal the answers on the next slide.</a:t>
+            </a:r>
+          </a:p>
+        </p:txBody>
+      </p:sp>
+      <p:sp>
+        <p:nvSpPr>
+          <p:cNvPr id="4" name="Slide Number Placeholder 3"/>
+          <p:cNvSpPr>
+            <a:spLocks noGrp="1"/>
+          </p:cNvSpPr>
+          <p:nvPr>
+            <p:ph type="sldNum" idx="5" sz="quarter"/>
+          </p:nvPr>
+        </p:nvSpPr>
+        <p:spPr/>
+      </p:sp>
+    </p:spTree>
+  </p:cSld>
+  <p:clrMapOvr>
+    <a:masterClrMapping/>
+  </p:clrMapOvr>
+</p:notes>
+</file>
+
+<file path=ppt/notesSlides/notesSlide8.xml><?xml version="1.0" encoding="utf-8"?>
+<p:notes xmlns:a="http://schemas.openxmlformats.org/drawingml/2006/main" xmlns:p="http://schemas.openxmlformats.org/presentationml/2006/main" xmlns:r="http://schemas.openxmlformats.org/officeDocument/2006/relationships">
+  <p:cSld>
+    <p:spTree>
+      <p:nvGrpSpPr>
+        <p:cNvPr id="1" name=""/>
+        <p:cNvGrpSpPr/>
+        <p:nvPr/>
+      </p:nvGrpSpPr>
+      <p:grpSpPr>
+        <a:xfrm>
+          <a:off x="0" y="0"/>
+          <a:ext cx="0" cy="0"/>
+          <a:chOff x="0" y="0"/>
+          <a:chExt cx="0" cy="0"/>
+        </a:xfrm>
+      </p:grpSpPr>
+      <p:sp>
+        <p:nvSpPr>
+          <p:cNvPr id="2" name="Slide Image Placeholder 1"/>
+          <p:cNvSpPr>
+            <a:spLocks noGrp="1"/>
+          </p:cNvSpPr>
+          <p:nvPr>
+            <p:ph type="sldImg" idx="2"/>
+          </p:nvPr>
+        </p:nvSpPr>
+        <p:spPr/>
+      </p:sp>
+      <p:sp>
+        <p:nvSpPr>
+          <p:cNvPr id="3" name="Notes Placeholder 2"/>
+          <p:cNvSpPr>
+            <a:spLocks noGrp="1"/>
+          </p:cNvSpPr>
+          <p:nvPr>
+            <p:ph type="body" idx="3" sz="quarter"/>
+          </p:nvPr>
+        </p:nvSpPr>
+        <p:spPr/>
+        <p:txBody>
+          <a:bodyPr/>
+          <a:lstStyle/>
+          <a:p>
+            <a:r>
+              <a:t>Talk through any answers the class found difficult.</a:t>
+            </a:r>
+          </a:p>
+        </p:txBody>
+      </p:sp>
+      <p:sp>
+        <p:nvSpPr>
+          <p:cNvPr id="4" name="Slide Number Placeholder 3"/>
+          <p:cNvSpPr>
+            <a:spLocks noGrp="1"/>
+          </p:cNvSpPr>
+          <p:nvPr>
+            <p:ph type="sldNum" idx="5" sz="quarter"/>
+          </p:nvPr>
+        </p:nvSpPr>
+        <p:spPr/>
+      </p:sp>
+    </p:spTree>
+  </p:cSld>
+  <p:clrMapOvr>
+    <a:masterClrMapping/>
+  </p:clrMapOvr>
+</p:notes>
+</file>
+
+<file path=ppt/notesSlides/notesSlide9.xml><?xml version="1.0" encoding="utf-8"?>
 <p:notes xmlns:a="http://schemas.openxmlformats.org/drawingml/2006/main" xmlns:p="http://schemas.openxmlformats.org/presentationml/2006/main" xmlns:r="http://schemas.openxmlformats.org/officeDocument/2006/relationships">
   <p:cSld>
     <p:spTree>
@@ -4185,6 +4446,3418 @@
 </p:sld>
 </file>
 
+<file path=ppt/slides/slide10.xml><?xml version="1.0" encoding="utf-8"?>
+<p:sld xmlns:a="http://schemas.openxmlformats.org/drawingml/2006/main" xmlns:p="http://schemas.openxmlformats.org/presentationml/2006/main" xmlns:r="http://schemas.openxmlformats.org/officeDocument/2006/relationships">
+  <p:cSld>
+    <p:bg>
+      <p:bgPr>
+        <a:solidFill>
+          <a:srgbClr val="FFFFFF"/>
+        </a:solidFill>
+        <a:effectLst/>
+      </p:bgPr>
+    </p:bg>
+    <p:spTree>
+      <p:nvGrpSpPr>
+        <p:cNvPr id="1" name=""/>
+        <p:cNvGrpSpPr/>
+        <p:nvPr/>
+      </p:nvGrpSpPr>
+      <p:grpSpPr/>
+      <p:sp>
+        <p:nvSpPr>
+          <p:cNvPr id="2" name="TextBox 1"/>
+          <p:cNvSpPr txBox="1"/>
+          <p:nvPr/>
+        </p:nvSpPr>
+        <p:spPr>
+          <a:xfrm>
+            <a:off x="548640" y="320040"/>
+            <a:ext cx="11094415" cy="274320"/>
+          </a:xfrm>
+          <a:prstGeom prst="rect">
+            <a:avLst/>
+          </a:prstGeom>
+          <a:noFill/>
+        </p:spPr>
+        <p:txBody>
+          <a:bodyPr wrap="square" anchor="t" lIns="0" rIns="0" tIns="0" bIns="0"/>
+          <a:lstStyle/>
+          <a:p>
+            <a:pPr algn="l"/>
+            <a:r>
+              <a:rPr sz="1100" b="1" i="0">
+                <a:solidFill>
+                  <a:srgbClr val="54595D"/>
+                </a:solidFill>
+                <a:latin typeface="Calibri"/>
+              </a:rPr>
+              <a:t>ENGINEERING CORE  ·  Core topic 9</a:t>
+            </a:r>
+          </a:p>
+        </p:txBody>
+      </p:sp>
+      <p:sp>
+        <p:nvSpPr>
+          <p:cNvPr id="3" name="TextBox 2"/>
+          <p:cNvSpPr txBox="1"/>
+          <p:nvPr/>
+        </p:nvSpPr>
+        <p:spPr>
+          <a:xfrm>
+            <a:off x="548640" y="566928"/>
+            <a:ext cx="11094415" cy="822960"/>
+          </a:xfrm>
+          <a:prstGeom prst="rect">
+            <a:avLst/>
+          </a:prstGeom>
+          <a:noFill/>
+        </p:spPr>
+        <p:txBody>
+          <a:bodyPr wrap="square" anchor="ctr" lIns="0" rIns="0" tIns="0" bIns="0"/>
+          <a:lstStyle/>
+          <a:p>
+            <a:pPr algn="l"/>
+            <a:r>
+              <a:rPr sz="3200" b="1" i="0">
+                <a:solidFill>
+                  <a:srgbClr val="03306E"/>
+                </a:solidFill>
+                <a:latin typeface="Cambria"/>
+              </a:rPr>
+              <a:t>Hydraulics and pneumatics</a:t>
+            </a:r>
+          </a:p>
+        </p:txBody>
+      </p:sp>
+      <p:sp>
+        <p:nvSpPr>
+          <p:cNvPr id="4" name="TextBox 3"/>
+          <p:cNvSpPr txBox="1"/>
+          <p:nvPr/>
+        </p:nvSpPr>
+        <p:spPr>
+          <a:xfrm>
+            <a:off x="548640" y="6446520"/>
+            <a:ext cx="8229600" cy="274320"/>
+          </a:xfrm>
+          <a:prstGeom prst="rect">
+            <a:avLst/>
+          </a:prstGeom>
+          <a:noFill/>
+        </p:spPr>
+        <p:txBody>
+          <a:bodyPr wrap="square" anchor="t" lIns="0" rIns="0" tIns="0" bIns="0"/>
+          <a:lstStyle/>
+          <a:p>
+            <a:pPr algn="l"/>
+            <a:r>
+              <a:rPr sz="1000" b="0" i="0">
+                <a:solidFill>
+                  <a:srgbClr val="54595D"/>
+                </a:solidFill>
+                <a:latin typeface="Calibri"/>
+              </a:rPr>
+              <a:t>Design and Development for Engineering and Manufacturing T Level  ·  Mechatronics, PLCs, Hydraulics and Pneumatics</a:t>
+            </a:r>
+          </a:p>
+        </p:txBody>
+      </p:sp>
+      <p:sp>
+        <p:nvSpPr>
+          <p:cNvPr id="5" name="TextBox 4"/>
+          <p:cNvSpPr txBox="1"/>
+          <p:nvPr/>
+        </p:nvSpPr>
+        <p:spPr>
+          <a:xfrm>
+            <a:off x="10728655" y="6446520"/>
+            <a:ext cx="914400" cy="274320"/>
+          </a:xfrm>
+          <a:prstGeom prst="rect">
+            <a:avLst/>
+          </a:prstGeom>
+          <a:noFill/>
+        </p:spPr>
+        <p:txBody>
+          <a:bodyPr wrap="square" anchor="t" lIns="0" rIns="0" tIns="0" bIns="0"/>
+          <a:lstStyle/>
+          <a:p>
+            <a:pPr algn="r"/>
+            <a:r>
+              <a:rPr sz="1000" b="0" i="0">
+                <a:solidFill>
+                  <a:srgbClr val="54595D"/>
+                </a:solidFill>
+                <a:latin typeface="Calibri"/>
+              </a:rPr>
+              <a:t>10</a:t>
+            </a:r>
+          </a:p>
+        </p:txBody>
+      </p:sp>
+      <p:sp>
+        <p:nvSpPr>
+          <p:cNvPr id="6" name="Rounded Rectangle 5"/>
+          <p:cNvSpPr/>
+          <p:nvPr/>
+        </p:nvSpPr>
+        <p:spPr>
+          <a:xfrm>
+            <a:off x="548640" y="1600200"/>
+            <a:ext cx="5364327" cy="640080"/>
+          </a:xfrm>
+          <a:prstGeom prst="roundRect">
+            <a:avLst>
+              <a:gd name="adj" fmla="val 15000"/>
+            </a:avLst>
+          </a:prstGeom>
+          <a:solidFill>
+            <a:srgbClr val="03306E"/>
+          </a:solidFill>
+          <a:ln>
+            <a:noFill/>
+          </a:ln>
+          <a:effectLst/>
+        </p:spPr>
+        <p:style>
+          <a:lnRef idx="1">
+            <a:schemeClr val="accent1"/>
+          </a:lnRef>
+          <a:fillRef idx="3">
+            <a:schemeClr val="accent1"/>
+          </a:fillRef>
+          <a:effectRef idx="2">
+            <a:schemeClr val="accent1"/>
+          </a:effectRef>
+          <a:fontRef idx="minor">
+            <a:schemeClr val="lt1"/>
+          </a:fontRef>
+        </p:style>
+        <p:txBody>
+          <a:bodyPr rtlCol="0" anchor="ctr"/>
+          <a:lstStyle/>
+          <a:p/>
+        </p:txBody>
+      </p:sp>
+      <p:sp>
+        <p:nvSpPr>
+          <p:cNvPr id="7" name="TextBox 6"/>
+          <p:cNvSpPr txBox="1"/>
+          <p:nvPr/>
+        </p:nvSpPr>
+        <p:spPr>
+          <a:xfrm>
+            <a:off x="777240" y="1600200"/>
+            <a:ext cx="4907127" cy="640080"/>
+          </a:xfrm>
+          <a:prstGeom prst="rect">
+            <a:avLst/>
+          </a:prstGeom>
+          <a:noFill/>
+        </p:spPr>
+        <p:txBody>
+          <a:bodyPr wrap="square" anchor="ctr" lIns="0" rIns="0" tIns="0" bIns="0"/>
+          <a:lstStyle/>
+          <a:p>
+            <a:pPr algn="l"/>
+            <a:r>
+              <a:rPr sz="2000" b="1" i="0">
+                <a:solidFill>
+                  <a:srgbClr val="FFFFFF"/>
+                </a:solidFill>
+                <a:latin typeface="Calibri"/>
+              </a:rPr>
+              <a:t>Hydraulics (oil)</a:t>
+            </a:r>
+          </a:p>
+        </p:txBody>
+      </p:sp>
+      <p:sp>
+        <p:nvSpPr>
+          <p:cNvPr id="8" name="Rounded Rectangle 7"/>
+          <p:cNvSpPr/>
+          <p:nvPr/>
+        </p:nvSpPr>
+        <p:spPr>
+          <a:xfrm>
+            <a:off x="548640" y="2377440"/>
+            <a:ext cx="5364327" cy="3794760"/>
+          </a:xfrm>
+          <a:prstGeom prst="roundRect">
+            <a:avLst>
+              <a:gd name="adj" fmla="val 4000"/>
+            </a:avLst>
+          </a:prstGeom>
+          <a:solidFill>
+            <a:srgbClr val="EAF3FF"/>
+          </a:solidFill>
+          <a:ln>
+            <a:noFill/>
+          </a:ln>
+          <a:effectLst/>
+        </p:spPr>
+        <p:style>
+          <a:lnRef idx="1">
+            <a:schemeClr val="accent1"/>
+          </a:lnRef>
+          <a:fillRef idx="3">
+            <a:schemeClr val="accent1"/>
+          </a:fillRef>
+          <a:effectRef idx="2">
+            <a:schemeClr val="accent1"/>
+          </a:effectRef>
+          <a:fontRef idx="minor">
+            <a:schemeClr val="lt1"/>
+          </a:fontRef>
+        </p:style>
+        <p:txBody>
+          <a:bodyPr rtlCol="0" anchor="ctr"/>
+          <a:lstStyle/>
+          <a:p/>
+        </p:txBody>
+      </p:sp>
+      <p:sp>
+        <p:nvSpPr>
+          <p:cNvPr id="9" name="TextBox 8"/>
+          <p:cNvSpPr txBox="1"/>
+          <p:nvPr/>
+        </p:nvSpPr>
+        <p:spPr>
+          <a:xfrm>
+            <a:off x="822959" y="2606040"/>
+            <a:ext cx="4815687" cy="3337560"/>
+          </a:xfrm>
+          <a:prstGeom prst="rect">
+            <a:avLst/>
+          </a:prstGeom>
+          <a:noFill/>
+        </p:spPr>
+        <p:txBody>
+          <a:bodyPr wrap="square" lIns="0" rIns="0" tIns="0" bIns="0">
+            <a:spAutoFit/>
+          </a:bodyPr>
+          <a:lstStyle/>
+          <a:p>
+            <a:pPr marL="274320" indent="-274320">
+              <a:spcAft>
+                <a:spcPts val="990"/>
+              </a:spcAft>
+              <a:buClr>
+                <a:srgbClr val="0645AD"/>
+              </a:buClr>
+              <a:buFont typeface="Arial"/>
+              <a:buChar char="•"/>
+            </a:pPr>
+            <a:r>
+              <a:rPr sz="2200" b="0">
+                <a:solidFill>
+                  <a:srgbClr val="202122"/>
+                </a:solidFill>
+                <a:latin typeface="Calibri"/>
+              </a:rPr>
+              <a:t>Nearly incompressible fluid</a:t>
+            </a:r>
+          </a:p>
+          <a:p>
+            <a:pPr marL="274320" indent="-274320">
+              <a:spcAft>
+                <a:spcPts val="990"/>
+              </a:spcAft>
+              <a:buClr>
+                <a:srgbClr val="0645AD"/>
+              </a:buClr>
+              <a:buFont typeface="Arial"/>
+              <a:buChar char="•"/>
+            </a:pPr>
+            <a:r>
+              <a:rPr sz="2200" b="0">
+                <a:solidFill>
+                  <a:srgbClr val="202122"/>
+                </a:solidFill>
+                <a:latin typeface="Calibri"/>
+              </a:rPr>
+              <a:t>Very high forces, precise control</a:t>
+            </a:r>
+          </a:p>
+          <a:p>
+            <a:pPr marL="274320" indent="-274320">
+              <a:spcAft>
+                <a:spcPts val="990"/>
+              </a:spcAft>
+              <a:buClr>
+                <a:srgbClr val="0645AD"/>
+              </a:buClr>
+              <a:buFont typeface="Arial"/>
+              <a:buChar char="•"/>
+            </a:pPr>
+            <a:r>
+              <a:rPr sz="2200" b="0">
+                <a:solidFill>
+                  <a:srgbClr val="202122"/>
+                </a:solidFill>
+                <a:latin typeface="Calibri"/>
+              </a:rPr>
+              <a:t>Risk of leaks and fire from oil</a:t>
+            </a:r>
+          </a:p>
+          <a:p>
+            <a:pPr marL="274320" indent="-274320">
+              <a:spcAft>
+                <a:spcPts val="990"/>
+              </a:spcAft>
+              <a:buClr>
+                <a:srgbClr val="0645AD"/>
+              </a:buClr>
+              <a:buFont typeface="Arial"/>
+              <a:buChar char="•"/>
+            </a:pPr>
+            <a:r>
+              <a:rPr sz="2200" b="0">
+                <a:solidFill>
+                  <a:srgbClr val="202122"/>
+                </a:solidFill>
+                <a:latin typeface="Calibri"/>
+              </a:rPr>
+              <a:t>e.g. excavators, presses</a:t>
+            </a:r>
+          </a:p>
+        </p:txBody>
+      </p:sp>
+      <p:sp>
+        <p:nvSpPr>
+          <p:cNvPr id="10" name="Rounded Rectangle 9"/>
+          <p:cNvSpPr/>
+          <p:nvPr/>
+        </p:nvSpPr>
+        <p:spPr>
+          <a:xfrm>
+            <a:off x="6278727" y="1600200"/>
+            <a:ext cx="5364327" cy="640080"/>
+          </a:xfrm>
+          <a:prstGeom prst="roundRect">
+            <a:avLst>
+              <a:gd name="adj" fmla="val 15000"/>
+            </a:avLst>
+          </a:prstGeom>
+          <a:solidFill>
+            <a:srgbClr val="0645AD"/>
+          </a:solidFill>
+          <a:ln>
+            <a:noFill/>
+          </a:ln>
+          <a:effectLst/>
+        </p:spPr>
+        <p:style>
+          <a:lnRef idx="1">
+            <a:schemeClr val="accent1"/>
+          </a:lnRef>
+          <a:fillRef idx="3">
+            <a:schemeClr val="accent1"/>
+          </a:fillRef>
+          <a:effectRef idx="2">
+            <a:schemeClr val="accent1"/>
+          </a:effectRef>
+          <a:fontRef idx="minor">
+            <a:schemeClr val="lt1"/>
+          </a:fontRef>
+        </p:style>
+        <p:txBody>
+          <a:bodyPr rtlCol="0" anchor="ctr"/>
+          <a:lstStyle/>
+          <a:p/>
+        </p:txBody>
+      </p:sp>
+      <p:sp>
+        <p:nvSpPr>
+          <p:cNvPr id="11" name="TextBox 10"/>
+          <p:cNvSpPr txBox="1"/>
+          <p:nvPr/>
+        </p:nvSpPr>
+        <p:spPr>
+          <a:xfrm>
+            <a:off x="6507327" y="1600200"/>
+            <a:ext cx="4907127" cy="640080"/>
+          </a:xfrm>
+          <a:prstGeom prst="rect">
+            <a:avLst/>
+          </a:prstGeom>
+          <a:noFill/>
+        </p:spPr>
+        <p:txBody>
+          <a:bodyPr wrap="square" anchor="ctr" lIns="0" rIns="0" tIns="0" bIns="0"/>
+          <a:lstStyle/>
+          <a:p>
+            <a:pPr algn="l"/>
+            <a:r>
+              <a:rPr sz="2000" b="1" i="0">
+                <a:solidFill>
+                  <a:srgbClr val="FFFFFF"/>
+                </a:solidFill>
+                <a:latin typeface="Calibri"/>
+              </a:rPr>
+              <a:t>Pneumatics (air)</a:t>
+            </a:r>
+          </a:p>
+        </p:txBody>
+      </p:sp>
+      <p:sp>
+        <p:nvSpPr>
+          <p:cNvPr id="12" name="Rounded Rectangle 11"/>
+          <p:cNvSpPr/>
+          <p:nvPr/>
+        </p:nvSpPr>
+        <p:spPr>
+          <a:xfrm>
+            <a:off x="6278727" y="2377440"/>
+            <a:ext cx="5364327" cy="3794760"/>
+          </a:xfrm>
+          <a:prstGeom prst="roundRect">
+            <a:avLst>
+              <a:gd name="adj" fmla="val 4000"/>
+            </a:avLst>
+          </a:prstGeom>
+          <a:solidFill>
+            <a:srgbClr val="EAF3FF"/>
+          </a:solidFill>
+          <a:ln>
+            <a:noFill/>
+          </a:ln>
+          <a:effectLst/>
+        </p:spPr>
+        <p:style>
+          <a:lnRef idx="1">
+            <a:schemeClr val="accent1"/>
+          </a:lnRef>
+          <a:fillRef idx="3">
+            <a:schemeClr val="accent1"/>
+          </a:fillRef>
+          <a:effectRef idx="2">
+            <a:schemeClr val="accent1"/>
+          </a:effectRef>
+          <a:fontRef idx="minor">
+            <a:schemeClr val="lt1"/>
+          </a:fontRef>
+        </p:style>
+        <p:txBody>
+          <a:bodyPr rtlCol="0" anchor="ctr"/>
+          <a:lstStyle/>
+          <a:p/>
+        </p:txBody>
+      </p:sp>
+      <p:sp>
+        <p:nvSpPr>
+          <p:cNvPr id="13" name="TextBox 12"/>
+          <p:cNvSpPr txBox="1"/>
+          <p:nvPr/>
+        </p:nvSpPr>
+        <p:spPr>
+          <a:xfrm>
+            <a:off x="6553047" y="2606040"/>
+            <a:ext cx="4815687" cy="3337560"/>
+          </a:xfrm>
+          <a:prstGeom prst="rect">
+            <a:avLst/>
+          </a:prstGeom>
+          <a:noFill/>
+        </p:spPr>
+        <p:txBody>
+          <a:bodyPr wrap="square" lIns="0" rIns="0" tIns="0" bIns="0">
+            <a:spAutoFit/>
+          </a:bodyPr>
+          <a:lstStyle/>
+          <a:p>
+            <a:pPr marL="274320" indent="-274320">
+              <a:spcAft>
+                <a:spcPts val="990"/>
+              </a:spcAft>
+              <a:buClr>
+                <a:srgbClr val="0645AD"/>
+              </a:buClr>
+              <a:buFont typeface="Arial"/>
+              <a:buChar char="•"/>
+            </a:pPr>
+            <a:r>
+              <a:rPr sz="2200" b="0">
+                <a:solidFill>
+                  <a:srgbClr val="202122"/>
+                </a:solidFill>
+                <a:latin typeface="Calibri"/>
+              </a:rPr>
+              <a:t>Compressible, so springy</a:t>
+            </a:r>
+          </a:p>
+          <a:p>
+            <a:pPr marL="274320" indent="-274320">
+              <a:spcAft>
+                <a:spcPts val="990"/>
+              </a:spcAft>
+              <a:buClr>
+                <a:srgbClr val="0645AD"/>
+              </a:buClr>
+              <a:buFont typeface="Arial"/>
+              <a:buChar char="•"/>
+            </a:pPr>
+            <a:r>
+              <a:rPr sz="2200" b="0">
+                <a:solidFill>
+                  <a:srgbClr val="202122"/>
+                </a:solidFill>
+                <a:latin typeface="Calibri"/>
+              </a:rPr>
+              <a:t>Fast, clean and cheap</a:t>
+            </a:r>
+          </a:p>
+          <a:p>
+            <a:pPr marL="274320" indent="-274320">
+              <a:spcAft>
+                <a:spcPts val="990"/>
+              </a:spcAft>
+              <a:buClr>
+                <a:srgbClr val="0645AD"/>
+              </a:buClr>
+              <a:buFont typeface="Arial"/>
+              <a:buChar char="•"/>
+            </a:pPr>
+            <a:r>
+              <a:rPr sz="2200" b="0">
+                <a:solidFill>
+                  <a:srgbClr val="202122"/>
+                </a:solidFill>
+                <a:latin typeface="Calibri"/>
+              </a:rPr>
+              <a:t>Lower forces, less precise</a:t>
+            </a:r>
+          </a:p>
+          <a:p>
+            <a:pPr marL="274320" indent="-274320">
+              <a:spcAft>
+                <a:spcPts val="990"/>
+              </a:spcAft>
+              <a:buClr>
+                <a:srgbClr val="0645AD"/>
+              </a:buClr>
+              <a:buFont typeface="Arial"/>
+              <a:buChar char="•"/>
+            </a:pPr>
+            <a:r>
+              <a:rPr sz="2200" b="0">
+                <a:solidFill>
+                  <a:srgbClr val="202122"/>
+                </a:solidFill>
+                <a:latin typeface="Calibri"/>
+              </a:rPr>
+              <a:t>e.g. pick-and-place, doors on buses</a:t>
+            </a:r>
+          </a:p>
+        </p:txBody>
+      </p:sp>
+    </p:spTree>
+  </p:cSld>
+  <p:clrMapOvr>
+    <a:masterClrMapping/>
+  </p:clrMapOvr>
+</p:sld>
+</file>
+
+<file path=ppt/slides/slide11.xml><?xml version="1.0" encoding="utf-8"?>
+<p:sld xmlns:a="http://schemas.openxmlformats.org/drawingml/2006/main" xmlns:p="http://schemas.openxmlformats.org/presentationml/2006/main" xmlns:r="http://schemas.openxmlformats.org/officeDocument/2006/relationships">
+  <p:cSld>
+    <p:bg>
+      <p:bgPr>
+        <a:solidFill>
+          <a:srgbClr val="FFFFFF"/>
+        </a:solidFill>
+        <a:effectLst/>
+      </p:bgPr>
+    </p:bg>
+    <p:spTree>
+      <p:nvGrpSpPr>
+        <p:cNvPr id="1" name=""/>
+        <p:cNvGrpSpPr/>
+        <p:nvPr/>
+      </p:nvGrpSpPr>
+      <p:grpSpPr/>
+      <p:sp>
+        <p:nvSpPr>
+          <p:cNvPr id="2" name="TextBox 1"/>
+          <p:cNvSpPr txBox="1"/>
+          <p:nvPr/>
+        </p:nvSpPr>
+        <p:spPr>
+          <a:xfrm>
+            <a:off x="548640" y="320040"/>
+            <a:ext cx="11094415" cy="274320"/>
+          </a:xfrm>
+          <a:prstGeom prst="rect">
+            <a:avLst/>
+          </a:prstGeom>
+          <a:noFill/>
+        </p:spPr>
+        <p:txBody>
+          <a:bodyPr wrap="square" anchor="t" lIns="0" rIns="0" tIns="0" bIns="0"/>
+          <a:lstStyle/>
+          <a:p>
+            <a:pPr algn="l"/>
+            <a:r>
+              <a:rPr sz="1100" b="1" i="0">
+                <a:solidFill>
+                  <a:srgbClr val="54595D"/>
+                </a:solidFill>
+                <a:latin typeface="Calibri"/>
+              </a:rPr>
+              <a:t>ENGINEERING CORE  ·  Core topic 9</a:t>
+            </a:r>
+          </a:p>
+        </p:txBody>
+      </p:sp>
+      <p:sp>
+        <p:nvSpPr>
+          <p:cNvPr id="3" name="TextBox 2"/>
+          <p:cNvSpPr txBox="1"/>
+          <p:nvPr/>
+        </p:nvSpPr>
+        <p:spPr>
+          <a:xfrm>
+            <a:off x="548640" y="566928"/>
+            <a:ext cx="11094415" cy="822960"/>
+          </a:xfrm>
+          <a:prstGeom prst="rect">
+            <a:avLst/>
+          </a:prstGeom>
+          <a:noFill/>
+        </p:spPr>
+        <p:txBody>
+          <a:bodyPr wrap="square" anchor="ctr" lIns="0" rIns="0" tIns="0" bIns="0"/>
+          <a:lstStyle/>
+          <a:p>
+            <a:pPr algn="l"/>
+            <a:r>
+              <a:rPr sz="3200" b="1" i="0">
+                <a:solidFill>
+                  <a:srgbClr val="03306E"/>
+                </a:solidFill>
+                <a:latin typeface="Cambria"/>
+              </a:rPr>
+              <a:t>Quick check: Hydraulics and pneumatics</a:t>
+            </a:r>
+          </a:p>
+        </p:txBody>
+      </p:sp>
+      <p:sp>
+        <p:nvSpPr>
+          <p:cNvPr id="4" name="TextBox 3"/>
+          <p:cNvSpPr txBox="1"/>
+          <p:nvPr/>
+        </p:nvSpPr>
+        <p:spPr>
+          <a:xfrm>
+            <a:off x="548640" y="6446520"/>
+            <a:ext cx="8229600" cy="274320"/>
+          </a:xfrm>
+          <a:prstGeom prst="rect">
+            <a:avLst/>
+          </a:prstGeom>
+          <a:noFill/>
+        </p:spPr>
+        <p:txBody>
+          <a:bodyPr wrap="square" anchor="t" lIns="0" rIns="0" tIns="0" bIns="0"/>
+          <a:lstStyle/>
+          <a:p>
+            <a:pPr algn="l"/>
+            <a:r>
+              <a:rPr sz="1000" b="0" i="0">
+                <a:solidFill>
+                  <a:srgbClr val="54595D"/>
+                </a:solidFill>
+                <a:latin typeface="Calibri"/>
+              </a:rPr>
+              <a:t>Design and Development for Engineering and Manufacturing T Level  ·  Mechatronics, PLCs, Hydraulics and Pneumatics</a:t>
+            </a:r>
+          </a:p>
+        </p:txBody>
+      </p:sp>
+      <p:sp>
+        <p:nvSpPr>
+          <p:cNvPr id="5" name="TextBox 4"/>
+          <p:cNvSpPr txBox="1"/>
+          <p:nvPr/>
+        </p:nvSpPr>
+        <p:spPr>
+          <a:xfrm>
+            <a:off x="10728655" y="6446520"/>
+            <a:ext cx="914400" cy="274320"/>
+          </a:xfrm>
+          <a:prstGeom prst="rect">
+            <a:avLst/>
+          </a:prstGeom>
+          <a:noFill/>
+        </p:spPr>
+        <p:txBody>
+          <a:bodyPr wrap="square" anchor="t" lIns="0" rIns="0" tIns="0" bIns="0"/>
+          <a:lstStyle/>
+          <a:p>
+            <a:pPr algn="r"/>
+            <a:r>
+              <a:rPr sz="1000" b="0" i="0">
+                <a:solidFill>
+                  <a:srgbClr val="54595D"/>
+                </a:solidFill>
+                <a:latin typeface="Calibri"/>
+              </a:rPr>
+              <a:t>11</a:t>
+            </a:r>
+          </a:p>
+        </p:txBody>
+      </p:sp>
+      <p:sp>
+        <p:nvSpPr>
+          <p:cNvPr id="6" name="Oval 5"/>
+          <p:cNvSpPr/>
+          <p:nvPr/>
+        </p:nvSpPr>
+        <p:spPr>
+          <a:xfrm>
+            <a:off x="548640" y="1691640"/>
+            <a:ext cx="502920" cy="502920"/>
+          </a:xfrm>
+          <a:prstGeom prst="ellipse">
+            <a:avLst/>
+          </a:prstGeom>
+          <a:solidFill>
+            <a:srgbClr val="F2B705"/>
+          </a:solidFill>
+          <a:ln>
+            <a:noFill/>
+          </a:ln>
+          <a:effectLst/>
+        </p:spPr>
+        <p:style>
+          <a:lnRef idx="1">
+            <a:schemeClr val="accent1"/>
+          </a:lnRef>
+          <a:fillRef idx="3">
+            <a:schemeClr val="accent1"/>
+          </a:fillRef>
+          <a:effectRef idx="2">
+            <a:schemeClr val="accent1"/>
+          </a:effectRef>
+          <a:fontRef idx="minor">
+            <a:schemeClr val="lt1"/>
+          </a:fontRef>
+        </p:style>
+        <p:txBody>
+          <a:bodyPr rtlCol="0" anchor="ctr" lIns="0" rIns="0" tIns="0" bIns="0"/>
+          <a:lstStyle/>
+          <a:p>
+            <a:pPr algn="ctr"/>
+            <a:r>
+              <a:rPr sz="1600" b="1">
+                <a:solidFill>
+                  <a:srgbClr val="202122"/>
+                </a:solidFill>
+                <a:latin typeface="Calibri"/>
+              </a:rPr>
+              <a:t>1</a:t>
+            </a:r>
+          </a:p>
+        </p:txBody>
+      </p:sp>
+      <p:sp>
+        <p:nvSpPr>
+          <p:cNvPr id="7" name="TextBox 6"/>
+          <p:cNvSpPr txBox="1"/>
+          <p:nvPr/>
+        </p:nvSpPr>
+        <p:spPr>
+          <a:xfrm>
+            <a:off x="1371600" y="1645920"/>
+            <a:ext cx="10271455" cy="1188720"/>
+          </a:xfrm>
+          <a:prstGeom prst="rect">
+            <a:avLst/>
+          </a:prstGeom>
+          <a:noFill/>
+        </p:spPr>
+        <p:txBody>
+          <a:bodyPr wrap="square" anchor="t" lIns="0" rIns="0" tIns="0" bIns="0"/>
+          <a:lstStyle/>
+          <a:p>
+            <a:pPr algn="l"/>
+            <a:r>
+              <a:rPr sz="2400" b="0" i="0">
+                <a:solidFill>
+                  <a:srgbClr val="202122"/>
+                </a:solidFill>
+                <a:latin typeface="Calibri"/>
+              </a:rPr>
+              <a:t>Which system uses nearly incompressible fluid?</a:t>
+            </a:r>
+          </a:p>
+        </p:txBody>
+      </p:sp>
+      <p:sp>
+        <p:nvSpPr>
+          <p:cNvPr id="8" name="Oval 7"/>
+          <p:cNvSpPr/>
+          <p:nvPr/>
+        </p:nvSpPr>
+        <p:spPr>
+          <a:xfrm>
+            <a:off x="548640" y="3108960"/>
+            <a:ext cx="502920" cy="502920"/>
+          </a:xfrm>
+          <a:prstGeom prst="ellipse">
+            <a:avLst/>
+          </a:prstGeom>
+          <a:solidFill>
+            <a:srgbClr val="F2B705"/>
+          </a:solidFill>
+          <a:ln>
+            <a:noFill/>
+          </a:ln>
+          <a:effectLst/>
+        </p:spPr>
+        <p:style>
+          <a:lnRef idx="1">
+            <a:schemeClr val="accent1"/>
+          </a:lnRef>
+          <a:fillRef idx="3">
+            <a:schemeClr val="accent1"/>
+          </a:fillRef>
+          <a:effectRef idx="2">
+            <a:schemeClr val="accent1"/>
+          </a:effectRef>
+          <a:fontRef idx="minor">
+            <a:schemeClr val="lt1"/>
+          </a:fontRef>
+        </p:style>
+        <p:txBody>
+          <a:bodyPr rtlCol="0" anchor="ctr" lIns="0" rIns="0" tIns="0" bIns="0"/>
+          <a:lstStyle/>
+          <a:p>
+            <a:pPr algn="ctr"/>
+            <a:r>
+              <a:rPr sz="1600" b="1">
+                <a:solidFill>
+                  <a:srgbClr val="202122"/>
+                </a:solidFill>
+                <a:latin typeface="Calibri"/>
+              </a:rPr>
+              <a:t>2</a:t>
+            </a:r>
+          </a:p>
+        </p:txBody>
+      </p:sp>
+      <p:sp>
+        <p:nvSpPr>
+          <p:cNvPr id="9" name="TextBox 8"/>
+          <p:cNvSpPr txBox="1"/>
+          <p:nvPr/>
+        </p:nvSpPr>
+        <p:spPr>
+          <a:xfrm>
+            <a:off x="1371600" y="3063240"/>
+            <a:ext cx="10271455" cy="1188720"/>
+          </a:xfrm>
+          <a:prstGeom prst="rect">
+            <a:avLst/>
+          </a:prstGeom>
+          <a:noFill/>
+        </p:spPr>
+        <p:txBody>
+          <a:bodyPr wrap="square" anchor="t" lIns="0" rIns="0" tIns="0" bIns="0"/>
+          <a:lstStyle/>
+          <a:p>
+            <a:pPr algn="l"/>
+            <a:r>
+              <a:rPr sz="2400" b="0" i="0">
+                <a:solidFill>
+                  <a:srgbClr val="202122"/>
+                </a:solidFill>
+                <a:latin typeface="Calibri"/>
+              </a:rPr>
+              <a:t>Give one advantage of pneumatics.</a:t>
+            </a:r>
+          </a:p>
+        </p:txBody>
+      </p:sp>
+      <p:sp>
+        <p:nvSpPr>
+          <p:cNvPr id="10" name="Oval 9"/>
+          <p:cNvSpPr/>
+          <p:nvPr/>
+        </p:nvSpPr>
+        <p:spPr>
+          <a:xfrm>
+            <a:off x="548640" y="4526280"/>
+            <a:ext cx="502920" cy="502920"/>
+          </a:xfrm>
+          <a:prstGeom prst="ellipse">
+            <a:avLst/>
+          </a:prstGeom>
+          <a:solidFill>
+            <a:srgbClr val="F2B705"/>
+          </a:solidFill>
+          <a:ln>
+            <a:noFill/>
+          </a:ln>
+          <a:effectLst/>
+        </p:spPr>
+        <p:style>
+          <a:lnRef idx="1">
+            <a:schemeClr val="accent1"/>
+          </a:lnRef>
+          <a:fillRef idx="3">
+            <a:schemeClr val="accent1"/>
+          </a:fillRef>
+          <a:effectRef idx="2">
+            <a:schemeClr val="accent1"/>
+          </a:effectRef>
+          <a:fontRef idx="minor">
+            <a:schemeClr val="lt1"/>
+          </a:fontRef>
+        </p:style>
+        <p:txBody>
+          <a:bodyPr rtlCol="0" anchor="ctr" lIns="0" rIns="0" tIns="0" bIns="0"/>
+          <a:lstStyle/>
+          <a:p>
+            <a:pPr algn="ctr"/>
+            <a:r>
+              <a:rPr sz="1600" b="1">
+                <a:solidFill>
+                  <a:srgbClr val="202122"/>
+                </a:solidFill>
+                <a:latin typeface="Calibri"/>
+              </a:rPr>
+              <a:t>3</a:t>
+            </a:r>
+          </a:p>
+        </p:txBody>
+      </p:sp>
+      <p:sp>
+        <p:nvSpPr>
+          <p:cNvPr id="11" name="TextBox 10"/>
+          <p:cNvSpPr txBox="1"/>
+          <p:nvPr/>
+        </p:nvSpPr>
+        <p:spPr>
+          <a:xfrm>
+            <a:off x="1371600" y="4480560"/>
+            <a:ext cx="10271455" cy="1188720"/>
+          </a:xfrm>
+          <a:prstGeom prst="rect">
+            <a:avLst/>
+          </a:prstGeom>
+          <a:noFill/>
+        </p:spPr>
+        <p:txBody>
+          <a:bodyPr wrap="square" anchor="t" lIns="0" rIns="0" tIns="0" bIns="0"/>
+          <a:lstStyle/>
+          <a:p>
+            <a:pPr algn="l"/>
+            <a:r>
+              <a:rPr sz="2400" b="0" i="0">
+                <a:solidFill>
+                  <a:srgbClr val="202122"/>
+                </a:solidFill>
+                <a:latin typeface="Calibri"/>
+              </a:rPr>
+              <a:t>Why is pneumatic positioning less precise?</a:t>
+            </a:r>
+          </a:p>
+        </p:txBody>
+      </p:sp>
+      <p:sp>
+        <p:nvSpPr>
+          <p:cNvPr id="12" name="TextBox 11"/>
+          <p:cNvSpPr txBox="1"/>
+          <p:nvPr/>
+        </p:nvSpPr>
+        <p:spPr>
+          <a:xfrm>
+            <a:off x="548640" y="5852160"/>
+            <a:ext cx="11094415" cy="365760"/>
+          </a:xfrm>
+          <a:prstGeom prst="rect">
+            <a:avLst/>
+          </a:prstGeom>
+          <a:noFill/>
+        </p:spPr>
+        <p:txBody>
+          <a:bodyPr wrap="square" anchor="t" lIns="0" rIns="0" tIns="0" bIns="0"/>
+          <a:lstStyle/>
+          <a:p>
+            <a:pPr algn="l"/>
+            <a:r>
+              <a:rPr sz="1300" b="0" i="1">
+                <a:solidFill>
+                  <a:srgbClr val="54595D"/>
+                </a:solidFill>
+                <a:latin typeface="Calibri"/>
+              </a:rPr>
+              <a:t>Answer on mini whiteboards or in your book. Answers are in the speaker notes.</a:t>
+            </a:r>
+          </a:p>
+        </p:txBody>
+      </p:sp>
+    </p:spTree>
+  </p:cSld>
+  <p:clrMapOvr>
+    <a:masterClrMapping/>
+  </p:clrMapOvr>
+</p:sld>
+</file>
+
+<file path=ppt/slides/slide12.xml><?xml version="1.0" encoding="utf-8"?>
+<p:sld xmlns:a="http://schemas.openxmlformats.org/drawingml/2006/main" xmlns:p="http://schemas.openxmlformats.org/presentationml/2006/main" xmlns:r="http://schemas.openxmlformats.org/officeDocument/2006/relationships">
+  <p:cSld>
+    <p:bg>
+      <p:bgPr>
+        <a:solidFill>
+          <a:srgbClr val="FFFFFF"/>
+        </a:solidFill>
+        <a:effectLst/>
+      </p:bgPr>
+    </p:bg>
+    <p:spTree>
+      <p:nvGrpSpPr>
+        <p:cNvPr id="1" name=""/>
+        <p:cNvGrpSpPr/>
+        <p:nvPr/>
+      </p:nvGrpSpPr>
+      <p:grpSpPr/>
+      <p:sp>
+        <p:nvSpPr>
+          <p:cNvPr id="2" name="TextBox 1"/>
+          <p:cNvSpPr txBox="1"/>
+          <p:nvPr/>
+        </p:nvSpPr>
+        <p:spPr>
+          <a:xfrm>
+            <a:off x="548640" y="320040"/>
+            <a:ext cx="11094415" cy="274320"/>
+          </a:xfrm>
+          <a:prstGeom prst="rect">
+            <a:avLst/>
+          </a:prstGeom>
+          <a:noFill/>
+        </p:spPr>
+        <p:txBody>
+          <a:bodyPr wrap="square" anchor="t" lIns="0" rIns="0" tIns="0" bIns="0"/>
+          <a:lstStyle/>
+          <a:p>
+            <a:pPr algn="l"/>
+            <a:r>
+              <a:rPr sz="1100" b="1" i="0">
+                <a:solidFill>
+                  <a:srgbClr val="54595D"/>
+                </a:solidFill>
+                <a:latin typeface="Calibri"/>
+              </a:rPr>
+              <a:t>ENGINEERING CORE  ·  Core topic 9</a:t>
+            </a:r>
+          </a:p>
+        </p:txBody>
+      </p:sp>
+      <p:sp>
+        <p:nvSpPr>
+          <p:cNvPr id="3" name="TextBox 2"/>
+          <p:cNvSpPr txBox="1"/>
+          <p:nvPr/>
+        </p:nvSpPr>
+        <p:spPr>
+          <a:xfrm>
+            <a:off x="548640" y="566928"/>
+            <a:ext cx="11094415" cy="822960"/>
+          </a:xfrm>
+          <a:prstGeom prst="rect">
+            <a:avLst/>
+          </a:prstGeom>
+          <a:noFill/>
+        </p:spPr>
+        <p:txBody>
+          <a:bodyPr wrap="square" anchor="ctr" lIns="0" rIns="0" tIns="0" bIns="0"/>
+          <a:lstStyle/>
+          <a:p>
+            <a:pPr algn="l"/>
+            <a:r>
+              <a:rPr sz="3200" b="1" i="0">
+                <a:solidFill>
+                  <a:srgbClr val="03306E"/>
+                </a:solidFill>
+                <a:latin typeface="Cambria"/>
+              </a:rPr>
+              <a:t>Check your understanding</a:t>
+            </a:r>
+          </a:p>
+        </p:txBody>
+      </p:sp>
+      <p:sp>
+        <p:nvSpPr>
+          <p:cNvPr id="4" name="TextBox 3"/>
+          <p:cNvSpPr txBox="1"/>
+          <p:nvPr/>
+        </p:nvSpPr>
+        <p:spPr>
+          <a:xfrm>
+            <a:off x="548640" y="6446520"/>
+            <a:ext cx="8229600" cy="274320"/>
+          </a:xfrm>
+          <a:prstGeom prst="rect">
+            <a:avLst/>
+          </a:prstGeom>
+          <a:noFill/>
+        </p:spPr>
+        <p:txBody>
+          <a:bodyPr wrap="square" anchor="t" lIns="0" rIns="0" tIns="0" bIns="0"/>
+          <a:lstStyle/>
+          <a:p>
+            <a:pPr algn="l"/>
+            <a:r>
+              <a:rPr sz="1000" b="0" i="0">
+                <a:solidFill>
+                  <a:srgbClr val="54595D"/>
+                </a:solidFill>
+                <a:latin typeface="Calibri"/>
+              </a:rPr>
+              <a:t>Design and Development for Engineering and Manufacturing T Level  ·  Mechatronics, PLCs, Hydraulics and Pneumatics</a:t>
+            </a:r>
+          </a:p>
+        </p:txBody>
+      </p:sp>
+      <p:sp>
+        <p:nvSpPr>
+          <p:cNvPr id="5" name="TextBox 4"/>
+          <p:cNvSpPr txBox="1"/>
+          <p:nvPr/>
+        </p:nvSpPr>
+        <p:spPr>
+          <a:xfrm>
+            <a:off x="10728655" y="6446520"/>
+            <a:ext cx="914400" cy="274320"/>
+          </a:xfrm>
+          <a:prstGeom prst="rect">
+            <a:avLst/>
+          </a:prstGeom>
+          <a:noFill/>
+        </p:spPr>
+        <p:txBody>
+          <a:bodyPr wrap="square" anchor="t" lIns="0" rIns="0" tIns="0" bIns="0"/>
+          <a:lstStyle/>
+          <a:p>
+            <a:pPr algn="r"/>
+            <a:r>
+              <a:rPr sz="1000" b="0" i="0">
+                <a:solidFill>
+                  <a:srgbClr val="54595D"/>
+                </a:solidFill>
+                <a:latin typeface="Calibri"/>
+              </a:rPr>
+              <a:t>12</a:t>
+            </a:r>
+          </a:p>
+        </p:txBody>
+      </p:sp>
+      <p:sp>
+        <p:nvSpPr>
+          <p:cNvPr id="6" name="Oval 5"/>
+          <p:cNvSpPr/>
+          <p:nvPr/>
+        </p:nvSpPr>
+        <p:spPr>
+          <a:xfrm>
+            <a:off x="548640" y="1618488"/>
+            <a:ext cx="411480" cy="411480"/>
+          </a:xfrm>
+          <a:prstGeom prst="ellipse">
+            <a:avLst/>
+          </a:prstGeom>
+          <a:solidFill>
+            <a:srgbClr val="F2B705"/>
+          </a:solidFill>
+          <a:ln>
+            <a:noFill/>
+          </a:ln>
+          <a:effectLst/>
+        </p:spPr>
+        <p:style>
+          <a:lnRef idx="1">
+            <a:schemeClr val="accent1"/>
+          </a:lnRef>
+          <a:fillRef idx="3">
+            <a:schemeClr val="accent1"/>
+          </a:fillRef>
+          <a:effectRef idx="2">
+            <a:schemeClr val="accent1"/>
+          </a:effectRef>
+          <a:fontRef idx="minor">
+            <a:schemeClr val="lt1"/>
+          </a:fontRef>
+        </p:style>
+        <p:txBody>
+          <a:bodyPr rtlCol="0" anchor="ctr" lIns="0" rIns="0" tIns="0" bIns="0"/>
+          <a:lstStyle/>
+          <a:p>
+            <a:pPr algn="ctr"/>
+            <a:r>
+              <a:rPr sz="1400" b="1">
+                <a:solidFill>
+                  <a:srgbClr val="202122"/>
+                </a:solidFill>
+                <a:latin typeface="Calibri"/>
+              </a:rPr>
+              <a:t>1</a:t>
+            </a:r>
+          </a:p>
+        </p:txBody>
+      </p:sp>
+      <p:sp>
+        <p:nvSpPr>
+          <p:cNvPr id="7" name="TextBox 6"/>
+          <p:cNvSpPr txBox="1"/>
+          <p:nvPr/>
+        </p:nvSpPr>
+        <p:spPr>
+          <a:xfrm>
+            <a:off x="1234440" y="1600200"/>
+            <a:ext cx="10408615" cy="1030986"/>
+          </a:xfrm>
+          <a:prstGeom prst="rect">
+            <a:avLst/>
+          </a:prstGeom>
+          <a:noFill/>
+        </p:spPr>
+        <p:txBody>
+          <a:bodyPr wrap="square" anchor="t" lIns="0" rIns="0" tIns="0" bIns="0"/>
+          <a:lstStyle/>
+          <a:p>
+            <a:pPr algn="l"/>
+            <a:r>
+              <a:rPr sz="2200" b="0" i="0">
+                <a:solidFill>
+                  <a:srgbClr val="202122"/>
+                </a:solidFill>
+                <a:latin typeface="Calibri"/>
+              </a:rPr>
+              <a:t>Name two electronic components in a mechatronic system.</a:t>
+            </a:r>
+          </a:p>
+        </p:txBody>
+      </p:sp>
+      <p:sp>
+        <p:nvSpPr>
+          <p:cNvPr id="8" name="Oval 7"/>
+          <p:cNvSpPr/>
+          <p:nvPr/>
+        </p:nvSpPr>
+        <p:spPr>
+          <a:xfrm>
+            <a:off x="548640" y="2814066"/>
+            <a:ext cx="411480" cy="411480"/>
+          </a:xfrm>
+          <a:prstGeom prst="ellipse">
+            <a:avLst/>
+          </a:prstGeom>
+          <a:solidFill>
+            <a:srgbClr val="F2B705"/>
+          </a:solidFill>
+          <a:ln>
+            <a:noFill/>
+          </a:ln>
+          <a:effectLst/>
+        </p:spPr>
+        <p:style>
+          <a:lnRef idx="1">
+            <a:schemeClr val="accent1"/>
+          </a:lnRef>
+          <a:fillRef idx="3">
+            <a:schemeClr val="accent1"/>
+          </a:fillRef>
+          <a:effectRef idx="2">
+            <a:schemeClr val="accent1"/>
+          </a:effectRef>
+          <a:fontRef idx="minor">
+            <a:schemeClr val="lt1"/>
+          </a:fontRef>
+        </p:style>
+        <p:txBody>
+          <a:bodyPr rtlCol="0" anchor="ctr" lIns="0" rIns="0" tIns="0" bIns="0"/>
+          <a:lstStyle/>
+          <a:p>
+            <a:pPr algn="ctr"/>
+            <a:r>
+              <a:rPr sz="1400" b="1">
+                <a:solidFill>
+                  <a:srgbClr val="202122"/>
+                </a:solidFill>
+                <a:latin typeface="Calibri"/>
+              </a:rPr>
+              <a:t>2</a:t>
+            </a:r>
+          </a:p>
+        </p:txBody>
+      </p:sp>
+      <p:sp>
+        <p:nvSpPr>
+          <p:cNvPr id="9" name="TextBox 8"/>
+          <p:cNvSpPr txBox="1"/>
+          <p:nvPr/>
+        </p:nvSpPr>
+        <p:spPr>
+          <a:xfrm>
+            <a:off x="1234440" y="2795778"/>
+            <a:ext cx="10408615" cy="1030986"/>
+          </a:xfrm>
+          <a:prstGeom prst="rect">
+            <a:avLst/>
+          </a:prstGeom>
+          <a:noFill/>
+        </p:spPr>
+        <p:txBody>
+          <a:bodyPr wrap="square" anchor="t" lIns="0" rIns="0" tIns="0" bIns="0"/>
+          <a:lstStyle/>
+          <a:p>
+            <a:pPr algn="l"/>
+            <a:r>
+              <a:rPr sz="2200" b="0" i="0">
+                <a:solidFill>
+                  <a:srgbClr val="202122"/>
+                </a:solidFill>
+                <a:latin typeface="Calibri"/>
+              </a:rPr>
+              <a:t>What is the difference between a unitary and a modular PLC?</a:t>
+            </a:r>
+          </a:p>
+        </p:txBody>
+      </p:sp>
+      <p:sp>
+        <p:nvSpPr>
+          <p:cNvPr id="10" name="Oval 9"/>
+          <p:cNvSpPr/>
+          <p:nvPr/>
+        </p:nvSpPr>
+        <p:spPr>
+          <a:xfrm>
+            <a:off x="548640" y="4009644"/>
+            <a:ext cx="411480" cy="411480"/>
+          </a:xfrm>
+          <a:prstGeom prst="ellipse">
+            <a:avLst/>
+          </a:prstGeom>
+          <a:solidFill>
+            <a:srgbClr val="F2B705"/>
+          </a:solidFill>
+          <a:ln>
+            <a:noFill/>
+          </a:ln>
+          <a:effectLst/>
+        </p:spPr>
+        <p:style>
+          <a:lnRef idx="1">
+            <a:schemeClr val="accent1"/>
+          </a:lnRef>
+          <a:fillRef idx="3">
+            <a:schemeClr val="accent1"/>
+          </a:fillRef>
+          <a:effectRef idx="2">
+            <a:schemeClr val="accent1"/>
+          </a:effectRef>
+          <a:fontRef idx="minor">
+            <a:schemeClr val="lt1"/>
+          </a:fontRef>
+        </p:style>
+        <p:txBody>
+          <a:bodyPr rtlCol="0" anchor="ctr" lIns="0" rIns="0" tIns="0" bIns="0"/>
+          <a:lstStyle/>
+          <a:p>
+            <a:pPr algn="ctr"/>
+            <a:r>
+              <a:rPr sz="1400" b="1">
+                <a:solidFill>
+                  <a:srgbClr val="202122"/>
+                </a:solidFill>
+                <a:latin typeface="Calibri"/>
+              </a:rPr>
+              <a:t>3</a:t>
+            </a:r>
+          </a:p>
+        </p:txBody>
+      </p:sp>
+      <p:sp>
+        <p:nvSpPr>
+          <p:cNvPr id="11" name="TextBox 10"/>
+          <p:cNvSpPr txBox="1"/>
+          <p:nvPr/>
+        </p:nvSpPr>
+        <p:spPr>
+          <a:xfrm>
+            <a:off x="1234440" y="3991356"/>
+            <a:ext cx="10408615" cy="1030986"/>
+          </a:xfrm>
+          <a:prstGeom prst="rect">
+            <a:avLst/>
+          </a:prstGeom>
+          <a:noFill/>
+        </p:spPr>
+        <p:txBody>
+          <a:bodyPr wrap="square" anchor="t" lIns="0" rIns="0" tIns="0" bIns="0"/>
+          <a:lstStyle/>
+          <a:p>
+            <a:pPr algn="l"/>
+            <a:r>
+              <a:rPr sz="2200" b="0" i="0">
+                <a:solidFill>
+                  <a:srgbClr val="202122"/>
+                </a:solidFill>
+                <a:latin typeface="Calibri"/>
+              </a:rPr>
+              <a:t>Which system uses a nearly incompressible fluid?</a:t>
+            </a:r>
+          </a:p>
+        </p:txBody>
+      </p:sp>
+      <p:sp>
+        <p:nvSpPr>
+          <p:cNvPr id="12" name="Oval 11"/>
+          <p:cNvSpPr/>
+          <p:nvPr/>
+        </p:nvSpPr>
+        <p:spPr>
+          <a:xfrm>
+            <a:off x="548640" y="5205221"/>
+            <a:ext cx="411480" cy="411480"/>
+          </a:xfrm>
+          <a:prstGeom prst="ellipse">
+            <a:avLst/>
+          </a:prstGeom>
+          <a:solidFill>
+            <a:srgbClr val="F2B705"/>
+          </a:solidFill>
+          <a:ln>
+            <a:noFill/>
+          </a:ln>
+          <a:effectLst/>
+        </p:spPr>
+        <p:style>
+          <a:lnRef idx="1">
+            <a:schemeClr val="accent1"/>
+          </a:lnRef>
+          <a:fillRef idx="3">
+            <a:schemeClr val="accent1"/>
+          </a:fillRef>
+          <a:effectRef idx="2">
+            <a:schemeClr val="accent1"/>
+          </a:effectRef>
+          <a:fontRef idx="minor">
+            <a:schemeClr val="lt1"/>
+          </a:fontRef>
+        </p:style>
+        <p:txBody>
+          <a:bodyPr rtlCol="0" anchor="ctr" lIns="0" rIns="0" tIns="0" bIns="0"/>
+          <a:lstStyle/>
+          <a:p>
+            <a:pPr algn="ctr"/>
+            <a:r>
+              <a:rPr sz="1400" b="1">
+                <a:solidFill>
+                  <a:srgbClr val="202122"/>
+                </a:solidFill>
+                <a:latin typeface="Calibri"/>
+              </a:rPr>
+              <a:t>4</a:t>
+            </a:r>
+          </a:p>
+        </p:txBody>
+      </p:sp>
+      <p:sp>
+        <p:nvSpPr>
+          <p:cNvPr id="13" name="TextBox 12"/>
+          <p:cNvSpPr txBox="1"/>
+          <p:nvPr/>
+        </p:nvSpPr>
+        <p:spPr>
+          <a:xfrm>
+            <a:off x="1234440" y="5186933"/>
+            <a:ext cx="10408615" cy="1030986"/>
+          </a:xfrm>
+          <a:prstGeom prst="rect">
+            <a:avLst/>
+          </a:prstGeom>
+          <a:noFill/>
+        </p:spPr>
+        <p:txBody>
+          <a:bodyPr wrap="square" anchor="t" lIns="0" rIns="0" tIns="0" bIns="0"/>
+          <a:lstStyle/>
+          <a:p>
+            <a:pPr algn="l"/>
+            <a:r>
+              <a:rPr sz="2200" b="0" i="0">
+                <a:solidFill>
+                  <a:srgbClr val="202122"/>
+                </a:solidFill>
+                <a:latin typeface="Calibri"/>
+              </a:rPr>
+              <a:t>Which motor moves in fixed steps?</a:t>
+            </a:r>
+          </a:p>
+        </p:txBody>
+      </p:sp>
+    </p:spTree>
+  </p:cSld>
+  <p:clrMapOvr>
+    <a:masterClrMapping/>
+  </p:clrMapOvr>
+</p:sld>
+</file>
+
+<file path=ppt/slides/slide13.xml><?xml version="1.0" encoding="utf-8"?>
+<p:sld xmlns:a="http://schemas.openxmlformats.org/drawingml/2006/main" xmlns:p="http://schemas.openxmlformats.org/presentationml/2006/main" xmlns:r="http://schemas.openxmlformats.org/officeDocument/2006/relationships">
+  <p:cSld>
+    <p:bg>
+      <p:bgPr>
+        <a:solidFill>
+          <a:srgbClr val="FFFFFF"/>
+        </a:solidFill>
+        <a:effectLst/>
+      </p:bgPr>
+    </p:bg>
+    <p:spTree>
+      <p:nvGrpSpPr>
+        <p:cNvPr id="1" name=""/>
+        <p:cNvGrpSpPr/>
+        <p:nvPr/>
+      </p:nvGrpSpPr>
+      <p:grpSpPr/>
+      <p:sp>
+        <p:nvSpPr>
+          <p:cNvPr id="2" name="TextBox 1"/>
+          <p:cNvSpPr txBox="1"/>
+          <p:nvPr/>
+        </p:nvSpPr>
+        <p:spPr>
+          <a:xfrm>
+            <a:off x="548640" y="320040"/>
+            <a:ext cx="11094415" cy="274320"/>
+          </a:xfrm>
+          <a:prstGeom prst="rect">
+            <a:avLst/>
+          </a:prstGeom>
+          <a:noFill/>
+        </p:spPr>
+        <p:txBody>
+          <a:bodyPr wrap="square" anchor="t" lIns="0" rIns="0" tIns="0" bIns="0"/>
+          <a:lstStyle/>
+          <a:p>
+            <a:pPr algn="l"/>
+            <a:r>
+              <a:rPr sz="1100" b="1" i="0">
+                <a:solidFill>
+                  <a:srgbClr val="54595D"/>
+                </a:solidFill>
+                <a:latin typeface="Calibri"/>
+              </a:rPr>
+              <a:t>ENGINEERING CORE  ·  Core topic 9</a:t>
+            </a:r>
+          </a:p>
+        </p:txBody>
+      </p:sp>
+      <p:sp>
+        <p:nvSpPr>
+          <p:cNvPr id="3" name="TextBox 2"/>
+          <p:cNvSpPr txBox="1"/>
+          <p:nvPr/>
+        </p:nvSpPr>
+        <p:spPr>
+          <a:xfrm>
+            <a:off x="548640" y="566928"/>
+            <a:ext cx="11094415" cy="822960"/>
+          </a:xfrm>
+          <a:prstGeom prst="rect">
+            <a:avLst/>
+          </a:prstGeom>
+          <a:noFill/>
+        </p:spPr>
+        <p:txBody>
+          <a:bodyPr wrap="square" anchor="ctr" lIns="0" rIns="0" tIns="0" bIns="0"/>
+          <a:lstStyle/>
+          <a:p>
+            <a:pPr algn="l"/>
+            <a:r>
+              <a:rPr sz="3200" b="1" i="0">
+                <a:solidFill>
+                  <a:srgbClr val="03306E"/>
+                </a:solidFill>
+                <a:latin typeface="Cambria"/>
+              </a:rPr>
+              <a:t>Answers</a:t>
+            </a:r>
+          </a:p>
+        </p:txBody>
+      </p:sp>
+      <p:sp>
+        <p:nvSpPr>
+          <p:cNvPr id="4" name="TextBox 3"/>
+          <p:cNvSpPr txBox="1"/>
+          <p:nvPr/>
+        </p:nvSpPr>
+        <p:spPr>
+          <a:xfrm>
+            <a:off x="548640" y="6446520"/>
+            <a:ext cx="8229600" cy="274320"/>
+          </a:xfrm>
+          <a:prstGeom prst="rect">
+            <a:avLst/>
+          </a:prstGeom>
+          <a:noFill/>
+        </p:spPr>
+        <p:txBody>
+          <a:bodyPr wrap="square" anchor="t" lIns="0" rIns="0" tIns="0" bIns="0"/>
+          <a:lstStyle/>
+          <a:p>
+            <a:pPr algn="l"/>
+            <a:r>
+              <a:rPr sz="1000" b="0" i="0">
+                <a:solidFill>
+                  <a:srgbClr val="54595D"/>
+                </a:solidFill>
+                <a:latin typeface="Calibri"/>
+              </a:rPr>
+              <a:t>Design and Development for Engineering and Manufacturing T Level  ·  Mechatronics, PLCs, Hydraulics and Pneumatics</a:t>
+            </a:r>
+          </a:p>
+        </p:txBody>
+      </p:sp>
+      <p:sp>
+        <p:nvSpPr>
+          <p:cNvPr id="5" name="TextBox 4"/>
+          <p:cNvSpPr txBox="1"/>
+          <p:nvPr/>
+        </p:nvSpPr>
+        <p:spPr>
+          <a:xfrm>
+            <a:off x="10728655" y="6446520"/>
+            <a:ext cx="914400" cy="274320"/>
+          </a:xfrm>
+          <a:prstGeom prst="rect">
+            <a:avLst/>
+          </a:prstGeom>
+          <a:noFill/>
+        </p:spPr>
+        <p:txBody>
+          <a:bodyPr wrap="square" anchor="t" lIns="0" rIns="0" tIns="0" bIns="0"/>
+          <a:lstStyle/>
+          <a:p>
+            <a:pPr algn="r"/>
+            <a:r>
+              <a:rPr sz="1000" b="0" i="0">
+                <a:solidFill>
+                  <a:srgbClr val="54595D"/>
+                </a:solidFill>
+                <a:latin typeface="Calibri"/>
+              </a:rPr>
+              <a:t>13</a:t>
+            </a:r>
+          </a:p>
+        </p:txBody>
+      </p:sp>
+      <p:sp>
+        <p:nvSpPr>
+          <p:cNvPr id="6" name="Oval 5"/>
+          <p:cNvSpPr/>
+          <p:nvPr/>
+        </p:nvSpPr>
+        <p:spPr>
+          <a:xfrm>
+            <a:off x="548640" y="1618488"/>
+            <a:ext cx="411480" cy="411480"/>
+          </a:xfrm>
+          <a:prstGeom prst="ellipse">
+            <a:avLst/>
+          </a:prstGeom>
+          <a:solidFill>
+            <a:srgbClr val="F2B705"/>
+          </a:solidFill>
+          <a:ln>
+            <a:noFill/>
+          </a:ln>
+          <a:effectLst/>
+        </p:spPr>
+        <p:style>
+          <a:lnRef idx="1">
+            <a:schemeClr val="accent1"/>
+          </a:lnRef>
+          <a:fillRef idx="3">
+            <a:schemeClr val="accent1"/>
+          </a:fillRef>
+          <a:effectRef idx="2">
+            <a:schemeClr val="accent1"/>
+          </a:effectRef>
+          <a:fontRef idx="minor">
+            <a:schemeClr val="lt1"/>
+          </a:fontRef>
+        </p:style>
+        <p:txBody>
+          <a:bodyPr rtlCol="0" anchor="ctr" lIns="0" rIns="0" tIns="0" bIns="0"/>
+          <a:lstStyle/>
+          <a:p>
+            <a:pPr algn="ctr"/>
+            <a:r>
+              <a:rPr sz="1400" b="1">
+                <a:solidFill>
+                  <a:srgbClr val="202122"/>
+                </a:solidFill>
+                <a:latin typeface="Calibri"/>
+              </a:rPr>
+              <a:t>1</a:t>
+            </a:r>
+          </a:p>
+        </p:txBody>
+      </p:sp>
+      <p:sp>
+        <p:nvSpPr>
+          <p:cNvPr id="7" name="TextBox 6"/>
+          <p:cNvSpPr txBox="1"/>
+          <p:nvPr/>
+        </p:nvSpPr>
+        <p:spPr>
+          <a:xfrm>
+            <a:off x="1234440" y="1600200"/>
+            <a:ext cx="10408615" cy="1030986"/>
+          </a:xfrm>
+          <a:prstGeom prst="rect">
+            <a:avLst/>
+          </a:prstGeom>
+          <a:noFill/>
+        </p:spPr>
+        <p:txBody>
+          <a:bodyPr wrap="square" anchor="t" lIns="0" rIns="0" tIns="0" bIns="0"/>
+          <a:lstStyle/>
+          <a:p>
+            <a:pPr algn="l"/>
+            <a:r>
+              <a:rPr sz="1800" b="0" i="0">
+                <a:solidFill>
+                  <a:srgbClr val="54595D"/>
+                </a:solidFill>
+                <a:latin typeface="Calibri"/>
+              </a:rPr>
+              <a:t>Name two electronic components in a mechatronic system.</a:t>
+            </a:r>
+          </a:p>
+          <a:p>
+            <a:r>
+              <a:rPr sz="1800" b="1">
+                <a:solidFill>
+                  <a:srgbClr val="03306E"/>
+                </a:solidFill>
+                <a:latin typeface="Calibri"/>
+              </a:rPr>
+              <a:t>Any two of: sensors, transducers, microprocessors, microcontrollers, actuators.</a:t>
+            </a:r>
+          </a:p>
+        </p:txBody>
+      </p:sp>
+      <p:sp>
+        <p:nvSpPr>
+          <p:cNvPr id="8" name="Oval 7"/>
+          <p:cNvSpPr/>
+          <p:nvPr/>
+        </p:nvSpPr>
+        <p:spPr>
+          <a:xfrm>
+            <a:off x="548640" y="2814066"/>
+            <a:ext cx="411480" cy="411480"/>
+          </a:xfrm>
+          <a:prstGeom prst="ellipse">
+            <a:avLst/>
+          </a:prstGeom>
+          <a:solidFill>
+            <a:srgbClr val="F2B705"/>
+          </a:solidFill>
+          <a:ln>
+            <a:noFill/>
+          </a:ln>
+          <a:effectLst/>
+        </p:spPr>
+        <p:style>
+          <a:lnRef idx="1">
+            <a:schemeClr val="accent1"/>
+          </a:lnRef>
+          <a:fillRef idx="3">
+            <a:schemeClr val="accent1"/>
+          </a:fillRef>
+          <a:effectRef idx="2">
+            <a:schemeClr val="accent1"/>
+          </a:effectRef>
+          <a:fontRef idx="minor">
+            <a:schemeClr val="lt1"/>
+          </a:fontRef>
+        </p:style>
+        <p:txBody>
+          <a:bodyPr rtlCol="0" anchor="ctr" lIns="0" rIns="0" tIns="0" bIns="0"/>
+          <a:lstStyle/>
+          <a:p>
+            <a:pPr algn="ctr"/>
+            <a:r>
+              <a:rPr sz="1400" b="1">
+                <a:solidFill>
+                  <a:srgbClr val="202122"/>
+                </a:solidFill>
+                <a:latin typeface="Calibri"/>
+              </a:rPr>
+              <a:t>2</a:t>
+            </a:r>
+          </a:p>
+        </p:txBody>
+      </p:sp>
+      <p:sp>
+        <p:nvSpPr>
+          <p:cNvPr id="9" name="TextBox 8"/>
+          <p:cNvSpPr txBox="1"/>
+          <p:nvPr/>
+        </p:nvSpPr>
+        <p:spPr>
+          <a:xfrm>
+            <a:off x="1234440" y="2795778"/>
+            <a:ext cx="10408615" cy="1030986"/>
+          </a:xfrm>
+          <a:prstGeom prst="rect">
+            <a:avLst/>
+          </a:prstGeom>
+          <a:noFill/>
+        </p:spPr>
+        <p:txBody>
+          <a:bodyPr wrap="square" anchor="t" lIns="0" rIns="0" tIns="0" bIns="0"/>
+          <a:lstStyle/>
+          <a:p>
+            <a:pPr algn="l"/>
+            <a:r>
+              <a:rPr sz="1800" b="0" i="0">
+                <a:solidFill>
+                  <a:srgbClr val="54595D"/>
+                </a:solidFill>
+                <a:latin typeface="Calibri"/>
+              </a:rPr>
+              <a:t>What is the difference between a unitary and a modular PLC?</a:t>
+            </a:r>
+          </a:p>
+          <a:p>
+            <a:r>
+              <a:rPr sz="1800" b="1">
+                <a:solidFill>
+                  <a:srgbClr val="03306E"/>
+                </a:solidFill>
+                <a:latin typeface="Calibri"/>
+              </a:rPr>
+              <a:t>A unitary PLC is a single fixed unit; a modular PLC is built from plug-in modules.</a:t>
+            </a:r>
+          </a:p>
+        </p:txBody>
+      </p:sp>
+      <p:sp>
+        <p:nvSpPr>
+          <p:cNvPr id="10" name="Oval 9"/>
+          <p:cNvSpPr/>
+          <p:nvPr/>
+        </p:nvSpPr>
+        <p:spPr>
+          <a:xfrm>
+            <a:off x="548640" y="4009644"/>
+            <a:ext cx="411480" cy="411480"/>
+          </a:xfrm>
+          <a:prstGeom prst="ellipse">
+            <a:avLst/>
+          </a:prstGeom>
+          <a:solidFill>
+            <a:srgbClr val="F2B705"/>
+          </a:solidFill>
+          <a:ln>
+            <a:noFill/>
+          </a:ln>
+          <a:effectLst/>
+        </p:spPr>
+        <p:style>
+          <a:lnRef idx="1">
+            <a:schemeClr val="accent1"/>
+          </a:lnRef>
+          <a:fillRef idx="3">
+            <a:schemeClr val="accent1"/>
+          </a:fillRef>
+          <a:effectRef idx="2">
+            <a:schemeClr val="accent1"/>
+          </a:effectRef>
+          <a:fontRef idx="minor">
+            <a:schemeClr val="lt1"/>
+          </a:fontRef>
+        </p:style>
+        <p:txBody>
+          <a:bodyPr rtlCol="0" anchor="ctr" lIns="0" rIns="0" tIns="0" bIns="0"/>
+          <a:lstStyle/>
+          <a:p>
+            <a:pPr algn="ctr"/>
+            <a:r>
+              <a:rPr sz="1400" b="1">
+                <a:solidFill>
+                  <a:srgbClr val="202122"/>
+                </a:solidFill>
+                <a:latin typeface="Calibri"/>
+              </a:rPr>
+              <a:t>3</a:t>
+            </a:r>
+          </a:p>
+        </p:txBody>
+      </p:sp>
+      <p:sp>
+        <p:nvSpPr>
+          <p:cNvPr id="11" name="TextBox 10"/>
+          <p:cNvSpPr txBox="1"/>
+          <p:nvPr/>
+        </p:nvSpPr>
+        <p:spPr>
+          <a:xfrm>
+            <a:off x="1234440" y="3991356"/>
+            <a:ext cx="10408615" cy="1030986"/>
+          </a:xfrm>
+          <a:prstGeom prst="rect">
+            <a:avLst/>
+          </a:prstGeom>
+          <a:noFill/>
+        </p:spPr>
+        <p:txBody>
+          <a:bodyPr wrap="square" anchor="t" lIns="0" rIns="0" tIns="0" bIns="0"/>
+          <a:lstStyle/>
+          <a:p>
+            <a:pPr algn="l"/>
+            <a:r>
+              <a:rPr sz="1800" b="0" i="0">
+                <a:solidFill>
+                  <a:srgbClr val="54595D"/>
+                </a:solidFill>
+                <a:latin typeface="Calibri"/>
+              </a:rPr>
+              <a:t>Which system uses a nearly incompressible fluid?</a:t>
+            </a:r>
+          </a:p>
+          <a:p>
+            <a:r>
+              <a:rPr sz="1800" b="1">
+                <a:solidFill>
+                  <a:srgbClr val="03306E"/>
+                </a:solidFill>
+                <a:latin typeface="Calibri"/>
+              </a:rPr>
+              <a:t>Hydraulics.</a:t>
+            </a:r>
+          </a:p>
+        </p:txBody>
+      </p:sp>
+      <p:sp>
+        <p:nvSpPr>
+          <p:cNvPr id="12" name="Oval 11"/>
+          <p:cNvSpPr/>
+          <p:nvPr/>
+        </p:nvSpPr>
+        <p:spPr>
+          <a:xfrm>
+            <a:off x="548640" y="5205221"/>
+            <a:ext cx="411480" cy="411480"/>
+          </a:xfrm>
+          <a:prstGeom prst="ellipse">
+            <a:avLst/>
+          </a:prstGeom>
+          <a:solidFill>
+            <a:srgbClr val="F2B705"/>
+          </a:solidFill>
+          <a:ln>
+            <a:noFill/>
+          </a:ln>
+          <a:effectLst/>
+        </p:spPr>
+        <p:style>
+          <a:lnRef idx="1">
+            <a:schemeClr val="accent1"/>
+          </a:lnRef>
+          <a:fillRef idx="3">
+            <a:schemeClr val="accent1"/>
+          </a:fillRef>
+          <a:effectRef idx="2">
+            <a:schemeClr val="accent1"/>
+          </a:effectRef>
+          <a:fontRef idx="minor">
+            <a:schemeClr val="lt1"/>
+          </a:fontRef>
+        </p:style>
+        <p:txBody>
+          <a:bodyPr rtlCol="0" anchor="ctr" lIns="0" rIns="0" tIns="0" bIns="0"/>
+          <a:lstStyle/>
+          <a:p>
+            <a:pPr algn="ctr"/>
+            <a:r>
+              <a:rPr sz="1400" b="1">
+                <a:solidFill>
+                  <a:srgbClr val="202122"/>
+                </a:solidFill>
+                <a:latin typeface="Calibri"/>
+              </a:rPr>
+              <a:t>4</a:t>
+            </a:r>
+          </a:p>
+        </p:txBody>
+      </p:sp>
+      <p:sp>
+        <p:nvSpPr>
+          <p:cNvPr id="13" name="TextBox 12"/>
+          <p:cNvSpPr txBox="1"/>
+          <p:nvPr/>
+        </p:nvSpPr>
+        <p:spPr>
+          <a:xfrm>
+            <a:off x="1234440" y="5186933"/>
+            <a:ext cx="10408615" cy="1030986"/>
+          </a:xfrm>
+          <a:prstGeom prst="rect">
+            <a:avLst/>
+          </a:prstGeom>
+          <a:noFill/>
+        </p:spPr>
+        <p:txBody>
+          <a:bodyPr wrap="square" anchor="t" lIns="0" rIns="0" tIns="0" bIns="0"/>
+          <a:lstStyle/>
+          <a:p>
+            <a:pPr algn="l"/>
+            <a:r>
+              <a:rPr sz="1800" b="0" i="0">
+                <a:solidFill>
+                  <a:srgbClr val="54595D"/>
+                </a:solidFill>
+                <a:latin typeface="Calibri"/>
+              </a:rPr>
+              <a:t>Which motor moves in fixed steps?</a:t>
+            </a:r>
+          </a:p>
+          <a:p>
+            <a:r>
+              <a:rPr sz="1800" b="1">
+                <a:solidFill>
+                  <a:srgbClr val="03306E"/>
+                </a:solidFill>
+                <a:latin typeface="Calibri"/>
+              </a:rPr>
+              <a:t>A stepper motor.</a:t>
+            </a:r>
+          </a:p>
+        </p:txBody>
+      </p:sp>
+    </p:spTree>
+  </p:cSld>
+  <p:clrMapOvr>
+    <a:masterClrMapping/>
+  </p:clrMapOvr>
+</p:sld>
+</file>
+
+<file path=ppt/slides/slide14.xml><?xml version="1.0" encoding="utf-8"?>
+<p:sld xmlns:a="http://schemas.openxmlformats.org/drawingml/2006/main" xmlns:p="http://schemas.openxmlformats.org/presentationml/2006/main" xmlns:r="http://schemas.openxmlformats.org/officeDocument/2006/relationships">
+  <p:cSld>
+    <p:bg>
+      <p:bgPr>
+        <a:solidFill>
+          <a:srgbClr val="FFFFFF"/>
+        </a:solidFill>
+        <a:effectLst/>
+      </p:bgPr>
+    </p:bg>
+    <p:spTree>
+      <p:nvGrpSpPr>
+        <p:cNvPr id="1" name=""/>
+        <p:cNvGrpSpPr/>
+        <p:nvPr/>
+      </p:nvGrpSpPr>
+      <p:grpSpPr/>
+      <p:sp>
+        <p:nvSpPr>
+          <p:cNvPr id="2" name="TextBox 1"/>
+          <p:cNvSpPr txBox="1"/>
+          <p:nvPr/>
+        </p:nvSpPr>
+        <p:spPr>
+          <a:xfrm>
+            <a:off x="548640" y="320040"/>
+            <a:ext cx="11094415" cy="274320"/>
+          </a:xfrm>
+          <a:prstGeom prst="rect">
+            <a:avLst/>
+          </a:prstGeom>
+          <a:noFill/>
+        </p:spPr>
+        <p:txBody>
+          <a:bodyPr wrap="square" anchor="t" lIns="0" rIns="0" tIns="0" bIns="0"/>
+          <a:lstStyle/>
+          <a:p>
+            <a:pPr algn="l"/>
+            <a:r>
+              <a:rPr sz="1100" b="1" i="0">
+                <a:solidFill>
+                  <a:srgbClr val="54595D"/>
+                </a:solidFill>
+                <a:latin typeface="Calibri"/>
+              </a:rPr>
+              <a:t>ENGINEERING CORE  ·  Core topic 9</a:t>
+            </a:r>
+          </a:p>
+        </p:txBody>
+      </p:sp>
+      <p:sp>
+        <p:nvSpPr>
+          <p:cNvPr id="3" name="TextBox 2"/>
+          <p:cNvSpPr txBox="1"/>
+          <p:nvPr/>
+        </p:nvSpPr>
+        <p:spPr>
+          <a:xfrm>
+            <a:off x="548640" y="566928"/>
+            <a:ext cx="11094415" cy="822960"/>
+          </a:xfrm>
+          <a:prstGeom prst="rect">
+            <a:avLst/>
+          </a:prstGeom>
+          <a:noFill/>
+        </p:spPr>
+        <p:txBody>
+          <a:bodyPr wrap="square" anchor="ctr" lIns="0" rIns="0" tIns="0" bIns="0"/>
+          <a:lstStyle/>
+          <a:p>
+            <a:pPr algn="l"/>
+            <a:r>
+              <a:rPr sz="3200" b="1" i="0">
+                <a:solidFill>
+                  <a:srgbClr val="03306E"/>
+                </a:solidFill>
+                <a:latin typeface="Cambria"/>
+              </a:rPr>
+              <a:t>Activity: Design a sorting system</a:t>
+            </a:r>
+          </a:p>
+        </p:txBody>
+      </p:sp>
+      <p:sp>
+        <p:nvSpPr>
+          <p:cNvPr id="4" name="TextBox 3"/>
+          <p:cNvSpPr txBox="1"/>
+          <p:nvPr/>
+        </p:nvSpPr>
+        <p:spPr>
+          <a:xfrm>
+            <a:off x="548640" y="6446520"/>
+            <a:ext cx="8229600" cy="274320"/>
+          </a:xfrm>
+          <a:prstGeom prst="rect">
+            <a:avLst/>
+          </a:prstGeom>
+          <a:noFill/>
+        </p:spPr>
+        <p:txBody>
+          <a:bodyPr wrap="square" anchor="t" lIns="0" rIns="0" tIns="0" bIns="0"/>
+          <a:lstStyle/>
+          <a:p>
+            <a:pPr algn="l"/>
+            <a:r>
+              <a:rPr sz="1000" b="0" i="0">
+                <a:solidFill>
+                  <a:srgbClr val="54595D"/>
+                </a:solidFill>
+                <a:latin typeface="Calibri"/>
+              </a:rPr>
+              <a:t>Design and Development for Engineering and Manufacturing T Level  ·  Mechatronics, PLCs, Hydraulics and Pneumatics</a:t>
+            </a:r>
+          </a:p>
+        </p:txBody>
+      </p:sp>
+      <p:sp>
+        <p:nvSpPr>
+          <p:cNvPr id="5" name="TextBox 4"/>
+          <p:cNvSpPr txBox="1"/>
+          <p:nvPr/>
+        </p:nvSpPr>
+        <p:spPr>
+          <a:xfrm>
+            <a:off x="10728655" y="6446520"/>
+            <a:ext cx="914400" cy="274320"/>
+          </a:xfrm>
+          <a:prstGeom prst="rect">
+            <a:avLst/>
+          </a:prstGeom>
+          <a:noFill/>
+        </p:spPr>
+        <p:txBody>
+          <a:bodyPr wrap="square" anchor="t" lIns="0" rIns="0" tIns="0" bIns="0"/>
+          <a:lstStyle/>
+          <a:p>
+            <a:pPr algn="r"/>
+            <a:r>
+              <a:rPr sz="1000" b="0" i="0">
+                <a:solidFill>
+                  <a:srgbClr val="54595D"/>
+                </a:solidFill>
+                <a:latin typeface="Calibri"/>
+              </a:rPr>
+              <a:t>14</a:t>
+            </a:r>
+          </a:p>
+        </p:txBody>
+      </p:sp>
+      <p:sp>
+        <p:nvSpPr>
+          <p:cNvPr id="6" name="Rounded Rectangle 5"/>
+          <p:cNvSpPr/>
+          <p:nvPr/>
+        </p:nvSpPr>
+        <p:spPr>
+          <a:xfrm>
+            <a:off x="548640" y="1508760"/>
+            <a:ext cx="2011680" cy="457200"/>
+          </a:xfrm>
+          <a:prstGeom prst="roundRect">
+            <a:avLst>
+              <a:gd name="adj" fmla="val 50000"/>
+            </a:avLst>
+          </a:prstGeom>
+          <a:solidFill>
+            <a:srgbClr val="F2B705"/>
+          </a:solidFill>
+          <a:ln>
+            <a:noFill/>
+          </a:ln>
+          <a:effectLst/>
+        </p:spPr>
+        <p:style>
+          <a:lnRef idx="1">
+            <a:schemeClr val="accent1"/>
+          </a:lnRef>
+          <a:fillRef idx="3">
+            <a:schemeClr val="accent1"/>
+          </a:fillRef>
+          <a:effectRef idx="2">
+            <a:schemeClr val="accent1"/>
+          </a:effectRef>
+          <a:fontRef idx="minor">
+            <a:schemeClr val="lt1"/>
+          </a:fontRef>
+        </p:style>
+        <p:txBody>
+          <a:bodyPr rtlCol="0" anchor="ctr"/>
+          <a:lstStyle/>
+          <a:p/>
+        </p:txBody>
+      </p:sp>
+      <p:sp>
+        <p:nvSpPr>
+          <p:cNvPr id="7" name="TextBox 6"/>
+          <p:cNvSpPr txBox="1"/>
+          <p:nvPr/>
+        </p:nvSpPr>
+        <p:spPr>
+          <a:xfrm>
+            <a:off x="548640" y="1508760"/>
+            <a:ext cx="2011680" cy="457200"/>
+          </a:xfrm>
+          <a:prstGeom prst="rect">
+            <a:avLst/>
+          </a:prstGeom>
+          <a:noFill/>
+        </p:spPr>
+        <p:txBody>
+          <a:bodyPr wrap="square" anchor="ctr" lIns="0" rIns="0" tIns="0" bIns="0"/>
+          <a:lstStyle/>
+          <a:p>
+            <a:pPr algn="ctr"/>
+            <a:r>
+              <a:rPr sz="1400" b="1" i="0">
+                <a:solidFill>
+                  <a:srgbClr val="202122"/>
+                </a:solidFill>
+                <a:latin typeface="Calibri"/>
+              </a:rPr>
+              <a:t>30 minutes</a:t>
+            </a:r>
+          </a:p>
+        </p:txBody>
+      </p:sp>
+      <p:sp>
+        <p:nvSpPr>
+          <p:cNvPr id="8" name="TextBox 7"/>
+          <p:cNvSpPr txBox="1"/>
+          <p:nvPr/>
+        </p:nvSpPr>
+        <p:spPr>
+          <a:xfrm>
+            <a:off x="2743200" y="1508760"/>
+            <a:ext cx="4754880" cy="457200"/>
+          </a:xfrm>
+          <a:prstGeom prst="rect">
+            <a:avLst/>
+          </a:prstGeom>
+          <a:noFill/>
+        </p:spPr>
+        <p:txBody>
+          <a:bodyPr wrap="square" anchor="ctr" lIns="0" rIns="0" tIns="0" bIns="0"/>
+          <a:lstStyle/>
+          <a:p>
+            <a:pPr algn="l"/>
+            <a:r>
+              <a:rPr sz="1400" b="0" i="1">
+                <a:solidFill>
+                  <a:srgbClr val="54595D"/>
+                </a:solidFill>
+                <a:latin typeface="Calibri"/>
+              </a:rPr>
+              <a:t>Small groups</a:t>
+            </a:r>
+          </a:p>
+        </p:txBody>
+      </p:sp>
+      <p:sp>
+        <p:nvSpPr>
+          <p:cNvPr id="9" name="Oval 8"/>
+          <p:cNvSpPr/>
+          <p:nvPr/>
+        </p:nvSpPr>
+        <p:spPr>
+          <a:xfrm>
+            <a:off x="548640" y="2482596"/>
+            <a:ext cx="384048" cy="384048"/>
+          </a:xfrm>
+          <a:prstGeom prst="ellipse">
+            <a:avLst/>
+          </a:prstGeom>
+          <a:solidFill>
+            <a:srgbClr val="0645AD"/>
+          </a:solidFill>
+          <a:ln>
+            <a:noFill/>
+          </a:ln>
+          <a:effectLst/>
+        </p:spPr>
+        <p:style>
+          <a:lnRef idx="1">
+            <a:schemeClr val="accent1"/>
+          </a:lnRef>
+          <a:fillRef idx="3">
+            <a:schemeClr val="accent1"/>
+          </a:fillRef>
+          <a:effectRef idx="2">
+            <a:schemeClr val="accent1"/>
+          </a:effectRef>
+          <a:fontRef idx="minor">
+            <a:schemeClr val="lt1"/>
+          </a:fontRef>
+        </p:style>
+        <p:txBody>
+          <a:bodyPr rtlCol="0" anchor="ctr" lIns="0" rIns="0" tIns="0" bIns="0"/>
+          <a:lstStyle/>
+          <a:p>
+            <a:pPr algn="ctr"/>
+            <a:r>
+              <a:rPr sz="1300" b="1">
+                <a:solidFill>
+                  <a:srgbClr val="FFFFFF"/>
+                </a:solidFill>
+                <a:latin typeface="Calibri"/>
+              </a:rPr>
+              <a:t>1</a:t>
+            </a:r>
+          </a:p>
+        </p:txBody>
+      </p:sp>
+      <p:sp>
+        <p:nvSpPr>
+          <p:cNvPr id="10" name="TextBox 9"/>
+          <p:cNvSpPr txBox="1"/>
+          <p:nvPr/>
+        </p:nvSpPr>
+        <p:spPr>
+          <a:xfrm>
+            <a:off x="1143000" y="2240280"/>
+            <a:ext cx="5943600" cy="868680"/>
+          </a:xfrm>
+          <a:prstGeom prst="rect">
+            <a:avLst/>
+          </a:prstGeom>
+          <a:noFill/>
+        </p:spPr>
+        <p:txBody>
+          <a:bodyPr wrap="square" anchor="ctr" lIns="0" rIns="0" tIns="0" bIns="0"/>
+          <a:lstStyle/>
+          <a:p>
+            <a:pPr algn="l"/>
+            <a:r>
+              <a:rPr sz="1700" b="0" i="0">
+                <a:solidFill>
+                  <a:srgbClr val="202122"/>
+                </a:solidFill>
+                <a:latin typeface="Calibri"/>
+              </a:rPr>
+              <a:t>A conveyor must push large boxes onto a second belt and let small boxes pass.</a:t>
+            </a:r>
+          </a:p>
+        </p:txBody>
+      </p:sp>
+      <p:sp>
+        <p:nvSpPr>
+          <p:cNvPr id="11" name="Oval 10"/>
+          <p:cNvSpPr/>
+          <p:nvPr/>
+        </p:nvSpPr>
+        <p:spPr>
+          <a:xfrm>
+            <a:off x="548640" y="3461004"/>
+            <a:ext cx="384048" cy="384048"/>
+          </a:xfrm>
+          <a:prstGeom prst="ellipse">
+            <a:avLst/>
+          </a:prstGeom>
+          <a:solidFill>
+            <a:srgbClr val="0645AD"/>
+          </a:solidFill>
+          <a:ln>
+            <a:noFill/>
+          </a:ln>
+          <a:effectLst/>
+        </p:spPr>
+        <p:style>
+          <a:lnRef idx="1">
+            <a:schemeClr val="accent1"/>
+          </a:lnRef>
+          <a:fillRef idx="3">
+            <a:schemeClr val="accent1"/>
+          </a:fillRef>
+          <a:effectRef idx="2">
+            <a:schemeClr val="accent1"/>
+          </a:effectRef>
+          <a:fontRef idx="minor">
+            <a:schemeClr val="lt1"/>
+          </a:fontRef>
+        </p:style>
+        <p:txBody>
+          <a:bodyPr rtlCol="0" anchor="ctr" lIns="0" rIns="0" tIns="0" bIns="0"/>
+          <a:lstStyle/>
+          <a:p>
+            <a:pPr algn="ctr"/>
+            <a:r>
+              <a:rPr sz="1300" b="1">
+                <a:solidFill>
+                  <a:srgbClr val="FFFFFF"/>
+                </a:solidFill>
+                <a:latin typeface="Calibri"/>
+              </a:rPr>
+              <a:t>2</a:t>
+            </a:r>
+          </a:p>
+        </p:txBody>
+      </p:sp>
+      <p:sp>
+        <p:nvSpPr>
+          <p:cNvPr id="12" name="TextBox 11"/>
+          <p:cNvSpPr txBox="1"/>
+          <p:nvPr/>
+        </p:nvSpPr>
+        <p:spPr>
+          <a:xfrm>
+            <a:off x="1143000" y="3218688"/>
+            <a:ext cx="5943600" cy="868680"/>
+          </a:xfrm>
+          <a:prstGeom prst="rect">
+            <a:avLst/>
+          </a:prstGeom>
+          <a:noFill/>
+        </p:spPr>
+        <p:txBody>
+          <a:bodyPr wrap="square" anchor="ctr" lIns="0" rIns="0" tIns="0" bIns="0"/>
+          <a:lstStyle/>
+          <a:p>
+            <a:pPr algn="l"/>
+            <a:r>
+              <a:rPr sz="1700" b="0" i="0">
+                <a:solidFill>
+                  <a:srgbClr val="202122"/>
+                </a:solidFill>
+                <a:latin typeface="Calibri"/>
+              </a:rPr>
+              <a:t>Choose sensors, a PLC type and an actuator.</a:t>
+            </a:r>
+          </a:p>
+        </p:txBody>
+      </p:sp>
+      <p:sp>
+        <p:nvSpPr>
+          <p:cNvPr id="13" name="Oval 12"/>
+          <p:cNvSpPr/>
+          <p:nvPr/>
+        </p:nvSpPr>
+        <p:spPr>
+          <a:xfrm>
+            <a:off x="548640" y="4439412"/>
+            <a:ext cx="384048" cy="384048"/>
+          </a:xfrm>
+          <a:prstGeom prst="ellipse">
+            <a:avLst/>
+          </a:prstGeom>
+          <a:solidFill>
+            <a:srgbClr val="0645AD"/>
+          </a:solidFill>
+          <a:ln>
+            <a:noFill/>
+          </a:ln>
+          <a:effectLst/>
+        </p:spPr>
+        <p:style>
+          <a:lnRef idx="1">
+            <a:schemeClr val="accent1"/>
+          </a:lnRef>
+          <a:fillRef idx="3">
+            <a:schemeClr val="accent1"/>
+          </a:fillRef>
+          <a:effectRef idx="2">
+            <a:schemeClr val="accent1"/>
+          </a:effectRef>
+          <a:fontRef idx="minor">
+            <a:schemeClr val="lt1"/>
+          </a:fontRef>
+        </p:style>
+        <p:txBody>
+          <a:bodyPr rtlCol="0" anchor="ctr" lIns="0" rIns="0" tIns="0" bIns="0"/>
+          <a:lstStyle/>
+          <a:p>
+            <a:pPr algn="ctr"/>
+            <a:r>
+              <a:rPr sz="1300" b="1">
+                <a:solidFill>
+                  <a:srgbClr val="FFFFFF"/>
+                </a:solidFill>
+                <a:latin typeface="Calibri"/>
+              </a:rPr>
+              <a:t>3</a:t>
+            </a:r>
+          </a:p>
+        </p:txBody>
+      </p:sp>
+      <p:sp>
+        <p:nvSpPr>
+          <p:cNvPr id="14" name="TextBox 13"/>
+          <p:cNvSpPr txBox="1"/>
+          <p:nvPr/>
+        </p:nvSpPr>
+        <p:spPr>
+          <a:xfrm>
+            <a:off x="1143000" y="4197096"/>
+            <a:ext cx="5943600" cy="868680"/>
+          </a:xfrm>
+          <a:prstGeom prst="rect">
+            <a:avLst/>
+          </a:prstGeom>
+          <a:noFill/>
+        </p:spPr>
+        <p:txBody>
+          <a:bodyPr wrap="square" anchor="ctr" lIns="0" rIns="0" tIns="0" bIns="0"/>
+          <a:lstStyle/>
+          <a:p>
+            <a:pPr algn="l"/>
+            <a:r>
+              <a:rPr sz="1700" b="0" i="0">
+                <a:solidFill>
+                  <a:srgbClr val="202122"/>
+                </a:solidFill>
+                <a:latin typeface="Calibri"/>
+              </a:rPr>
+              <a:t>Decide between pneumatic and hydraulic actuation and justify it.</a:t>
+            </a:r>
+          </a:p>
+        </p:txBody>
+      </p:sp>
+      <p:sp>
+        <p:nvSpPr>
+          <p:cNvPr id="15" name="Oval 14"/>
+          <p:cNvSpPr/>
+          <p:nvPr/>
+        </p:nvSpPr>
+        <p:spPr>
+          <a:xfrm>
+            <a:off x="548640" y="5417820"/>
+            <a:ext cx="384048" cy="384048"/>
+          </a:xfrm>
+          <a:prstGeom prst="ellipse">
+            <a:avLst/>
+          </a:prstGeom>
+          <a:solidFill>
+            <a:srgbClr val="0645AD"/>
+          </a:solidFill>
+          <a:ln>
+            <a:noFill/>
+          </a:ln>
+          <a:effectLst/>
+        </p:spPr>
+        <p:style>
+          <a:lnRef idx="1">
+            <a:schemeClr val="accent1"/>
+          </a:lnRef>
+          <a:fillRef idx="3">
+            <a:schemeClr val="accent1"/>
+          </a:fillRef>
+          <a:effectRef idx="2">
+            <a:schemeClr val="accent1"/>
+          </a:effectRef>
+          <a:fontRef idx="minor">
+            <a:schemeClr val="lt1"/>
+          </a:fontRef>
+        </p:style>
+        <p:txBody>
+          <a:bodyPr rtlCol="0" anchor="ctr" lIns="0" rIns="0" tIns="0" bIns="0"/>
+          <a:lstStyle/>
+          <a:p>
+            <a:pPr algn="ctr"/>
+            <a:r>
+              <a:rPr sz="1300" b="1">
+                <a:solidFill>
+                  <a:srgbClr val="FFFFFF"/>
+                </a:solidFill>
+                <a:latin typeface="Calibri"/>
+              </a:rPr>
+              <a:t>4</a:t>
+            </a:r>
+          </a:p>
+        </p:txBody>
+      </p:sp>
+      <p:sp>
+        <p:nvSpPr>
+          <p:cNvPr id="16" name="TextBox 15"/>
+          <p:cNvSpPr txBox="1"/>
+          <p:nvPr/>
+        </p:nvSpPr>
+        <p:spPr>
+          <a:xfrm>
+            <a:off x="1143000" y="5175504"/>
+            <a:ext cx="5943600" cy="868680"/>
+          </a:xfrm>
+          <a:prstGeom prst="rect">
+            <a:avLst/>
+          </a:prstGeom>
+          <a:noFill/>
+        </p:spPr>
+        <p:txBody>
+          <a:bodyPr wrap="square" anchor="ctr" lIns="0" rIns="0" tIns="0" bIns="0"/>
+          <a:lstStyle/>
+          <a:p>
+            <a:pPr algn="l"/>
+            <a:r>
+              <a:rPr sz="1700" b="0" i="0">
+                <a:solidFill>
+                  <a:srgbClr val="202122"/>
+                </a:solidFill>
+                <a:latin typeface="Calibri"/>
+              </a:rPr>
+              <a:t>Sketch a block diagram of the system.</a:t>
+            </a:r>
+          </a:p>
+        </p:txBody>
+      </p:sp>
+      <p:sp>
+        <p:nvSpPr>
+          <p:cNvPr id="17" name="Rounded Rectangle 16"/>
+          <p:cNvSpPr/>
+          <p:nvPr/>
+        </p:nvSpPr>
+        <p:spPr>
+          <a:xfrm>
+            <a:off x="7772400" y="1508760"/>
+            <a:ext cx="3867912" cy="4572000"/>
+          </a:xfrm>
+          <a:prstGeom prst="roundRect">
+            <a:avLst>
+              <a:gd name="adj" fmla="val 8000"/>
+            </a:avLst>
+          </a:prstGeom>
+          <a:solidFill>
+            <a:srgbClr val="EAF3FF"/>
+          </a:solidFill>
+          <a:ln>
+            <a:noFill/>
+          </a:ln>
+          <a:effectLst/>
+        </p:spPr>
+        <p:style>
+          <a:lnRef idx="1">
+            <a:schemeClr val="accent1"/>
+          </a:lnRef>
+          <a:fillRef idx="3">
+            <a:schemeClr val="accent1"/>
+          </a:fillRef>
+          <a:effectRef idx="2">
+            <a:schemeClr val="accent1"/>
+          </a:effectRef>
+          <a:fontRef idx="minor">
+            <a:schemeClr val="lt1"/>
+          </a:fontRef>
+        </p:style>
+        <p:txBody>
+          <a:bodyPr rtlCol="0" anchor="ctr"/>
+          <a:lstStyle/>
+          <a:p/>
+        </p:txBody>
+      </p:sp>
+      <p:sp>
+        <p:nvSpPr>
+          <p:cNvPr id="18" name="TextBox 17"/>
+          <p:cNvSpPr txBox="1"/>
+          <p:nvPr/>
+        </p:nvSpPr>
+        <p:spPr>
+          <a:xfrm>
+            <a:off x="8046720" y="1737360"/>
+            <a:ext cx="3291840" cy="365760"/>
+          </a:xfrm>
+          <a:prstGeom prst="rect">
+            <a:avLst/>
+          </a:prstGeom>
+          <a:noFill/>
+        </p:spPr>
+        <p:txBody>
+          <a:bodyPr wrap="square" anchor="t" lIns="0" rIns="0" tIns="0" bIns="0"/>
+          <a:lstStyle/>
+          <a:p>
+            <a:pPr algn="l"/>
+            <a:r>
+              <a:rPr sz="1300" b="1" i="0">
+                <a:solidFill>
+                  <a:srgbClr val="0645AD"/>
+                </a:solidFill>
+                <a:latin typeface="Calibri"/>
+              </a:rPr>
+              <a:t>SUCCESS CRITERIA</a:t>
+            </a:r>
+          </a:p>
+        </p:txBody>
+      </p:sp>
+      <p:sp>
+        <p:nvSpPr>
+          <p:cNvPr id="19" name="TextBox 18"/>
+          <p:cNvSpPr txBox="1"/>
+          <p:nvPr/>
+        </p:nvSpPr>
+        <p:spPr>
+          <a:xfrm>
+            <a:off x="8046720" y="2240280"/>
+            <a:ext cx="3337560" cy="3657600"/>
+          </a:xfrm>
+          <a:prstGeom prst="rect">
+            <a:avLst/>
+          </a:prstGeom>
+          <a:noFill/>
+        </p:spPr>
+        <p:txBody>
+          <a:bodyPr wrap="square" lIns="0" rIns="0" tIns="0" bIns="0">
+            <a:spAutoFit/>
+          </a:bodyPr>
+          <a:lstStyle/>
+          <a:p>
+            <a:pPr marL="274320" indent="-274320">
+              <a:spcAft>
+                <a:spcPts val="810"/>
+              </a:spcAft>
+              <a:buClr>
+                <a:srgbClr val="0645AD"/>
+              </a:buClr>
+              <a:buFont typeface="Arial"/>
+              <a:buChar char="•"/>
+            </a:pPr>
+            <a:r>
+              <a:rPr sz="1800" b="0">
+                <a:solidFill>
+                  <a:srgbClr val="202122"/>
+                </a:solidFill>
+                <a:latin typeface="Calibri"/>
+              </a:rPr>
+              <a:t>Input, process and output all present</a:t>
+            </a:r>
+          </a:p>
+          <a:p>
+            <a:pPr marL="274320" indent="-274320">
+              <a:spcAft>
+                <a:spcPts val="810"/>
+              </a:spcAft>
+              <a:buClr>
+                <a:srgbClr val="0645AD"/>
+              </a:buClr>
+              <a:buFont typeface="Arial"/>
+              <a:buChar char="•"/>
+            </a:pPr>
+            <a:r>
+              <a:rPr sz="1800" b="0">
+                <a:solidFill>
+                  <a:srgbClr val="202122"/>
+                </a:solidFill>
+                <a:latin typeface="Calibri"/>
+              </a:rPr>
+              <a:t>Actuator choice justified</a:t>
+            </a:r>
+          </a:p>
+          <a:p>
+            <a:pPr marL="274320" indent="-274320">
+              <a:spcAft>
+                <a:spcPts val="810"/>
+              </a:spcAft>
+              <a:buClr>
+                <a:srgbClr val="0645AD"/>
+              </a:buClr>
+              <a:buFont typeface="Arial"/>
+              <a:buChar char="•"/>
+            </a:pPr>
+            <a:r>
+              <a:rPr sz="1800" b="0">
+                <a:solidFill>
+                  <a:srgbClr val="202122"/>
+                </a:solidFill>
+                <a:latin typeface="Calibri"/>
+              </a:rPr>
+              <a:t>Diagram is clear</a:t>
+            </a:r>
+          </a:p>
+        </p:txBody>
+      </p:sp>
+    </p:spTree>
+  </p:cSld>
+  <p:clrMapOvr>
+    <a:masterClrMapping/>
+  </p:clrMapOvr>
+</p:sld>
+</file>
+
+<file path=ppt/slides/slide15.xml><?xml version="1.0" encoding="utf-8"?>
+<p:sld xmlns:a="http://schemas.openxmlformats.org/drawingml/2006/main" xmlns:p="http://schemas.openxmlformats.org/presentationml/2006/main" xmlns:r="http://schemas.openxmlformats.org/officeDocument/2006/relationships">
+  <p:cSld>
+    <p:bg>
+      <p:bgPr>
+        <a:solidFill>
+          <a:srgbClr val="03306E"/>
+        </a:solidFill>
+        <a:effectLst/>
+      </p:bgPr>
+    </p:bg>
+    <p:spTree>
+      <p:nvGrpSpPr>
+        <p:cNvPr id="1" name=""/>
+        <p:cNvGrpSpPr/>
+        <p:nvPr/>
+      </p:nvGrpSpPr>
+      <p:grpSpPr/>
+      <p:sp>
+        <p:nvSpPr>
+          <p:cNvPr id="2" name="TextBox 1"/>
+          <p:cNvSpPr txBox="1"/>
+          <p:nvPr/>
+        </p:nvSpPr>
+        <p:spPr>
+          <a:xfrm>
+            <a:off x="548640" y="320040"/>
+            <a:ext cx="11094415" cy="274320"/>
+          </a:xfrm>
+          <a:prstGeom prst="rect">
+            <a:avLst/>
+          </a:prstGeom>
+          <a:noFill/>
+        </p:spPr>
+        <p:txBody>
+          <a:bodyPr wrap="square" anchor="t" lIns="0" rIns="0" tIns="0" bIns="0"/>
+          <a:lstStyle/>
+          <a:p>
+            <a:pPr algn="l"/>
+            <a:r>
+              <a:rPr sz="1100" b="1" i="0">
+                <a:solidFill>
+                  <a:srgbClr val="A9C8F0"/>
+                </a:solidFill>
+                <a:latin typeface="Calibri"/>
+              </a:rPr>
+              <a:t>ENGINEERING CORE  ·  Core topic 9</a:t>
+            </a:r>
+          </a:p>
+        </p:txBody>
+      </p:sp>
+      <p:sp>
+        <p:nvSpPr>
+          <p:cNvPr id="3" name="TextBox 2"/>
+          <p:cNvSpPr txBox="1"/>
+          <p:nvPr/>
+        </p:nvSpPr>
+        <p:spPr>
+          <a:xfrm>
+            <a:off x="548640" y="566928"/>
+            <a:ext cx="11094415" cy="822960"/>
+          </a:xfrm>
+          <a:prstGeom prst="rect">
+            <a:avLst/>
+          </a:prstGeom>
+          <a:noFill/>
+        </p:spPr>
+        <p:txBody>
+          <a:bodyPr wrap="square" anchor="ctr" lIns="0" rIns="0" tIns="0" bIns="0"/>
+          <a:lstStyle/>
+          <a:p>
+            <a:pPr algn="l"/>
+            <a:r>
+              <a:rPr sz="3200" b="1" i="0">
+                <a:solidFill>
+                  <a:srgbClr val="FFFFFF"/>
+                </a:solidFill>
+                <a:latin typeface="Cambria"/>
+              </a:rPr>
+              <a:t>Exit ticket</a:t>
+            </a:r>
+          </a:p>
+        </p:txBody>
+      </p:sp>
+      <p:sp>
+        <p:nvSpPr>
+          <p:cNvPr id="4" name="Oval 3"/>
+          <p:cNvSpPr/>
+          <p:nvPr/>
+        </p:nvSpPr>
+        <p:spPr>
+          <a:xfrm>
+            <a:off x="548640" y="1737360"/>
+            <a:ext cx="502920" cy="502920"/>
+          </a:xfrm>
+          <a:prstGeom prst="ellipse">
+            <a:avLst/>
+          </a:prstGeom>
+          <a:solidFill>
+            <a:srgbClr val="F2B705"/>
+          </a:solidFill>
+          <a:ln>
+            <a:noFill/>
+          </a:ln>
+          <a:effectLst/>
+        </p:spPr>
+        <p:style>
+          <a:lnRef idx="1">
+            <a:schemeClr val="accent1"/>
+          </a:lnRef>
+          <a:fillRef idx="3">
+            <a:schemeClr val="accent1"/>
+          </a:fillRef>
+          <a:effectRef idx="2">
+            <a:schemeClr val="accent1"/>
+          </a:effectRef>
+          <a:fontRef idx="minor">
+            <a:schemeClr val="lt1"/>
+          </a:fontRef>
+        </p:style>
+        <p:txBody>
+          <a:bodyPr rtlCol="0" anchor="ctr" lIns="0" rIns="0" tIns="0" bIns="0"/>
+          <a:lstStyle/>
+          <a:p>
+            <a:pPr algn="ctr"/>
+            <a:r>
+              <a:rPr sz="1700" b="1">
+                <a:solidFill>
+                  <a:srgbClr val="202122"/>
+                </a:solidFill>
+                <a:latin typeface="Calibri"/>
+              </a:rPr>
+              <a:t>1</a:t>
+            </a:r>
+          </a:p>
+        </p:txBody>
+      </p:sp>
+      <p:sp>
+        <p:nvSpPr>
+          <p:cNvPr id="5" name="TextBox 4"/>
+          <p:cNvSpPr txBox="1"/>
+          <p:nvPr/>
+        </p:nvSpPr>
+        <p:spPr>
+          <a:xfrm>
+            <a:off x="1325880" y="1645920"/>
+            <a:ext cx="6583680" cy="822960"/>
+          </a:xfrm>
+          <a:prstGeom prst="rect">
+            <a:avLst/>
+          </a:prstGeom>
+          <a:noFill/>
+        </p:spPr>
+        <p:txBody>
+          <a:bodyPr wrap="square" anchor="ctr" lIns="0" rIns="0" tIns="0" bIns="0"/>
+          <a:lstStyle/>
+          <a:p>
+            <a:pPr algn="l"/>
+            <a:r>
+              <a:rPr sz="2000" b="0" i="0">
+                <a:solidFill>
+                  <a:srgbClr val="FFFFFF"/>
+                </a:solidFill>
+                <a:latin typeface="Calibri"/>
+              </a:rPr>
+              <a:t>Why are PLCs popular in factories?</a:t>
+            </a:r>
+          </a:p>
+        </p:txBody>
+      </p:sp>
+      <p:sp>
+        <p:nvSpPr>
+          <p:cNvPr id="6" name="Oval 5"/>
+          <p:cNvSpPr/>
+          <p:nvPr/>
+        </p:nvSpPr>
+        <p:spPr>
+          <a:xfrm>
+            <a:off x="548640" y="2697480"/>
+            <a:ext cx="502920" cy="502920"/>
+          </a:xfrm>
+          <a:prstGeom prst="ellipse">
+            <a:avLst/>
+          </a:prstGeom>
+          <a:solidFill>
+            <a:srgbClr val="F2B705"/>
+          </a:solidFill>
+          <a:ln>
+            <a:noFill/>
+          </a:ln>
+          <a:effectLst/>
+        </p:spPr>
+        <p:style>
+          <a:lnRef idx="1">
+            <a:schemeClr val="accent1"/>
+          </a:lnRef>
+          <a:fillRef idx="3">
+            <a:schemeClr val="accent1"/>
+          </a:fillRef>
+          <a:effectRef idx="2">
+            <a:schemeClr val="accent1"/>
+          </a:effectRef>
+          <a:fontRef idx="minor">
+            <a:schemeClr val="lt1"/>
+          </a:fontRef>
+        </p:style>
+        <p:txBody>
+          <a:bodyPr rtlCol="0" anchor="ctr" lIns="0" rIns="0" tIns="0" bIns="0"/>
+          <a:lstStyle/>
+          <a:p>
+            <a:pPr algn="ctr"/>
+            <a:r>
+              <a:rPr sz="1700" b="1">
+                <a:solidFill>
+                  <a:srgbClr val="202122"/>
+                </a:solidFill>
+                <a:latin typeface="Calibri"/>
+              </a:rPr>
+              <a:t>2</a:t>
+            </a:r>
+          </a:p>
+        </p:txBody>
+      </p:sp>
+      <p:sp>
+        <p:nvSpPr>
+          <p:cNvPr id="7" name="TextBox 6"/>
+          <p:cNvSpPr txBox="1"/>
+          <p:nvPr/>
+        </p:nvSpPr>
+        <p:spPr>
+          <a:xfrm>
+            <a:off x="1325880" y="2606040"/>
+            <a:ext cx="6583680" cy="822960"/>
+          </a:xfrm>
+          <a:prstGeom prst="rect">
+            <a:avLst/>
+          </a:prstGeom>
+          <a:noFill/>
+        </p:spPr>
+        <p:txBody>
+          <a:bodyPr wrap="square" anchor="ctr" lIns="0" rIns="0" tIns="0" bIns="0"/>
+          <a:lstStyle/>
+          <a:p>
+            <a:pPr algn="l"/>
+            <a:r>
+              <a:rPr sz="2000" b="0" i="0">
+                <a:solidFill>
+                  <a:srgbClr val="FFFFFF"/>
+                </a:solidFill>
+                <a:latin typeface="Calibri"/>
+              </a:rPr>
+              <a:t>When would you choose pneumatics?</a:t>
+            </a:r>
+          </a:p>
+        </p:txBody>
+      </p:sp>
+      <p:sp>
+        <p:nvSpPr>
+          <p:cNvPr id="8" name="Oval 7"/>
+          <p:cNvSpPr/>
+          <p:nvPr/>
+        </p:nvSpPr>
+        <p:spPr>
+          <a:xfrm>
+            <a:off x="548640" y="3657600"/>
+            <a:ext cx="502920" cy="502920"/>
+          </a:xfrm>
+          <a:prstGeom prst="ellipse">
+            <a:avLst/>
+          </a:prstGeom>
+          <a:solidFill>
+            <a:srgbClr val="F2B705"/>
+          </a:solidFill>
+          <a:ln>
+            <a:noFill/>
+          </a:ln>
+          <a:effectLst/>
+        </p:spPr>
+        <p:style>
+          <a:lnRef idx="1">
+            <a:schemeClr val="accent1"/>
+          </a:lnRef>
+          <a:fillRef idx="3">
+            <a:schemeClr val="accent1"/>
+          </a:fillRef>
+          <a:effectRef idx="2">
+            <a:schemeClr val="accent1"/>
+          </a:effectRef>
+          <a:fontRef idx="minor">
+            <a:schemeClr val="lt1"/>
+          </a:fontRef>
+        </p:style>
+        <p:txBody>
+          <a:bodyPr rtlCol="0" anchor="ctr" lIns="0" rIns="0" tIns="0" bIns="0"/>
+          <a:lstStyle/>
+          <a:p>
+            <a:pPr algn="ctr"/>
+            <a:r>
+              <a:rPr sz="1700" b="1">
+                <a:solidFill>
+                  <a:srgbClr val="202122"/>
+                </a:solidFill>
+                <a:latin typeface="Calibri"/>
+              </a:rPr>
+              <a:t>3</a:t>
+            </a:r>
+          </a:p>
+        </p:txBody>
+      </p:sp>
+      <p:sp>
+        <p:nvSpPr>
+          <p:cNvPr id="9" name="TextBox 8"/>
+          <p:cNvSpPr txBox="1"/>
+          <p:nvPr/>
+        </p:nvSpPr>
+        <p:spPr>
+          <a:xfrm>
+            <a:off x="1325880" y="3566160"/>
+            <a:ext cx="6583680" cy="822960"/>
+          </a:xfrm>
+          <a:prstGeom prst="rect">
+            <a:avLst/>
+          </a:prstGeom>
+          <a:noFill/>
+        </p:spPr>
+        <p:txBody>
+          <a:bodyPr wrap="square" anchor="ctr" lIns="0" rIns="0" tIns="0" bIns="0"/>
+          <a:lstStyle/>
+          <a:p>
+            <a:pPr algn="l"/>
+            <a:r>
+              <a:rPr sz="2000" b="0" i="0">
+                <a:solidFill>
+                  <a:srgbClr val="FFFFFF"/>
+                </a:solidFill>
+                <a:latin typeface="Calibri"/>
+              </a:rPr>
+              <a:t>What does a transducer do?</a:t>
+            </a:r>
+          </a:p>
+        </p:txBody>
+      </p:sp>
+      <p:sp>
+        <p:nvSpPr>
+          <p:cNvPr id="10" name="Rounded Rectangle 9"/>
+          <p:cNvSpPr/>
+          <p:nvPr/>
+        </p:nvSpPr>
+        <p:spPr>
+          <a:xfrm>
+            <a:off x="8229600" y="1645920"/>
+            <a:ext cx="3410712" cy="2926080"/>
+          </a:xfrm>
+          <a:prstGeom prst="roundRect">
+            <a:avLst>
+              <a:gd name="adj" fmla="val 8000"/>
+            </a:avLst>
+          </a:prstGeom>
+          <a:solidFill>
+            <a:srgbClr val="0645AD"/>
+          </a:solidFill>
+          <a:ln>
+            <a:noFill/>
+          </a:ln>
+          <a:effectLst/>
+        </p:spPr>
+        <p:style>
+          <a:lnRef idx="1">
+            <a:schemeClr val="accent1"/>
+          </a:lnRef>
+          <a:fillRef idx="3">
+            <a:schemeClr val="accent1"/>
+          </a:fillRef>
+          <a:effectRef idx="2">
+            <a:schemeClr val="accent1"/>
+          </a:effectRef>
+          <a:fontRef idx="minor">
+            <a:schemeClr val="lt1"/>
+          </a:fontRef>
+        </p:style>
+        <p:txBody>
+          <a:bodyPr rtlCol="0" anchor="ctr"/>
+          <a:lstStyle/>
+          <a:p/>
+        </p:txBody>
+      </p:sp>
+      <p:sp>
+        <p:nvSpPr>
+          <p:cNvPr id="11" name="TextBox 10"/>
+          <p:cNvSpPr txBox="1"/>
+          <p:nvPr/>
+        </p:nvSpPr>
+        <p:spPr>
+          <a:xfrm>
+            <a:off x="8503920" y="1874519"/>
+            <a:ext cx="2926080" cy="365760"/>
+          </a:xfrm>
+          <a:prstGeom prst="rect">
+            <a:avLst/>
+          </a:prstGeom>
+          <a:noFill/>
+        </p:spPr>
+        <p:txBody>
+          <a:bodyPr wrap="square" anchor="t" lIns="0" rIns="0" tIns="0" bIns="0"/>
+          <a:lstStyle/>
+          <a:p>
+            <a:pPr algn="l"/>
+            <a:r>
+              <a:rPr sz="1300" b="1" i="0">
+                <a:solidFill>
+                  <a:srgbClr val="A9C8F0"/>
+                </a:solidFill>
+                <a:latin typeface="Calibri"/>
+              </a:rPr>
+              <a:t>REVISE THIS TOPIC</a:t>
+            </a:r>
+          </a:p>
+        </p:txBody>
+      </p:sp>
+      <p:sp>
+        <p:nvSpPr>
+          <p:cNvPr id="12" name="TextBox 11"/>
+          <p:cNvSpPr txBox="1"/>
+          <p:nvPr/>
+        </p:nvSpPr>
+        <p:spPr>
+          <a:xfrm>
+            <a:off x="8503920" y="2286000"/>
+            <a:ext cx="2926080" cy="548640"/>
+          </a:xfrm>
+          <a:prstGeom prst="rect">
+            <a:avLst/>
+          </a:prstGeom>
+          <a:noFill/>
+        </p:spPr>
+        <p:txBody>
+          <a:bodyPr wrap="square" anchor="t" lIns="0" rIns="0" tIns="0" bIns="0"/>
+          <a:lstStyle/>
+          <a:p>
+            <a:pPr algn="l"/>
+            <a:r>
+              <a:rPr sz="1400" b="0" i="0">
+                <a:solidFill>
+                  <a:srgbClr val="FFFFFF"/>
+                </a:solidFill>
+                <a:latin typeface="Calibri"/>
+              </a:rPr>
+              <a:t>Revision notes for this lesson are on the study wiki:</a:t>
+            </a:r>
+          </a:p>
+        </p:txBody>
+      </p:sp>
+      <p:sp>
+        <p:nvSpPr>
+          <p:cNvPr id="13" name="TextBox 12"/>
+          <p:cNvSpPr txBox="1"/>
+          <p:nvPr/>
+        </p:nvSpPr>
+        <p:spPr>
+          <a:xfrm>
+            <a:off x="8503920" y="2926080"/>
+            <a:ext cx="2926080" cy="1463040"/>
+          </a:xfrm>
+          <a:prstGeom prst="rect">
+            <a:avLst/>
+          </a:prstGeom>
+          <a:noFill/>
+        </p:spPr>
+        <p:txBody>
+          <a:bodyPr wrap="square" anchor="t" lIns="0" rIns="0" tIns="0" bIns="0"/>
+          <a:lstStyle/>
+          <a:p>
+            <a:pPr algn="l"/>
+            <a:r>
+              <a:rPr sz="2000" b="1" i="0">
+                <a:solidFill>
+                  <a:srgbClr val="FFFFFF"/>
+                </a:solidFill>
+                <a:latin typeface="Cambria"/>
+              </a:rPr>
+              <a:t>Engineering Core, Part 2</a:t>
+            </a:r>
+          </a:p>
+        </p:txBody>
+      </p:sp>
+      <p:sp>
+        <p:nvSpPr>
+          <p:cNvPr id="14" name="TextBox 13"/>
+          <p:cNvSpPr txBox="1"/>
+          <p:nvPr/>
+        </p:nvSpPr>
+        <p:spPr>
+          <a:xfrm>
+            <a:off x="548640" y="5669280"/>
+            <a:ext cx="11094415" cy="548640"/>
+          </a:xfrm>
+          <a:prstGeom prst="rect">
+            <a:avLst/>
+          </a:prstGeom>
+          <a:noFill/>
+        </p:spPr>
+        <p:txBody>
+          <a:bodyPr wrap="square" anchor="t" lIns="0" rIns="0" tIns="0" bIns="0"/>
+          <a:lstStyle/>
+          <a:p>
+            <a:pPr algn="l"/>
+            <a:r>
+              <a:rPr sz="1200" b="0" i="0">
+                <a:solidFill>
+                  <a:srgbClr val="A9C8F0"/>
+                </a:solidFill>
+                <a:latin typeface="Calibri"/>
+              </a:rPr>
+              <a:t>https://lana6478.github.io/T-level-Design-Development-Engineering-Manufacturing/#/01-core-component/02-engineering-core-part2.md</a:t>
+            </a:r>
+          </a:p>
+        </p:txBody>
+      </p:sp>
+    </p:spTree>
+  </p:cSld>
+  <p:clrMapOvr>
+    <a:masterClrMapping/>
+  </p:clrMapOvr>
+</p:sld>
+</file>
+
 <file path=ppt/slides/slide2.xml><?xml version="1.0" encoding="utf-8"?>
 <p:sld xmlns:a="http://schemas.openxmlformats.org/drawingml/2006/main" xmlns:p="http://schemas.openxmlformats.org/presentationml/2006/main" xmlns:r="http://schemas.openxmlformats.org/officeDocument/2006/relationships">
   <p:cSld>
@@ -4896,22 +8569,102 @@
       </p:sp>
       <p:sp>
         <p:nvSpPr>
-          <p:cNvPr id="6" name="Rounded Rectangle 5"/>
+          <p:cNvPr id="6" name="TextBox 5"/>
+          <p:cNvSpPr txBox="1"/>
+          <p:nvPr/>
+        </p:nvSpPr>
+        <p:spPr>
+          <a:xfrm>
+            <a:off x="548640" y="1554480"/>
+            <a:ext cx="6720840" cy="4617720"/>
+          </a:xfrm>
+          <a:prstGeom prst="rect">
+            <a:avLst/>
+          </a:prstGeom>
+          <a:noFill/>
+        </p:spPr>
+        <p:txBody>
+          <a:bodyPr wrap="square" lIns="0" rIns="0" tIns="0" bIns="0">
+            <a:spAutoFit/>
+          </a:bodyPr>
+          <a:lstStyle/>
+          <a:p>
+            <a:pPr>
+              <a:spcAft>
+                <a:spcPts val="1260"/>
+              </a:spcAft>
+            </a:pPr>
+            <a:r>
+              <a:rPr sz="2100" b="0">
+                <a:solidFill>
+                  <a:srgbClr val="202122"/>
+                </a:solidFill>
+                <a:latin typeface="Calibri"/>
+              </a:rPr>
+              <a:t>Mechatronics combines mechanical and electronic systems into one.</a:t>
+            </a:r>
+          </a:p>
+          <a:p>
+            <a:pPr>
+              <a:spcAft>
+                <a:spcPts val="1260"/>
+              </a:spcAft>
+            </a:pPr>
+            <a:r>
+              <a:rPr sz="2100" b="0">
+                <a:solidFill>
+                  <a:srgbClr val="202122"/>
+                </a:solidFill>
+                <a:latin typeface="Calibri"/>
+              </a:rPr>
+              <a:t>Mechanical components, such as gears, cams, linkages, levers and pulleys, transmit and change motion. Electronic components sense and control: sensors and transducers measure things, microprocessors and microcontrollers decide what to do, and actuators make things move.</a:t>
+            </a:r>
+          </a:p>
+          <a:p>
+            <a:pPr>
+              <a:spcAft>
+                <a:spcPts val="1260"/>
+              </a:spcAft>
+            </a:pPr>
+            <a:r>
+              <a:rPr sz="2100" b="1">
+                <a:solidFill>
+                  <a:srgbClr val="202122"/>
+                </a:solidFill>
+                <a:latin typeface="Calibri"/>
+              </a:rPr>
+              <a:t>Drives provide the motion:</a:t>
+            </a:r>
+            <a:r>
+              <a:rPr sz="2100" b="0">
+                <a:solidFill>
+                  <a:srgbClr val="202122"/>
+                </a:solidFill>
+                <a:latin typeface="Calibri"/>
+              </a:rPr>
+              <a:t> standard electric motors for continuous rotation, servo motors for precise positions using feedback, and stepper motors that move in fixed steps without needing feedback.</a:t>
+            </a:r>
+          </a:p>
+        </p:txBody>
+      </p:sp>
+      <p:sp>
+        <p:nvSpPr>
+          <p:cNvPr id="7" name="Rounded Rectangle 6"/>
           <p:cNvSpPr/>
           <p:nvPr/>
         </p:nvSpPr>
         <p:spPr>
           <a:xfrm>
-            <a:off x="548640" y="1600200"/>
-            <a:ext cx="3515258" cy="4572000"/>
+            <a:off x="7772400" y="1554480"/>
+            <a:ext cx="3867912" cy="4526280"/>
           </a:xfrm>
           <a:prstGeom prst="roundRect">
             <a:avLst>
-              <a:gd name="adj" fmla="val 6000"/>
+              <a:gd name="adj" fmla="val 8000"/>
             </a:avLst>
           </a:prstGeom>
           <a:solidFill>
-            <a:srgbClr val="EAF3FF"/>
+            <a:srgbClr val="03306E"/>
           </a:solidFill>
           <a:ln>
             <a:noFill/>
@@ -4940,14 +8693,14 @@
       </p:sp>
       <p:sp>
         <p:nvSpPr>
-          <p:cNvPr id="7" name="Oval 6"/>
+          <p:cNvPr id="8" name="Oval 7"/>
           <p:cNvSpPr/>
           <p:nvPr/>
         </p:nvSpPr>
         <p:spPr>
           <a:xfrm>
-            <a:off x="777240" y="1828800"/>
-            <a:ext cx="457200" cy="457200"/>
+            <a:off x="8046720" y="1828800"/>
+            <a:ext cx="548640" cy="548640"/>
           </a:xfrm>
           <a:prstGeom prst="ellipse">
             <a:avLst/>
@@ -4980,46 +8733,13 @@
           <a:p>
             <a:pPr algn="ctr"/>
             <a:r>
-              <a:rPr sz="1500" b="1">
+              <a:rPr sz="1300" b="1">
                 <a:solidFill>
                   <a:srgbClr val="202122"/>
                 </a:solidFill>
                 <a:latin typeface="Calibri"/>
               </a:rPr>
-              <a:t>1</a:t>
-            </a:r>
-          </a:p>
-        </p:txBody>
-      </p:sp>
-      <p:sp>
-        <p:nvSpPr>
-          <p:cNvPr id="8" name="TextBox 7"/>
-          <p:cNvSpPr txBox="1"/>
-          <p:nvPr/>
-        </p:nvSpPr>
-        <p:spPr>
-          <a:xfrm>
-            <a:off x="1371600" y="1801368"/>
-            <a:ext cx="2509418" cy="512064"/>
-          </a:xfrm>
-          <a:prstGeom prst="rect">
-            <a:avLst/>
-          </a:prstGeom>
-          <a:noFill/>
-        </p:spPr>
-        <p:txBody>
-          <a:bodyPr wrap="square" anchor="ctr" lIns="0" rIns="0" tIns="0" bIns="0"/>
-          <a:lstStyle/>
-          <a:p>
-            <a:pPr algn="l"/>
-            <a:r>
-              <a:rPr sz="1900" b="1" i="0">
-                <a:solidFill>
-                  <a:srgbClr val="03306E"/>
-                </a:solidFill>
-                <a:latin typeface="Calibri"/>
-              </a:rPr>
-              <a:t>Mechanical</a:t>
+              <a:t>e.g.</a:t>
             </a:r>
           </a:p>
         </p:txBody>
@@ -5032,8 +8752,8 @@
         </p:nvSpPr>
         <p:spPr>
           <a:xfrm>
-            <a:off x="777240" y="2468880"/>
-            <a:ext cx="3058058" cy="3566160"/>
+            <a:off x="8046720" y="2560320"/>
+            <a:ext cx="3291840" cy="365760"/>
           </a:xfrm>
           <a:prstGeom prst="rect">
             <a:avLst/>
@@ -5046,339 +8766,46 @@
           <a:p>
             <a:pPr algn="l"/>
             <a:r>
-              <a:rPr sz="2000" b="0" i="0">
-                <a:solidFill>
-                  <a:srgbClr val="202122"/>
-                </a:solidFill>
-                <a:latin typeface="Calibri"/>
-              </a:rPr>
-              <a:t>Gears, cams, linkages, levers, pulleys.</a:t>
-            </a:r>
-          </a:p>
-        </p:txBody>
-      </p:sp>
-      <p:sp>
-        <p:nvSpPr>
-          <p:cNvPr id="10" name="Rounded Rectangle 9"/>
-          <p:cNvSpPr/>
-          <p:nvPr/>
-        </p:nvSpPr>
-        <p:spPr>
-          <a:xfrm>
-            <a:off x="4338218" y="1600200"/>
-            <a:ext cx="3515258" cy="4572000"/>
-          </a:xfrm>
-          <a:prstGeom prst="roundRect">
-            <a:avLst>
-              <a:gd name="adj" fmla="val 6000"/>
-            </a:avLst>
-          </a:prstGeom>
-          <a:solidFill>
-            <a:srgbClr val="EAF3FF"/>
-          </a:solidFill>
-          <a:ln>
-            <a:noFill/>
-          </a:ln>
-          <a:effectLst/>
-        </p:spPr>
-        <p:style>
-          <a:lnRef idx="1">
-            <a:schemeClr val="accent1"/>
-          </a:lnRef>
-          <a:fillRef idx="3">
-            <a:schemeClr val="accent1"/>
-          </a:fillRef>
-          <a:effectRef idx="2">
-            <a:schemeClr val="accent1"/>
-          </a:effectRef>
-          <a:fontRef idx="minor">
-            <a:schemeClr val="lt1"/>
-          </a:fontRef>
-        </p:style>
-        <p:txBody>
-          <a:bodyPr rtlCol="0" anchor="ctr"/>
-          <a:lstStyle/>
-          <a:p/>
-        </p:txBody>
-      </p:sp>
-      <p:sp>
-        <p:nvSpPr>
-          <p:cNvPr id="11" name="Oval 10"/>
-          <p:cNvSpPr/>
-          <p:nvPr/>
-        </p:nvSpPr>
-        <p:spPr>
-          <a:xfrm>
-            <a:off x="4566818" y="1828800"/>
-            <a:ext cx="457200" cy="457200"/>
-          </a:xfrm>
-          <a:prstGeom prst="ellipse">
-            <a:avLst/>
-          </a:prstGeom>
-          <a:solidFill>
-            <a:srgbClr val="F2B705"/>
-          </a:solidFill>
-          <a:ln>
-            <a:noFill/>
-          </a:ln>
-          <a:effectLst/>
-        </p:spPr>
-        <p:style>
-          <a:lnRef idx="1">
-            <a:schemeClr val="accent1"/>
-          </a:lnRef>
-          <a:fillRef idx="3">
-            <a:schemeClr val="accent1"/>
-          </a:fillRef>
-          <a:effectRef idx="2">
-            <a:schemeClr val="accent1"/>
-          </a:effectRef>
-          <a:fontRef idx="minor">
-            <a:schemeClr val="lt1"/>
-          </a:fontRef>
-        </p:style>
-        <p:txBody>
-          <a:bodyPr rtlCol="0" anchor="ctr" lIns="0" rIns="0" tIns="0" bIns="0"/>
-          <a:lstStyle/>
-          <a:p>
-            <a:pPr algn="ctr"/>
-            <a:r>
-              <a:rPr sz="1500" b="1">
-                <a:solidFill>
-                  <a:srgbClr val="202122"/>
-                </a:solidFill>
-                <a:latin typeface="Calibri"/>
-              </a:rPr>
-              <a:t>2</a:t>
-            </a:r>
-          </a:p>
-        </p:txBody>
-      </p:sp>
-      <p:sp>
-        <p:nvSpPr>
-          <p:cNvPr id="12" name="TextBox 11"/>
+              <a:rPr sz="1300" b="1" i="0">
+                <a:solidFill>
+                  <a:srgbClr val="A9C8F0"/>
+                </a:solidFill>
+                <a:latin typeface="Calibri"/>
+              </a:rPr>
+              <a:t>EXAMPLE</a:t>
+            </a:r>
+          </a:p>
+        </p:txBody>
+      </p:sp>
+      <p:sp>
+        <p:nvSpPr>
+          <p:cNvPr id="10" name="TextBox 9"/>
           <p:cNvSpPr txBox="1"/>
           <p:nvPr/>
         </p:nvSpPr>
         <p:spPr>
           <a:xfrm>
-            <a:off x="5161178" y="1801368"/>
-            <a:ext cx="2509418" cy="512064"/>
-          </a:xfrm>
-          <a:prstGeom prst="rect">
-            <a:avLst/>
-          </a:prstGeom>
-          <a:noFill/>
-        </p:spPr>
-        <p:txBody>
-          <a:bodyPr wrap="square" anchor="ctr" lIns="0" rIns="0" tIns="0" bIns="0"/>
+            <a:off x="8046720" y="2971800"/>
+            <a:ext cx="3291840" cy="2971800"/>
+          </a:xfrm>
+          <a:prstGeom prst="rect">
+            <a:avLst/>
+          </a:prstGeom>
+          <a:noFill/>
+        </p:spPr>
+        <p:txBody>
+          <a:bodyPr wrap="square" anchor="t" lIns="0" rIns="0" tIns="0" bIns="0"/>
           <a:lstStyle/>
           <a:p>
             <a:pPr algn="l"/>
             <a:r>
-              <a:rPr sz="1900" b="1" i="0">
-                <a:solidFill>
-                  <a:srgbClr val="03306E"/>
-                </a:solidFill>
-                <a:latin typeface="Calibri"/>
-              </a:rPr>
-              <a:t>Electronic</a:t>
-            </a:r>
-          </a:p>
-        </p:txBody>
-      </p:sp>
-      <p:sp>
-        <p:nvSpPr>
-          <p:cNvPr id="13" name="TextBox 12"/>
-          <p:cNvSpPr txBox="1"/>
-          <p:nvPr/>
-        </p:nvSpPr>
-        <p:spPr>
-          <a:xfrm>
-            <a:off x="4566818" y="2468880"/>
-            <a:ext cx="3058058" cy="3566160"/>
-          </a:xfrm>
-          <a:prstGeom prst="rect">
-            <a:avLst/>
-          </a:prstGeom>
-          <a:noFill/>
-        </p:spPr>
-        <p:txBody>
-          <a:bodyPr wrap="square" anchor="t" lIns="0" rIns="0" tIns="0" bIns="0"/>
-          <a:lstStyle/>
-          <a:p>
-            <a:pPr algn="l"/>
-            <a:r>
-              <a:rPr sz="2000" b="0" i="0">
-                <a:solidFill>
-                  <a:srgbClr val="202122"/>
-                </a:solidFill>
-                <a:latin typeface="Calibri"/>
-              </a:rPr>
-              <a:t>Sensors, transducers, microprocessors, microcontrollers, actuators.</a:t>
-            </a:r>
-          </a:p>
-        </p:txBody>
-      </p:sp>
-      <p:sp>
-        <p:nvSpPr>
-          <p:cNvPr id="14" name="Rounded Rectangle 13"/>
-          <p:cNvSpPr/>
-          <p:nvPr/>
-        </p:nvSpPr>
-        <p:spPr>
-          <a:xfrm>
-            <a:off x="8127796" y="1600200"/>
-            <a:ext cx="3515258" cy="4572000"/>
-          </a:xfrm>
-          <a:prstGeom prst="roundRect">
-            <a:avLst>
-              <a:gd name="adj" fmla="val 6000"/>
-            </a:avLst>
-          </a:prstGeom>
-          <a:solidFill>
-            <a:srgbClr val="EAF3FF"/>
-          </a:solidFill>
-          <a:ln>
-            <a:noFill/>
-          </a:ln>
-          <a:effectLst/>
-        </p:spPr>
-        <p:style>
-          <a:lnRef idx="1">
-            <a:schemeClr val="accent1"/>
-          </a:lnRef>
-          <a:fillRef idx="3">
-            <a:schemeClr val="accent1"/>
-          </a:fillRef>
-          <a:effectRef idx="2">
-            <a:schemeClr val="accent1"/>
-          </a:effectRef>
-          <a:fontRef idx="minor">
-            <a:schemeClr val="lt1"/>
-          </a:fontRef>
-        </p:style>
-        <p:txBody>
-          <a:bodyPr rtlCol="0" anchor="ctr"/>
-          <a:lstStyle/>
-          <a:p/>
-        </p:txBody>
-      </p:sp>
-      <p:sp>
-        <p:nvSpPr>
-          <p:cNvPr id="15" name="Oval 14"/>
-          <p:cNvSpPr/>
-          <p:nvPr/>
-        </p:nvSpPr>
-        <p:spPr>
-          <a:xfrm>
-            <a:off x="8356396" y="1828800"/>
-            <a:ext cx="457200" cy="457200"/>
-          </a:xfrm>
-          <a:prstGeom prst="ellipse">
-            <a:avLst/>
-          </a:prstGeom>
-          <a:solidFill>
-            <a:srgbClr val="F2B705"/>
-          </a:solidFill>
-          <a:ln>
-            <a:noFill/>
-          </a:ln>
-          <a:effectLst/>
-        </p:spPr>
-        <p:style>
-          <a:lnRef idx="1">
-            <a:schemeClr val="accent1"/>
-          </a:lnRef>
-          <a:fillRef idx="3">
-            <a:schemeClr val="accent1"/>
-          </a:fillRef>
-          <a:effectRef idx="2">
-            <a:schemeClr val="accent1"/>
-          </a:effectRef>
-          <a:fontRef idx="minor">
-            <a:schemeClr val="lt1"/>
-          </a:fontRef>
-        </p:style>
-        <p:txBody>
-          <a:bodyPr rtlCol="0" anchor="ctr" lIns="0" rIns="0" tIns="0" bIns="0"/>
-          <a:lstStyle/>
-          <a:p>
-            <a:pPr algn="ctr"/>
-            <a:r>
-              <a:rPr sz="1500" b="1">
-                <a:solidFill>
-                  <a:srgbClr val="202122"/>
-                </a:solidFill>
-                <a:latin typeface="Calibri"/>
-              </a:rPr>
-              <a:t>3</a:t>
-            </a:r>
-          </a:p>
-        </p:txBody>
-      </p:sp>
-      <p:sp>
-        <p:nvSpPr>
-          <p:cNvPr id="16" name="TextBox 15"/>
-          <p:cNvSpPr txBox="1"/>
-          <p:nvPr/>
-        </p:nvSpPr>
-        <p:spPr>
-          <a:xfrm>
-            <a:off x="8950756" y="1801368"/>
-            <a:ext cx="2509418" cy="512064"/>
-          </a:xfrm>
-          <a:prstGeom prst="rect">
-            <a:avLst/>
-          </a:prstGeom>
-          <a:noFill/>
-        </p:spPr>
-        <p:txBody>
-          <a:bodyPr wrap="square" anchor="ctr" lIns="0" rIns="0" tIns="0" bIns="0"/>
-          <a:lstStyle/>
-          <a:p>
-            <a:pPr algn="l"/>
-            <a:r>
-              <a:rPr sz="1900" b="1" i="0">
-                <a:solidFill>
-                  <a:srgbClr val="03306E"/>
-                </a:solidFill>
-                <a:latin typeface="Calibri"/>
-              </a:rPr>
-              <a:t>Drives</a:t>
-            </a:r>
-          </a:p>
-        </p:txBody>
-      </p:sp>
-      <p:sp>
-        <p:nvSpPr>
-          <p:cNvPr id="17" name="TextBox 16"/>
-          <p:cNvSpPr txBox="1"/>
-          <p:nvPr/>
-        </p:nvSpPr>
-        <p:spPr>
-          <a:xfrm>
-            <a:off x="8356396" y="2468880"/>
-            <a:ext cx="3058058" cy="3566160"/>
-          </a:xfrm>
-          <a:prstGeom prst="rect">
-            <a:avLst/>
-          </a:prstGeom>
-          <a:noFill/>
-        </p:spPr>
-        <p:txBody>
-          <a:bodyPr wrap="square" anchor="t" lIns="0" rIns="0" tIns="0" bIns="0"/>
-          <a:lstStyle/>
-          <a:p>
-            <a:pPr algn="l"/>
-            <a:r>
-              <a:rPr sz="2000" b="0" i="0">
-                <a:solidFill>
-                  <a:srgbClr val="202122"/>
-                </a:solidFill>
-                <a:latin typeface="Calibri"/>
-              </a:rPr>
-              <a:t>Standard electric motors, servo motors, stepper motors.</a:t>
+              <a:rPr sz="1900" b="0" i="0">
+                <a:solidFill>
+                  <a:srgbClr val="FFFFFF"/>
+                </a:solidFill>
+                <a:latin typeface="Cambria"/>
+              </a:rPr>
+              <a:t>A 3D printer: stepper motors move the head precisely, a microcontroller runs the program, and a thermistor senses the nozzle temperature.</a:t>
             </a:r>
           </a:p>
         </p:txBody>
@@ -5470,7 +8897,7 @@
                 </a:solidFill>
                 <a:latin typeface="Cambria"/>
               </a:rPr>
-              <a:t>Programmable logic controllers (PLCs)</a:t>
+              <a:t>Components of a mechatronic system</a:t>
             </a:r>
           </a:p>
         </p:txBody>
@@ -5550,7 +8977,7 @@
         <p:spPr>
           <a:xfrm>
             <a:off x="548640" y="1600200"/>
-            <a:ext cx="5410047" cy="2148840"/>
+            <a:ext cx="3515258" cy="4572000"/>
           </a:xfrm>
           <a:prstGeom prst="roundRect">
             <a:avLst>
@@ -5647,7 +9074,7 @@
         <p:spPr>
           <a:xfrm>
             <a:off x="1371600" y="1801368"/>
-            <a:ext cx="4404207" cy="512064"/>
+            <a:ext cx="2509418" cy="512064"/>
           </a:xfrm>
           <a:prstGeom prst="rect">
             <a:avLst/>
@@ -5666,7 +9093,7 @@
                 </a:solidFill>
                 <a:latin typeface="Calibri"/>
               </a:rPr>
-              <a:t>Types</a:t>
+              <a:t>Mechanical</a:t>
             </a:r>
           </a:p>
         </p:txBody>
@@ -5680,7 +9107,7 @@
         <p:spPr>
           <a:xfrm>
             <a:off x="777240" y="2468880"/>
-            <a:ext cx="4952847" cy="1143000"/>
+            <a:ext cx="3058058" cy="3566160"/>
           </a:xfrm>
           <a:prstGeom prst="rect">
             <a:avLst/>
@@ -5699,7 +9126,7 @@
                 </a:solidFill>
                 <a:latin typeface="Calibri"/>
               </a:rPr>
-              <a:t>Unitary, unitary with modular features, and modular.</a:t>
+              <a:t>Gears, cams, linkages, levers, pulleys.</a:t>
             </a:r>
           </a:p>
         </p:txBody>
@@ -5712,8 +9139,8 @@
         </p:nvSpPr>
         <p:spPr>
           <a:xfrm>
-            <a:off x="6233007" y="1600200"/>
-            <a:ext cx="5410047" cy="2148840"/>
+            <a:off x="4338218" y="1600200"/>
+            <a:ext cx="3515258" cy="4572000"/>
           </a:xfrm>
           <a:prstGeom prst="roundRect">
             <a:avLst>
@@ -5756,7 +9183,7 @@
         </p:nvSpPr>
         <p:spPr>
           <a:xfrm>
-            <a:off x="6461607" y="1828800"/>
+            <a:off x="4566818" y="1828800"/>
             <a:ext cx="457200" cy="457200"/>
           </a:xfrm>
           <a:prstGeom prst="ellipse">
@@ -5809,8 +9236,8 @@
         </p:nvSpPr>
         <p:spPr>
           <a:xfrm>
-            <a:off x="7055967" y="1801368"/>
-            <a:ext cx="4404207" cy="512064"/>
+            <a:off x="5161178" y="1801368"/>
+            <a:ext cx="2509418" cy="512064"/>
           </a:xfrm>
           <a:prstGeom prst="rect">
             <a:avLst/>
@@ -5829,7 +9256,7 @@
                 </a:solidFill>
                 <a:latin typeface="Calibri"/>
               </a:rPr>
-              <a:t>Operation</a:t>
+              <a:t>Electronic</a:t>
             </a:r>
           </a:p>
         </p:txBody>
@@ -5842,8 +9269,8 @@
         </p:nvSpPr>
         <p:spPr>
           <a:xfrm>
-            <a:off x="6461607" y="2468880"/>
-            <a:ext cx="4952847" cy="1143000"/>
+            <a:off x="4566818" y="2468880"/>
+            <a:ext cx="3058058" cy="3566160"/>
           </a:xfrm>
           <a:prstGeom prst="rect">
             <a:avLst/>
@@ -5862,7 +9289,7 @@
                 </a:solidFill>
                 <a:latin typeface="Calibri"/>
               </a:rPr>
-              <a:t>Condition sensor signals, run the program, drive outputs.</a:t>
+              <a:t>Sensors, transducers, microprocessors, microcontrollers, actuators.</a:t>
             </a:r>
           </a:p>
         </p:txBody>
@@ -5875,8 +9302,8 @@
         </p:nvSpPr>
         <p:spPr>
           <a:xfrm>
-            <a:off x="548640" y="4023360"/>
-            <a:ext cx="5410047" cy="2148840"/>
+            <a:off x="8127796" y="1600200"/>
+            <a:ext cx="3515258" cy="4572000"/>
           </a:xfrm>
           <a:prstGeom prst="roundRect">
             <a:avLst>
@@ -5919,7 +9346,7 @@
         </p:nvSpPr>
         <p:spPr>
           <a:xfrm>
-            <a:off x="777240" y="4251960"/>
+            <a:off x="8356396" y="1828800"/>
             <a:ext cx="457200" cy="457200"/>
           </a:xfrm>
           <a:prstGeom prst="ellipse">
@@ -5972,8 +9399,8 @@
         </p:nvSpPr>
         <p:spPr>
           <a:xfrm>
-            <a:off x="1371600" y="4224528"/>
-            <a:ext cx="4404207" cy="512064"/>
+            <a:off x="8950756" y="1801368"/>
+            <a:ext cx="2509418" cy="512064"/>
           </a:xfrm>
           <a:prstGeom prst="rect">
             <a:avLst/>
@@ -5992,7 +9419,7 @@
                 </a:solidFill>
                 <a:latin typeface="Calibri"/>
               </a:rPr>
-              <a:t>Function</a:t>
+              <a:t>Drives</a:t>
             </a:r>
           </a:p>
         </p:txBody>
@@ -6005,8 +9432,8 @@
         </p:nvSpPr>
         <p:spPr>
           <a:xfrm>
-            <a:off x="777240" y="4892040"/>
-            <a:ext cx="4952847" cy="1143000"/>
+            <a:off x="8356396" y="2468880"/>
+            <a:ext cx="3058058" cy="3566160"/>
           </a:xfrm>
           <a:prstGeom prst="rect">
             <a:avLst/>
@@ -6025,170 +9452,7 @@
                 </a:solidFill>
                 <a:latin typeface="Calibri"/>
               </a:rPr>
-              <a:t>Process blocks, motor driver ICs, interface devices.</a:t>
-            </a:r>
-          </a:p>
-        </p:txBody>
-      </p:sp>
-      <p:sp>
-        <p:nvSpPr>
-          <p:cNvPr id="18" name="Rounded Rectangle 17"/>
-          <p:cNvSpPr/>
-          <p:nvPr/>
-        </p:nvSpPr>
-        <p:spPr>
-          <a:xfrm>
-            <a:off x="6233007" y="4023360"/>
-            <a:ext cx="5410047" cy="2148840"/>
-          </a:xfrm>
-          <a:prstGeom prst="roundRect">
-            <a:avLst>
-              <a:gd name="adj" fmla="val 6000"/>
-            </a:avLst>
-          </a:prstGeom>
-          <a:solidFill>
-            <a:srgbClr val="EAF3FF"/>
-          </a:solidFill>
-          <a:ln>
-            <a:noFill/>
-          </a:ln>
-          <a:effectLst/>
-        </p:spPr>
-        <p:style>
-          <a:lnRef idx="1">
-            <a:schemeClr val="accent1"/>
-          </a:lnRef>
-          <a:fillRef idx="3">
-            <a:schemeClr val="accent1"/>
-          </a:fillRef>
-          <a:effectRef idx="2">
-            <a:schemeClr val="accent1"/>
-          </a:effectRef>
-          <a:fontRef idx="minor">
-            <a:schemeClr val="lt1"/>
-          </a:fontRef>
-        </p:style>
-        <p:txBody>
-          <a:bodyPr rtlCol="0" anchor="ctr"/>
-          <a:lstStyle/>
-          <a:p/>
-        </p:txBody>
-      </p:sp>
-      <p:sp>
-        <p:nvSpPr>
-          <p:cNvPr id="19" name="Oval 18"/>
-          <p:cNvSpPr/>
-          <p:nvPr/>
-        </p:nvSpPr>
-        <p:spPr>
-          <a:xfrm>
-            <a:off x="6461607" y="4251960"/>
-            <a:ext cx="457200" cy="457200"/>
-          </a:xfrm>
-          <a:prstGeom prst="ellipse">
-            <a:avLst/>
-          </a:prstGeom>
-          <a:solidFill>
-            <a:srgbClr val="F2B705"/>
-          </a:solidFill>
-          <a:ln>
-            <a:noFill/>
-          </a:ln>
-          <a:effectLst/>
-        </p:spPr>
-        <p:style>
-          <a:lnRef idx="1">
-            <a:schemeClr val="accent1"/>
-          </a:lnRef>
-          <a:fillRef idx="3">
-            <a:schemeClr val="accent1"/>
-          </a:fillRef>
-          <a:effectRef idx="2">
-            <a:schemeClr val="accent1"/>
-          </a:effectRef>
-          <a:fontRef idx="minor">
-            <a:schemeClr val="lt1"/>
-          </a:fontRef>
-        </p:style>
-        <p:txBody>
-          <a:bodyPr rtlCol="0" anchor="ctr" lIns="0" rIns="0" tIns="0" bIns="0"/>
-          <a:lstStyle/>
-          <a:p>
-            <a:pPr algn="ctr"/>
-            <a:r>
-              <a:rPr sz="1500" b="1">
-                <a:solidFill>
-                  <a:srgbClr val="202122"/>
-                </a:solidFill>
-                <a:latin typeface="Calibri"/>
-              </a:rPr>
-              <a:t>4</a:t>
-            </a:r>
-          </a:p>
-        </p:txBody>
-      </p:sp>
-      <p:sp>
-        <p:nvSpPr>
-          <p:cNvPr id="20" name="TextBox 19"/>
-          <p:cNvSpPr txBox="1"/>
-          <p:nvPr/>
-        </p:nvSpPr>
-        <p:spPr>
-          <a:xfrm>
-            <a:off x="7055967" y="4224528"/>
-            <a:ext cx="4404207" cy="512064"/>
-          </a:xfrm>
-          <a:prstGeom prst="rect">
-            <a:avLst/>
-          </a:prstGeom>
-          <a:noFill/>
-        </p:spPr>
-        <p:txBody>
-          <a:bodyPr wrap="square" anchor="ctr" lIns="0" rIns="0" tIns="0" bIns="0"/>
-          <a:lstStyle/>
-          <a:p>
-            <a:pPr algn="l"/>
-            <a:r>
-              <a:rPr sz="1900" b="1" i="0">
-                <a:solidFill>
-                  <a:srgbClr val="03306E"/>
-                </a:solidFill>
-                <a:latin typeface="Calibri"/>
-              </a:rPr>
-              <a:t>Applications</a:t>
-            </a:r>
-          </a:p>
-        </p:txBody>
-      </p:sp>
-      <p:sp>
-        <p:nvSpPr>
-          <p:cNvPr id="21" name="TextBox 20"/>
-          <p:cNvSpPr txBox="1"/>
-          <p:nvPr/>
-        </p:nvSpPr>
-        <p:spPr>
-          <a:xfrm>
-            <a:off x="6461607" y="4892040"/>
-            <a:ext cx="4952847" cy="1143000"/>
-          </a:xfrm>
-          <a:prstGeom prst="rect">
-            <a:avLst/>
-          </a:prstGeom>
-          <a:noFill/>
-        </p:spPr>
-        <p:txBody>
-          <a:bodyPr wrap="square" anchor="t" lIns="0" rIns="0" tIns="0" bIns="0"/>
-          <a:lstStyle/>
-          <a:p>
-            <a:pPr algn="l"/>
-            <a:r>
-              <a:rPr sz="2000" b="0" i="0">
-                <a:solidFill>
-                  <a:srgbClr val="202122"/>
-                </a:solidFill>
-                <a:latin typeface="Calibri"/>
-              </a:rPr>
-              <a:t>Robotic arms, conveyors, packaging, SCADA, remote units, animatronics.</a:t>
+              <a:t>Standard electric motors, servo motors, stepper motors.</a:t>
             </a:r>
           </a:p>
         </p:txBody>
@@ -6280,7 +9544,7 @@
                 </a:solidFill>
                 <a:latin typeface="Cambria"/>
               </a:rPr>
-              <a:t>Hydraulics and pneumatics</a:t>
+              <a:t>Quick check: Components of a mechatronic system</a:t>
             </a:r>
           </a:p>
         </p:txBody>
@@ -6353,22 +9617,20 @@
       </p:sp>
       <p:sp>
         <p:nvSpPr>
-          <p:cNvPr id="6" name="Rounded Rectangle 5"/>
+          <p:cNvPr id="6" name="Oval 5"/>
           <p:cNvSpPr/>
           <p:nvPr/>
         </p:nvSpPr>
         <p:spPr>
           <a:xfrm>
-            <a:off x="548640" y="1600200"/>
-            <a:ext cx="5364327" cy="640080"/>
-          </a:xfrm>
-          <a:prstGeom prst="roundRect">
-            <a:avLst>
-              <a:gd name="adj" fmla="val 15000"/>
-            </a:avLst>
+            <a:off x="548640" y="1691640"/>
+            <a:ext cx="502920" cy="502920"/>
+          </a:xfrm>
+          <a:prstGeom prst="ellipse">
+            <a:avLst/>
           </a:prstGeom>
           <a:solidFill>
-            <a:srgbClr val="03306E"/>
+            <a:srgbClr val="F2B705"/>
           </a:solidFill>
           <a:ln>
             <a:noFill/>
@@ -6390,9 +9652,20 @@
           </a:fontRef>
         </p:style>
         <p:txBody>
-          <a:bodyPr rtlCol="0" anchor="ctr"/>
-          <a:lstStyle/>
-          <a:p/>
+          <a:bodyPr rtlCol="0" anchor="ctr" lIns="0" rIns="0" tIns="0" bIns="0"/>
+          <a:lstStyle/>
+          <a:p>
+            <a:pPr algn="ctr"/>
+            <a:r>
+              <a:rPr sz="1600" b="1">
+                <a:solidFill>
+                  <a:srgbClr val="202122"/>
+                </a:solidFill>
+                <a:latin typeface="Calibri"/>
+              </a:rPr>
+              <a:t>1</a:t>
+            </a:r>
+          </a:p>
         </p:txBody>
       </p:sp>
       <p:sp>
@@ -6403,49 +9676,47 @@
         </p:nvSpPr>
         <p:spPr>
           <a:xfrm>
-            <a:off x="777240" y="1600200"/>
-            <a:ext cx="4907127" cy="640080"/>
-          </a:xfrm>
-          <a:prstGeom prst="rect">
-            <a:avLst/>
-          </a:prstGeom>
-          <a:noFill/>
-        </p:spPr>
-        <p:txBody>
-          <a:bodyPr wrap="square" anchor="ctr" lIns="0" rIns="0" tIns="0" bIns="0"/>
+            <a:off x="1371600" y="1645920"/>
+            <a:ext cx="10271455" cy="1188720"/>
+          </a:xfrm>
+          <a:prstGeom prst="rect">
+            <a:avLst/>
+          </a:prstGeom>
+          <a:noFill/>
+        </p:spPr>
+        <p:txBody>
+          <a:bodyPr wrap="square" anchor="t" lIns="0" rIns="0" tIns="0" bIns="0"/>
           <a:lstStyle/>
           <a:p>
             <a:pPr algn="l"/>
             <a:r>
-              <a:rPr sz="2000" b="1" i="0">
-                <a:solidFill>
-                  <a:srgbClr val="FFFFFF"/>
-                </a:solidFill>
-                <a:latin typeface="Calibri"/>
-              </a:rPr>
-              <a:t>Hydraulics (oil)</a:t>
-            </a:r>
-          </a:p>
-        </p:txBody>
-      </p:sp>
-      <p:sp>
-        <p:nvSpPr>
-          <p:cNvPr id="8" name="Rounded Rectangle 7"/>
+              <a:rPr sz="2400" b="0" i="0">
+                <a:solidFill>
+                  <a:srgbClr val="202122"/>
+                </a:solidFill>
+                <a:latin typeface="Calibri"/>
+              </a:rPr>
+              <a:t>What does an actuator do?</a:t>
+            </a:r>
+          </a:p>
+        </p:txBody>
+      </p:sp>
+      <p:sp>
+        <p:nvSpPr>
+          <p:cNvPr id="8" name="Oval 7"/>
           <p:cNvSpPr/>
           <p:nvPr/>
         </p:nvSpPr>
         <p:spPr>
           <a:xfrm>
-            <a:off x="548640" y="2377440"/>
-            <a:ext cx="5364327" cy="3794760"/>
-          </a:xfrm>
-          <a:prstGeom prst="roundRect">
-            <a:avLst>
-              <a:gd name="adj" fmla="val 4000"/>
-            </a:avLst>
+            <a:off x="548640" y="3108960"/>
+            <a:ext cx="502920" cy="502920"/>
+          </a:xfrm>
+          <a:prstGeom prst="ellipse">
+            <a:avLst/>
           </a:prstGeom>
           <a:solidFill>
-            <a:srgbClr val="EAF3FF"/>
+            <a:srgbClr val="F2B705"/>
           </a:solidFill>
           <a:ln>
             <a:noFill/>
@@ -6467,9 +9738,20 @@
           </a:fontRef>
         </p:style>
         <p:txBody>
-          <a:bodyPr rtlCol="0" anchor="ctr"/>
-          <a:lstStyle/>
-          <a:p/>
+          <a:bodyPr rtlCol="0" anchor="ctr" lIns="0" rIns="0" tIns="0" bIns="0"/>
+          <a:lstStyle/>
+          <a:p>
+            <a:pPr algn="ctr"/>
+            <a:r>
+              <a:rPr sz="1600" b="1">
+                <a:solidFill>
+                  <a:srgbClr val="202122"/>
+                </a:solidFill>
+                <a:latin typeface="Calibri"/>
+              </a:rPr>
+              <a:t>2</a:t>
+            </a:r>
+          </a:p>
         </p:txBody>
       </p:sp>
       <p:sp>
@@ -6480,123 +9762,47 @@
         </p:nvSpPr>
         <p:spPr>
           <a:xfrm>
-            <a:off x="822959" y="2606040"/>
-            <a:ext cx="4815687" cy="3337560"/>
-          </a:xfrm>
-          <a:prstGeom prst="rect">
-            <a:avLst/>
-          </a:prstGeom>
-          <a:noFill/>
-        </p:spPr>
-        <p:txBody>
-          <a:bodyPr wrap="square" lIns="0" rIns="0" tIns="0" bIns="0">
-            <a:spAutoFit/>
-          </a:bodyPr>
-          <a:lstStyle/>
-          <a:p>
-            <a:pPr marL="274320" indent="-274320">
-              <a:spcAft>
-                <a:spcPts val="990"/>
-              </a:spcAft>
-              <a:buClr>
-                <a:srgbClr val="0645AD"/>
-              </a:buClr>
-              <a:buFont typeface="Arial"/>
-              <a:buChar char="•"/>
-            </a:pPr>
-            <a:r>
-              <a:rPr sz="2200" b="0">
+            <a:off x="1371600" y="3063240"/>
+            <a:ext cx="10271455" cy="1188720"/>
+          </a:xfrm>
+          <a:prstGeom prst="rect">
+            <a:avLst/>
+          </a:prstGeom>
+          <a:noFill/>
+        </p:spPr>
+        <p:txBody>
+          <a:bodyPr wrap="square" anchor="t" lIns="0" rIns="0" tIns="0" bIns="0"/>
+          <a:lstStyle/>
+          <a:p>
+            <a:pPr algn="l"/>
+            <a:r>
+              <a:rPr sz="2400" b="0" i="0">
                 <a:solidFill>
                   <a:srgbClr val="202122"/>
                 </a:solidFill>
                 <a:latin typeface="Calibri"/>
               </a:rPr>
-              <a:t>Nearly incompressible fluid</a:t>
-            </a:r>
-          </a:p>
-          <a:p>
-            <a:pPr marL="274320" indent="-274320">
-              <a:spcAft>
-                <a:spcPts val="990"/>
-              </a:spcAft>
-              <a:buClr>
-                <a:srgbClr val="0645AD"/>
-              </a:buClr>
-              <a:buFont typeface="Arial"/>
-              <a:buChar char="•"/>
-            </a:pPr>
-            <a:r>
-              <a:rPr sz="2200" b="0">
-                <a:solidFill>
-                  <a:srgbClr val="202122"/>
-                </a:solidFill>
-                <a:latin typeface="Calibri"/>
-              </a:rPr>
-              <a:t>Very high forces, precise control</a:t>
-            </a:r>
-          </a:p>
-          <a:p>
-            <a:pPr marL="274320" indent="-274320">
-              <a:spcAft>
-                <a:spcPts val="990"/>
-              </a:spcAft>
-              <a:buClr>
-                <a:srgbClr val="0645AD"/>
-              </a:buClr>
-              <a:buFont typeface="Arial"/>
-              <a:buChar char="•"/>
-            </a:pPr>
-            <a:r>
-              <a:rPr sz="2200" b="0">
-                <a:solidFill>
-                  <a:srgbClr val="202122"/>
-                </a:solidFill>
-                <a:latin typeface="Calibri"/>
-              </a:rPr>
-              <a:t>Risk of leaks and fire from oil</a:t>
-            </a:r>
-          </a:p>
-          <a:p>
-            <a:pPr marL="274320" indent="-274320">
-              <a:spcAft>
-                <a:spcPts val="990"/>
-              </a:spcAft>
-              <a:buClr>
-                <a:srgbClr val="0645AD"/>
-              </a:buClr>
-              <a:buFont typeface="Arial"/>
-              <a:buChar char="•"/>
-            </a:pPr>
-            <a:r>
-              <a:rPr sz="2200" b="0">
-                <a:solidFill>
-                  <a:srgbClr val="202122"/>
-                </a:solidFill>
-                <a:latin typeface="Calibri"/>
-              </a:rPr>
-              <a:t>e.g. excavators, presses</a:t>
-            </a:r>
-          </a:p>
-        </p:txBody>
-      </p:sp>
-      <p:sp>
-        <p:nvSpPr>
-          <p:cNvPr id="10" name="Rounded Rectangle 9"/>
+              <a:t>Which motor uses feedback for precise positioning?</a:t>
+            </a:r>
+          </a:p>
+        </p:txBody>
+      </p:sp>
+      <p:sp>
+        <p:nvSpPr>
+          <p:cNvPr id="10" name="Oval 9"/>
           <p:cNvSpPr/>
           <p:nvPr/>
         </p:nvSpPr>
         <p:spPr>
           <a:xfrm>
-            <a:off x="6278727" y="1600200"/>
-            <a:ext cx="5364327" cy="640080"/>
-          </a:xfrm>
-          <a:prstGeom prst="roundRect">
-            <a:avLst>
-              <a:gd name="adj" fmla="val 15000"/>
-            </a:avLst>
+            <a:off x="548640" y="4526280"/>
+            <a:ext cx="502920" cy="502920"/>
+          </a:xfrm>
+          <a:prstGeom prst="ellipse">
+            <a:avLst/>
           </a:prstGeom>
           <a:solidFill>
-            <a:srgbClr val="0645AD"/>
+            <a:srgbClr val="F2B705"/>
           </a:solidFill>
           <a:ln>
             <a:noFill/>
@@ -6618,9 +9824,20 @@
           </a:fontRef>
         </p:style>
         <p:txBody>
-          <a:bodyPr rtlCol="0" anchor="ctr"/>
-          <a:lstStyle/>
-          <a:p/>
+          <a:bodyPr rtlCol="0" anchor="ctr" lIns="0" rIns="0" tIns="0" bIns="0"/>
+          <a:lstStyle/>
+          <a:p>
+            <a:pPr algn="ctr"/>
+            <a:r>
+              <a:rPr sz="1600" b="1">
+                <a:solidFill>
+                  <a:srgbClr val="202122"/>
+                </a:solidFill>
+                <a:latin typeface="Calibri"/>
+              </a:rPr>
+              <a:t>3</a:t>
+            </a:r>
+          </a:p>
         </p:txBody>
       </p:sp>
       <p:sp>
@@ -6631,178 +9848,60 @@
         </p:nvSpPr>
         <p:spPr>
           <a:xfrm>
-            <a:off x="6507327" y="1600200"/>
-            <a:ext cx="4907127" cy="640080"/>
-          </a:xfrm>
-          <a:prstGeom prst="rect">
-            <a:avLst/>
-          </a:prstGeom>
-          <a:noFill/>
-        </p:spPr>
-        <p:txBody>
-          <a:bodyPr wrap="square" anchor="ctr" lIns="0" rIns="0" tIns="0" bIns="0"/>
+            <a:off x="1371600" y="4480560"/>
+            <a:ext cx="10271455" cy="1188720"/>
+          </a:xfrm>
+          <a:prstGeom prst="rect">
+            <a:avLst/>
+          </a:prstGeom>
+          <a:noFill/>
+        </p:spPr>
+        <p:txBody>
+          <a:bodyPr wrap="square" anchor="t" lIns="0" rIns="0" tIns="0" bIns="0"/>
           <a:lstStyle/>
           <a:p>
             <a:pPr algn="l"/>
             <a:r>
-              <a:rPr sz="2000" b="1" i="0">
-                <a:solidFill>
-                  <a:srgbClr val="FFFFFF"/>
-                </a:solidFill>
-                <a:latin typeface="Calibri"/>
-              </a:rPr>
-              <a:t>Pneumatics (air)</a:t>
-            </a:r>
-          </a:p>
-        </p:txBody>
-      </p:sp>
-      <p:sp>
-        <p:nvSpPr>
-          <p:cNvPr id="12" name="Rounded Rectangle 11"/>
-          <p:cNvSpPr/>
-          <p:nvPr/>
-        </p:nvSpPr>
-        <p:spPr>
-          <a:xfrm>
-            <a:off x="6278727" y="2377440"/>
-            <a:ext cx="5364327" cy="3794760"/>
-          </a:xfrm>
-          <a:prstGeom prst="roundRect">
-            <a:avLst>
-              <a:gd name="adj" fmla="val 4000"/>
-            </a:avLst>
-          </a:prstGeom>
-          <a:solidFill>
-            <a:srgbClr val="EAF3FF"/>
-          </a:solidFill>
-          <a:ln>
-            <a:noFill/>
-          </a:ln>
-          <a:effectLst/>
-        </p:spPr>
-        <p:style>
-          <a:lnRef idx="1">
-            <a:schemeClr val="accent1"/>
-          </a:lnRef>
-          <a:fillRef idx="3">
-            <a:schemeClr val="accent1"/>
-          </a:fillRef>
-          <a:effectRef idx="2">
-            <a:schemeClr val="accent1"/>
-          </a:effectRef>
-          <a:fontRef idx="minor">
-            <a:schemeClr val="lt1"/>
-          </a:fontRef>
-        </p:style>
-        <p:txBody>
-          <a:bodyPr rtlCol="0" anchor="ctr"/>
-          <a:lstStyle/>
-          <a:p/>
-        </p:txBody>
-      </p:sp>
-      <p:sp>
-        <p:nvSpPr>
-          <p:cNvPr id="13" name="TextBox 12"/>
+              <a:rPr sz="2400" b="0" i="0">
+                <a:solidFill>
+                  <a:srgbClr val="202122"/>
+                </a:solidFill>
+                <a:latin typeface="Calibri"/>
+              </a:rPr>
+              <a:t>What does a transducer do?</a:t>
+            </a:r>
+          </a:p>
+        </p:txBody>
+      </p:sp>
+      <p:sp>
+        <p:nvSpPr>
+          <p:cNvPr id="12" name="TextBox 11"/>
           <p:cNvSpPr txBox="1"/>
           <p:nvPr/>
         </p:nvSpPr>
         <p:spPr>
           <a:xfrm>
-            <a:off x="6553047" y="2606040"/>
-            <a:ext cx="4815687" cy="3337560"/>
-          </a:xfrm>
-          <a:prstGeom prst="rect">
-            <a:avLst/>
-          </a:prstGeom>
-          <a:noFill/>
-        </p:spPr>
-        <p:txBody>
-          <a:bodyPr wrap="square" lIns="0" rIns="0" tIns="0" bIns="0">
-            <a:spAutoFit/>
-          </a:bodyPr>
-          <a:lstStyle/>
-          <a:p>
-            <a:pPr marL="274320" indent="-274320">
-              <a:spcAft>
-                <a:spcPts val="990"/>
-              </a:spcAft>
-              <a:buClr>
-                <a:srgbClr val="0645AD"/>
-              </a:buClr>
-              <a:buFont typeface="Arial"/>
-              <a:buChar char="•"/>
-            </a:pPr>
-            <a:r>
-              <a:rPr sz="2200" b="0">
-                <a:solidFill>
-                  <a:srgbClr val="202122"/>
-                </a:solidFill>
-                <a:latin typeface="Calibri"/>
-              </a:rPr>
-              <a:t>Compressible, so springy</a:t>
-            </a:r>
-          </a:p>
-          <a:p>
-            <a:pPr marL="274320" indent="-274320">
-              <a:spcAft>
-                <a:spcPts val="990"/>
-              </a:spcAft>
-              <a:buClr>
-                <a:srgbClr val="0645AD"/>
-              </a:buClr>
-              <a:buFont typeface="Arial"/>
-              <a:buChar char="•"/>
-            </a:pPr>
-            <a:r>
-              <a:rPr sz="2200" b="0">
-                <a:solidFill>
-                  <a:srgbClr val="202122"/>
-                </a:solidFill>
-                <a:latin typeface="Calibri"/>
-              </a:rPr>
-              <a:t>Fast, clean and cheap</a:t>
-            </a:r>
-          </a:p>
-          <a:p>
-            <a:pPr marL="274320" indent="-274320">
-              <a:spcAft>
-                <a:spcPts val="990"/>
-              </a:spcAft>
-              <a:buClr>
-                <a:srgbClr val="0645AD"/>
-              </a:buClr>
-              <a:buFont typeface="Arial"/>
-              <a:buChar char="•"/>
-            </a:pPr>
-            <a:r>
-              <a:rPr sz="2200" b="0">
-                <a:solidFill>
-                  <a:srgbClr val="202122"/>
-                </a:solidFill>
-                <a:latin typeface="Calibri"/>
-              </a:rPr>
-              <a:t>Lower forces, less precise</a:t>
-            </a:r>
-          </a:p>
-          <a:p>
-            <a:pPr marL="274320" indent="-274320">
-              <a:spcAft>
-                <a:spcPts val="990"/>
-              </a:spcAft>
-              <a:buClr>
-                <a:srgbClr val="0645AD"/>
-              </a:buClr>
-              <a:buFont typeface="Arial"/>
-              <a:buChar char="•"/>
-            </a:pPr>
-            <a:r>
-              <a:rPr sz="2200" b="0">
-                <a:solidFill>
-                  <a:srgbClr val="202122"/>
-                </a:solidFill>
-                <a:latin typeface="Calibri"/>
-              </a:rPr>
-              <a:t>e.g. pick-and-place, doors on buses</a:t>
+            <a:off x="548640" y="5852160"/>
+            <a:ext cx="11094415" cy="365760"/>
+          </a:xfrm>
+          <a:prstGeom prst="rect">
+            <a:avLst/>
+          </a:prstGeom>
+          <a:noFill/>
+        </p:spPr>
+        <p:txBody>
+          <a:bodyPr wrap="square" anchor="t" lIns="0" rIns="0" tIns="0" bIns="0"/>
+          <a:lstStyle/>
+          <a:p>
+            <a:pPr algn="l"/>
+            <a:r>
+              <a:rPr sz="1300" b="0" i="1">
+                <a:solidFill>
+                  <a:srgbClr val="54595D"/>
+                </a:solidFill>
+                <a:latin typeface="Calibri"/>
+              </a:rPr>
+              <a:t>Answer on mini whiteboards or in your book. Answers are in the speaker notes.</a:t>
             </a:r>
           </a:p>
         </p:txBody>
@@ -6894,7 +9993,7 @@
                 </a:solidFill>
                 <a:latin typeface="Cambria"/>
               </a:rPr>
-              <a:t>Check your understanding</a:t>
+              <a:t>Programmable logic controllers (PLCs)</a:t>
             </a:r>
           </a:p>
         </p:txBody>
@@ -6967,14 +10066,145 @@
       </p:sp>
       <p:sp>
         <p:nvSpPr>
-          <p:cNvPr id="6" name="Oval 5"/>
+          <p:cNvPr id="6" name="TextBox 5"/>
+          <p:cNvSpPr txBox="1"/>
+          <p:nvPr/>
+        </p:nvSpPr>
+        <p:spPr>
+          <a:xfrm>
+            <a:off x="548640" y="1554480"/>
+            <a:ext cx="6720840" cy="4617720"/>
+          </a:xfrm>
+          <a:prstGeom prst="rect">
+            <a:avLst/>
+          </a:prstGeom>
+          <a:noFill/>
+        </p:spPr>
+        <p:txBody>
+          <a:bodyPr wrap="square" lIns="0" rIns="0" tIns="0" bIns="0">
+            <a:spAutoFit/>
+          </a:bodyPr>
+          <a:lstStyle/>
+          <a:p>
+            <a:pPr>
+              <a:spcAft>
+                <a:spcPts val="1200"/>
+              </a:spcAft>
+            </a:pPr>
+            <a:r>
+              <a:rPr sz="2000" b="0">
+                <a:solidFill>
+                  <a:srgbClr val="202122"/>
+                </a:solidFill>
+                <a:latin typeface="Calibri"/>
+              </a:rPr>
+              <a:t>A PLC is a rugged industrial computer that controls machines and processes.</a:t>
+            </a:r>
+          </a:p>
+          <a:p>
+            <a:pPr>
+              <a:spcAft>
+                <a:spcPts val="1200"/>
+              </a:spcAft>
+            </a:pPr>
+            <a:r>
+              <a:rPr sz="2000" b="0">
+                <a:solidFill>
+                  <a:srgbClr val="202122"/>
+                </a:solidFill>
+                <a:latin typeface="Calibri"/>
+              </a:rPr>
+              <a:t>Unitary PLCs are compact all-in-one units; modular PLCs are built from plug-in modules, so inputs and outputs can be added as needed.</a:t>
+            </a:r>
+          </a:p>
+          <a:p>
+            <a:pPr>
+              <a:spcAft>
+                <a:spcPts val="1200"/>
+              </a:spcAft>
+            </a:pPr>
+            <a:r>
+              <a:rPr sz="2000" b="0">
+                <a:solidFill>
+                  <a:srgbClr val="202122"/>
+                </a:solidFill>
+                <a:latin typeface="Calibri"/>
+              </a:rPr>
+              <a:t>A PLC conditions signals from sensors, runs its program (often ladder logic), and drives outputs such as motors and valves through driver circuits and interfaces.</a:t>
+            </a:r>
+          </a:p>
+          <a:p>
+            <a:pPr>
+              <a:spcAft>
+                <a:spcPts val="1200"/>
+              </a:spcAft>
+            </a:pPr>
+            <a:r>
+              <a:rPr sz="2000" b="0">
+                <a:solidFill>
+                  <a:srgbClr val="202122"/>
+                </a:solidFill>
+                <a:latin typeface="Calibri"/>
+              </a:rPr>
+              <a:t>PLCs run robotic arms, conveyors, packaging lines and SCADA systems. They're more rugged and easier to reprogram than dedicated circuits, but cost more than a simple circuit.</a:t>
+            </a:r>
+          </a:p>
+        </p:txBody>
+      </p:sp>
+      <p:sp>
+        <p:nvSpPr>
+          <p:cNvPr id="7" name="Rounded Rectangle 6"/>
           <p:cNvSpPr/>
           <p:nvPr/>
         </p:nvSpPr>
         <p:spPr>
           <a:xfrm>
-            <a:off x="548640" y="1618488"/>
-            <a:ext cx="411480" cy="411480"/>
+            <a:off x="7772400" y="1554480"/>
+            <a:ext cx="3867912" cy="4526280"/>
+          </a:xfrm>
+          <a:prstGeom prst="roundRect">
+            <a:avLst>
+              <a:gd name="adj" fmla="val 8000"/>
+            </a:avLst>
+          </a:prstGeom>
+          <a:solidFill>
+            <a:srgbClr val="03306E"/>
+          </a:solidFill>
+          <a:ln>
+            <a:noFill/>
+          </a:ln>
+          <a:effectLst/>
+        </p:spPr>
+        <p:style>
+          <a:lnRef idx="1">
+            <a:schemeClr val="accent1"/>
+          </a:lnRef>
+          <a:fillRef idx="3">
+            <a:schemeClr val="accent1"/>
+          </a:fillRef>
+          <a:effectRef idx="2">
+            <a:schemeClr val="accent1"/>
+          </a:effectRef>
+          <a:fontRef idx="minor">
+            <a:schemeClr val="lt1"/>
+          </a:fontRef>
+        </p:style>
+        <p:txBody>
+          <a:bodyPr rtlCol="0" anchor="ctr"/>
+          <a:lstStyle/>
+          <a:p/>
+        </p:txBody>
+      </p:sp>
+      <p:sp>
+        <p:nvSpPr>
+          <p:cNvPr id="8" name="Oval 7"/>
+          <p:cNvSpPr/>
+          <p:nvPr/>
+        </p:nvSpPr>
+        <p:spPr>
+          <a:xfrm>
+            <a:off x="8046720" y="1828800"/>
+            <a:ext cx="548640" cy="548640"/>
           </a:xfrm>
           <a:prstGeom prst="ellipse">
             <a:avLst/>
@@ -7007,99 +10237,13 @@
           <a:p>
             <a:pPr algn="ctr"/>
             <a:r>
-              <a:rPr sz="1400" b="1">
+              <a:rPr sz="1300" b="1">
                 <a:solidFill>
                   <a:srgbClr val="202122"/>
                 </a:solidFill>
                 <a:latin typeface="Calibri"/>
               </a:rPr>
-              <a:t>1</a:t>
-            </a:r>
-          </a:p>
-        </p:txBody>
-      </p:sp>
-      <p:sp>
-        <p:nvSpPr>
-          <p:cNvPr id="7" name="TextBox 6"/>
-          <p:cNvSpPr txBox="1"/>
-          <p:nvPr/>
-        </p:nvSpPr>
-        <p:spPr>
-          <a:xfrm>
-            <a:off x="1234440" y="1600200"/>
-            <a:ext cx="10408615" cy="1030986"/>
-          </a:xfrm>
-          <a:prstGeom prst="rect">
-            <a:avLst/>
-          </a:prstGeom>
-          <a:noFill/>
-        </p:spPr>
-        <p:txBody>
-          <a:bodyPr wrap="square" anchor="t" lIns="0" rIns="0" tIns="0" bIns="0"/>
-          <a:lstStyle/>
-          <a:p>
-            <a:pPr algn="l"/>
-            <a:r>
-              <a:rPr sz="2200" b="0" i="0">
-                <a:solidFill>
-                  <a:srgbClr val="202122"/>
-                </a:solidFill>
-                <a:latin typeface="Calibri"/>
-              </a:rPr>
-              <a:t>Name two electronic components in a mechatronic system.</a:t>
-            </a:r>
-          </a:p>
-        </p:txBody>
-      </p:sp>
-      <p:sp>
-        <p:nvSpPr>
-          <p:cNvPr id="8" name="Oval 7"/>
-          <p:cNvSpPr/>
-          <p:nvPr/>
-        </p:nvSpPr>
-        <p:spPr>
-          <a:xfrm>
-            <a:off x="548640" y="2814066"/>
-            <a:ext cx="411480" cy="411480"/>
-          </a:xfrm>
-          <a:prstGeom prst="ellipse">
-            <a:avLst/>
-          </a:prstGeom>
-          <a:solidFill>
-            <a:srgbClr val="F2B705"/>
-          </a:solidFill>
-          <a:ln>
-            <a:noFill/>
-          </a:ln>
-          <a:effectLst/>
-        </p:spPr>
-        <p:style>
-          <a:lnRef idx="1">
-            <a:schemeClr val="accent1"/>
-          </a:lnRef>
-          <a:fillRef idx="3">
-            <a:schemeClr val="accent1"/>
-          </a:fillRef>
-          <a:effectRef idx="2">
-            <a:schemeClr val="accent1"/>
-          </a:effectRef>
-          <a:fontRef idx="minor">
-            <a:schemeClr val="lt1"/>
-          </a:fontRef>
-        </p:style>
-        <p:txBody>
-          <a:bodyPr rtlCol="0" anchor="ctr" lIns="0" rIns="0" tIns="0" bIns="0"/>
-          <a:lstStyle/>
-          <a:p>
-            <a:pPr algn="ctr"/>
-            <a:r>
-              <a:rPr sz="1400" b="1">
-                <a:solidFill>
-                  <a:srgbClr val="202122"/>
-                </a:solidFill>
-                <a:latin typeface="Calibri"/>
-              </a:rPr>
-              <a:t>2</a:t>
+              <a:t>e.g.</a:t>
             </a:r>
           </a:p>
         </p:txBody>
@@ -7112,8 +10256,8 @@
         </p:nvSpPr>
         <p:spPr>
           <a:xfrm>
-            <a:off x="1234440" y="2795778"/>
-            <a:ext cx="10408615" cy="1030986"/>
+            <a:off x="8046720" y="2560320"/>
+            <a:ext cx="3291840" cy="365760"/>
           </a:xfrm>
           <a:prstGeom prst="rect">
             <a:avLst/>
@@ -7126,80 +10270,27 @@
           <a:p>
             <a:pPr algn="l"/>
             <a:r>
-              <a:rPr sz="2200" b="0" i="0">
-                <a:solidFill>
-                  <a:srgbClr val="202122"/>
-                </a:solidFill>
-                <a:latin typeface="Calibri"/>
-              </a:rPr>
-              <a:t>What is the difference between a unitary and a modular PLC?</a:t>
-            </a:r>
-          </a:p>
-        </p:txBody>
-      </p:sp>
-      <p:sp>
-        <p:nvSpPr>
-          <p:cNvPr id="10" name="Oval 9"/>
-          <p:cNvSpPr/>
-          <p:nvPr/>
-        </p:nvSpPr>
-        <p:spPr>
-          <a:xfrm>
-            <a:off x="548640" y="4009644"/>
-            <a:ext cx="411480" cy="411480"/>
-          </a:xfrm>
-          <a:prstGeom prst="ellipse">
-            <a:avLst/>
-          </a:prstGeom>
-          <a:solidFill>
-            <a:srgbClr val="F2B705"/>
-          </a:solidFill>
-          <a:ln>
-            <a:noFill/>
-          </a:ln>
-          <a:effectLst/>
-        </p:spPr>
-        <p:style>
-          <a:lnRef idx="1">
-            <a:schemeClr val="accent1"/>
-          </a:lnRef>
-          <a:fillRef idx="3">
-            <a:schemeClr val="accent1"/>
-          </a:fillRef>
-          <a:effectRef idx="2">
-            <a:schemeClr val="accent1"/>
-          </a:effectRef>
-          <a:fontRef idx="minor">
-            <a:schemeClr val="lt1"/>
-          </a:fontRef>
-        </p:style>
-        <p:txBody>
-          <a:bodyPr rtlCol="0" anchor="ctr" lIns="0" rIns="0" tIns="0" bIns="0"/>
-          <a:lstStyle/>
-          <a:p>
-            <a:pPr algn="ctr"/>
-            <a:r>
-              <a:rPr sz="1400" b="1">
-                <a:solidFill>
-                  <a:srgbClr val="202122"/>
-                </a:solidFill>
-                <a:latin typeface="Calibri"/>
-              </a:rPr>
-              <a:t>3</a:t>
-            </a:r>
-          </a:p>
-        </p:txBody>
-      </p:sp>
-      <p:sp>
-        <p:nvSpPr>
-          <p:cNvPr id="11" name="TextBox 10"/>
+              <a:rPr sz="1300" b="1" i="0">
+                <a:solidFill>
+                  <a:srgbClr val="A9C8F0"/>
+                </a:solidFill>
+                <a:latin typeface="Calibri"/>
+              </a:rPr>
+              <a:t>EXAMPLE</a:t>
+            </a:r>
+          </a:p>
+        </p:txBody>
+      </p:sp>
+      <p:sp>
+        <p:nvSpPr>
+          <p:cNvPr id="10" name="TextBox 9"/>
           <p:cNvSpPr txBox="1"/>
           <p:nvPr/>
         </p:nvSpPr>
         <p:spPr>
           <a:xfrm>
-            <a:off x="1234440" y="3991356"/>
-            <a:ext cx="10408615" cy="1030986"/>
+            <a:off x="8046720" y="2971800"/>
+            <a:ext cx="3291840" cy="2971800"/>
           </a:xfrm>
           <a:prstGeom prst="rect">
             <a:avLst/>
@@ -7212,99 +10303,13 @@
           <a:p>
             <a:pPr algn="l"/>
             <a:r>
-              <a:rPr sz="2200" b="0" i="0">
-                <a:solidFill>
-                  <a:srgbClr val="202122"/>
-                </a:solidFill>
-                <a:latin typeface="Calibri"/>
-              </a:rPr>
-              <a:t>Which system uses a nearly incompressible fluid?</a:t>
-            </a:r>
-          </a:p>
-        </p:txBody>
-      </p:sp>
-      <p:sp>
-        <p:nvSpPr>
-          <p:cNvPr id="12" name="Oval 11"/>
-          <p:cNvSpPr/>
-          <p:nvPr/>
-        </p:nvSpPr>
-        <p:spPr>
-          <a:xfrm>
-            <a:off x="548640" y="5205221"/>
-            <a:ext cx="411480" cy="411480"/>
-          </a:xfrm>
-          <a:prstGeom prst="ellipse">
-            <a:avLst/>
-          </a:prstGeom>
-          <a:solidFill>
-            <a:srgbClr val="F2B705"/>
-          </a:solidFill>
-          <a:ln>
-            <a:noFill/>
-          </a:ln>
-          <a:effectLst/>
-        </p:spPr>
-        <p:style>
-          <a:lnRef idx="1">
-            <a:schemeClr val="accent1"/>
-          </a:lnRef>
-          <a:fillRef idx="3">
-            <a:schemeClr val="accent1"/>
-          </a:fillRef>
-          <a:effectRef idx="2">
-            <a:schemeClr val="accent1"/>
-          </a:effectRef>
-          <a:fontRef idx="minor">
-            <a:schemeClr val="lt1"/>
-          </a:fontRef>
-        </p:style>
-        <p:txBody>
-          <a:bodyPr rtlCol="0" anchor="ctr" lIns="0" rIns="0" tIns="0" bIns="0"/>
-          <a:lstStyle/>
-          <a:p>
-            <a:pPr algn="ctr"/>
-            <a:r>
-              <a:rPr sz="1400" b="1">
-                <a:solidFill>
-                  <a:srgbClr val="202122"/>
-                </a:solidFill>
-                <a:latin typeface="Calibri"/>
-              </a:rPr>
-              <a:t>4</a:t>
-            </a:r>
-          </a:p>
-        </p:txBody>
-      </p:sp>
-      <p:sp>
-        <p:nvSpPr>
-          <p:cNvPr id="13" name="TextBox 12"/>
-          <p:cNvSpPr txBox="1"/>
-          <p:nvPr/>
-        </p:nvSpPr>
-        <p:spPr>
-          <a:xfrm>
-            <a:off x="1234440" y="5186933"/>
-            <a:ext cx="10408615" cy="1030986"/>
-          </a:xfrm>
-          <a:prstGeom prst="rect">
-            <a:avLst/>
-          </a:prstGeom>
-          <a:noFill/>
-        </p:spPr>
-        <p:txBody>
-          <a:bodyPr wrap="square" anchor="t" lIns="0" rIns="0" tIns="0" bIns="0"/>
-          <a:lstStyle/>
-          <a:p>
-            <a:pPr algn="l"/>
-            <a:r>
-              <a:rPr sz="2200" b="0" i="0">
-                <a:solidFill>
-                  <a:srgbClr val="202122"/>
-                </a:solidFill>
-                <a:latin typeface="Calibri"/>
-              </a:rPr>
-              <a:t>Which motor moves in fixed steps?</a:t>
+              <a:rPr sz="1900" b="0" i="0">
+                <a:solidFill>
+                  <a:srgbClr val="FFFFFF"/>
+                </a:solidFill>
+                <a:latin typeface="Cambria"/>
+              </a:rPr>
+              <a:t>On a bottling line, a sensor detects each bottle; the PLC counts them and tells the capper to fire at exactly the right moment.</a:t>
             </a:r>
           </a:p>
         </p:txBody>
@@ -7396,7 +10401,7 @@
                 </a:solidFill>
                 <a:latin typeface="Cambria"/>
               </a:rPr>
-              <a:t>Answers</a:t>
+              <a:t>Programmable logic controllers (PLCs)</a:t>
             </a:r>
           </a:p>
         </p:txBody>
@@ -7469,14 +10474,58 @@
       </p:sp>
       <p:sp>
         <p:nvSpPr>
-          <p:cNvPr id="6" name="Oval 5"/>
+          <p:cNvPr id="6" name="Rounded Rectangle 5"/>
           <p:cNvSpPr/>
           <p:nvPr/>
         </p:nvSpPr>
         <p:spPr>
           <a:xfrm>
-            <a:off x="548640" y="1618488"/>
-            <a:ext cx="411480" cy="411480"/>
+            <a:off x="548640" y="1600200"/>
+            <a:ext cx="5410047" cy="2148840"/>
+          </a:xfrm>
+          <a:prstGeom prst="roundRect">
+            <a:avLst>
+              <a:gd name="adj" fmla="val 6000"/>
+            </a:avLst>
+          </a:prstGeom>
+          <a:solidFill>
+            <a:srgbClr val="EAF3FF"/>
+          </a:solidFill>
+          <a:ln>
+            <a:noFill/>
+          </a:ln>
+          <a:effectLst/>
+        </p:spPr>
+        <p:style>
+          <a:lnRef idx="1">
+            <a:schemeClr val="accent1"/>
+          </a:lnRef>
+          <a:fillRef idx="3">
+            <a:schemeClr val="accent1"/>
+          </a:fillRef>
+          <a:effectRef idx="2">
+            <a:schemeClr val="accent1"/>
+          </a:effectRef>
+          <a:fontRef idx="minor">
+            <a:schemeClr val="lt1"/>
+          </a:fontRef>
+        </p:style>
+        <p:txBody>
+          <a:bodyPr rtlCol="0" anchor="ctr"/>
+          <a:lstStyle/>
+          <a:p/>
+        </p:txBody>
+      </p:sp>
+      <p:sp>
+        <p:nvSpPr>
+          <p:cNvPr id="7" name="Oval 6"/>
+          <p:cNvSpPr/>
+          <p:nvPr/>
+        </p:nvSpPr>
+        <p:spPr>
+          <a:xfrm>
+            <a:off x="777240" y="1828800"/>
+            <a:ext cx="457200" cy="457200"/>
           </a:xfrm>
           <a:prstGeom prst="ellipse">
             <a:avLst/>
@@ -7509,7 +10558,7 @@
           <a:p>
             <a:pPr algn="ctr"/>
             <a:r>
-              <a:rPr sz="1400" b="1">
+              <a:rPr sz="1500" b="1">
                 <a:solidFill>
                   <a:srgbClr val="202122"/>
                 </a:solidFill>
@@ -7522,14 +10571,47 @@
       </p:sp>
       <p:sp>
         <p:nvSpPr>
-          <p:cNvPr id="7" name="TextBox 6"/>
+          <p:cNvPr id="8" name="TextBox 7"/>
           <p:cNvSpPr txBox="1"/>
           <p:nvPr/>
         </p:nvSpPr>
         <p:spPr>
           <a:xfrm>
-            <a:off x="1234440" y="1600200"/>
-            <a:ext cx="10408615" cy="1030986"/>
+            <a:off x="1371600" y="1801368"/>
+            <a:ext cx="4404207" cy="512064"/>
+          </a:xfrm>
+          <a:prstGeom prst="rect">
+            <a:avLst/>
+          </a:prstGeom>
+          <a:noFill/>
+        </p:spPr>
+        <p:txBody>
+          <a:bodyPr wrap="square" anchor="ctr" lIns="0" rIns="0" tIns="0" bIns="0"/>
+          <a:lstStyle/>
+          <a:p>
+            <a:pPr algn="l"/>
+            <a:r>
+              <a:rPr sz="1900" b="1" i="0">
+                <a:solidFill>
+                  <a:srgbClr val="03306E"/>
+                </a:solidFill>
+                <a:latin typeface="Calibri"/>
+              </a:rPr>
+              <a:t>Types</a:t>
+            </a:r>
+          </a:p>
+        </p:txBody>
+      </p:sp>
+      <p:sp>
+        <p:nvSpPr>
+          <p:cNvPr id="9" name="TextBox 8"/>
+          <p:cNvSpPr txBox="1"/>
+          <p:nvPr/>
+        </p:nvSpPr>
+        <p:spPr>
+          <a:xfrm>
+            <a:off x="777240" y="2468880"/>
+            <a:ext cx="4952847" cy="1143000"/>
           </a:xfrm>
           <a:prstGeom prst="rect">
             <a:avLst/>
@@ -7542,38 +10624,71 @@
           <a:p>
             <a:pPr algn="l"/>
             <a:r>
-              <a:rPr sz="1800" b="0" i="0">
-                <a:solidFill>
-                  <a:srgbClr val="54595D"/>
-                </a:solidFill>
-                <a:latin typeface="Calibri"/>
-              </a:rPr>
-              <a:t>Name two electronic components in a mechatronic system.</a:t>
-            </a:r>
-          </a:p>
-          <a:p>
-            <a:r>
-              <a:rPr sz="1800" b="1">
-                <a:solidFill>
-                  <a:srgbClr val="03306E"/>
-                </a:solidFill>
-                <a:latin typeface="Calibri"/>
-              </a:rPr>
-              <a:t>Any two of: sensors, transducers, microprocessors, microcontrollers, actuators.</a:t>
-            </a:r>
-          </a:p>
-        </p:txBody>
-      </p:sp>
-      <p:sp>
-        <p:nvSpPr>
-          <p:cNvPr id="8" name="Oval 7"/>
+              <a:rPr sz="2000" b="0" i="0">
+                <a:solidFill>
+                  <a:srgbClr val="202122"/>
+                </a:solidFill>
+                <a:latin typeface="Calibri"/>
+              </a:rPr>
+              <a:t>Unitary, unitary with modular features, and modular.</a:t>
+            </a:r>
+          </a:p>
+        </p:txBody>
+      </p:sp>
+      <p:sp>
+        <p:nvSpPr>
+          <p:cNvPr id="10" name="Rounded Rectangle 9"/>
           <p:cNvSpPr/>
           <p:nvPr/>
         </p:nvSpPr>
         <p:spPr>
           <a:xfrm>
-            <a:off x="548640" y="2814066"/>
-            <a:ext cx="411480" cy="411480"/>
+            <a:off x="6233007" y="1600200"/>
+            <a:ext cx="5410047" cy="2148840"/>
+          </a:xfrm>
+          <a:prstGeom prst="roundRect">
+            <a:avLst>
+              <a:gd name="adj" fmla="val 6000"/>
+            </a:avLst>
+          </a:prstGeom>
+          <a:solidFill>
+            <a:srgbClr val="EAF3FF"/>
+          </a:solidFill>
+          <a:ln>
+            <a:noFill/>
+          </a:ln>
+          <a:effectLst/>
+        </p:spPr>
+        <p:style>
+          <a:lnRef idx="1">
+            <a:schemeClr val="accent1"/>
+          </a:lnRef>
+          <a:fillRef idx="3">
+            <a:schemeClr val="accent1"/>
+          </a:fillRef>
+          <a:effectRef idx="2">
+            <a:schemeClr val="accent1"/>
+          </a:effectRef>
+          <a:fontRef idx="minor">
+            <a:schemeClr val="lt1"/>
+          </a:fontRef>
+        </p:style>
+        <p:txBody>
+          <a:bodyPr rtlCol="0" anchor="ctr"/>
+          <a:lstStyle/>
+          <a:p/>
+        </p:txBody>
+      </p:sp>
+      <p:sp>
+        <p:nvSpPr>
+          <p:cNvPr id="11" name="Oval 10"/>
+          <p:cNvSpPr/>
+          <p:nvPr/>
+        </p:nvSpPr>
+        <p:spPr>
+          <a:xfrm>
+            <a:off x="6461607" y="1828800"/>
+            <a:ext cx="457200" cy="457200"/>
           </a:xfrm>
           <a:prstGeom prst="ellipse">
             <a:avLst/>
@@ -7606,7 +10721,7 @@
           <a:p>
             <a:pPr algn="ctr"/>
             <a:r>
-              <a:rPr sz="1400" b="1">
+              <a:rPr sz="1500" b="1">
                 <a:solidFill>
                   <a:srgbClr val="202122"/>
                 </a:solidFill>
@@ -7619,14 +10734,47 @@
       </p:sp>
       <p:sp>
         <p:nvSpPr>
-          <p:cNvPr id="9" name="TextBox 8"/>
+          <p:cNvPr id="12" name="TextBox 11"/>
           <p:cNvSpPr txBox="1"/>
           <p:nvPr/>
         </p:nvSpPr>
         <p:spPr>
           <a:xfrm>
-            <a:off x="1234440" y="2795778"/>
-            <a:ext cx="10408615" cy="1030986"/>
+            <a:off x="7055967" y="1801368"/>
+            <a:ext cx="4404207" cy="512064"/>
+          </a:xfrm>
+          <a:prstGeom prst="rect">
+            <a:avLst/>
+          </a:prstGeom>
+          <a:noFill/>
+        </p:spPr>
+        <p:txBody>
+          <a:bodyPr wrap="square" anchor="ctr" lIns="0" rIns="0" tIns="0" bIns="0"/>
+          <a:lstStyle/>
+          <a:p>
+            <a:pPr algn="l"/>
+            <a:r>
+              <a:rPr sz="1900" b="1" i="0">
+                <a:solidFill>
+                  <a:srgbClr val="03306E"/>
+                </a:solidFill>
+                <a:latin typeface="Calibri"/>
+              </a:rPr>
+              <a:t>Operation</a:t>
+            </a:r>
+          </a:p>
+        </p:txBody>
+      </p:sp>
+      <p:sp>
+        <p:nvSpPr>
+          <p:cNvPr id="13" name="TextBox 12"/>
+          <p:cNvSpPr txBox="1"/>
+          <p:nvPr/>
+        </p:nvSpPr>
+        <p:spPr>
+          <a:xfrm>
+            <a:off x="6461607" y="2468880"/>
+            <a:ext cx="4952847" cy="1143000"/>
           </a:xfrm>
           <a:prstGeom prst="rect">
             <a:avLst/>
@@ -7639,38 +10787,71 @@
           <a:p>
             <a:pPr algn="l"/>
             <a:r>
-              <a:rPr sz="1800" b="0" i="0">
-                <a:solidFill>
-                  <a:srgbClr val="54595D"/>
-                </a:solidFill>
-                <a:latin typeface="Calibri"/>
-              </a:rPr>
-              <a:t>What is the difference between a unitary and a modular PLC?</a:t>
-            </a:r>
-          </a:p>
-          <a:p>
-            <a:r>
-              <a:rPr sz="1800" b="1">
-                <a:solidFill>
-                  <a:srgbClr val="03306E"/>
-                </a:solidFill>
-                <a:latin typeface="Calibri"/>
-              </a:rPr>
-              <a:t>A unitary PLC is a single fixed unit; a modular PLC is built from plug-in modules.</a:t>
-            </a:r>
-          </a:p>
-        </p:txBody>
-      </p:sp>
-      <p:sp>
-        <p:nvSpPr>
-          <p:cNvPr id="10" name="Oval 9"/>
+              <a:rPr sz="2000" b="0" i="0">
+                <a:solidFill>
+                  <a:srgbClr val="202122"/>
+                </a:solidFill>
+                <a:latin typeface="Calibri"/>
+              </a:rPr>
+              <a:t>Condition sensor signals, run the program, drive outputs.</a:t>
+            </a:r>
+          </a:p>
+        </p:txBody>
+      </p:sp>
+      <p:sp>
+        <p:nvSpPr>
+          <p:cNvPr id="14" name="Rounded Rectangle 13"/>
           <p:cNvSpPr/>
           <p:nvPr/>
         </p:nvSpPr>
         <p:spPr>
           <a:xfrm>
-            <a:off x="548640" y="4009644"/>
-            <a:ext cx="411480" cy="411480"/>
+            <a:off x="548640" y="4023360"/>
+            <a:ext cx="5410047" cy="2148840"/>
+          </a:xfrm>
+          <a:prstGeom prst="roundRect">
+            <a:avLst>
+              <a:gd name="adj" fmla="val 6000"/>
+            </a:avLst>
+          </a:prstGeom>
+          <a:solidFill>
+            <a:srgbClr val="EAF3FF"/>
+          </a:solidFill>
+          <a:ln>
+            <a:noFill/>
+          </a:ln>
+          <a:effectLst/>
+        </p:spPr>
+        <p:style>
+          <a:lnRef idx="1">
+            <a:schemeClr val="accent1"/>
+          </a:lnRef>
+          <a:fillRef idx="3">
+            <a:schemeClr val="accent1"/>
+          </a:fillRef>
+          <a:effectRef idx="2">
+            <a:schemeClr val="accent1"/>
+          </a:effectRef>
+          <a:fontRef idx="minor">
+            <a:schemeClr val="lt1"/>
+          </a:fontRef>
+        </p:style>
+        <p:txBody>
+          <a:bodyPr rtlCol="0" anchor="ctr"/>
+          <a:lstStyle/>
+          <a:p/>
+        </p:txBody>
+      </p:sp>
+      <p:sp>
+        <p:nvSpPr>
+          <p:cNvPr id="15" name="Oval 14"/>
+          <p:cNvSpPr/>
+          <p:nvPr/>
+        </p:nvSpPr>
+        <p:spPr>
+          <a:xfrm>
+            <a:off x="777240" y="4251960"/>
+            <a:ext cx="457200" cy="457200"/>
           </a:xfrm>
           <a:prstGeom prst="ellipse">
             <a:avLst/>
@@ -7703,7 +10884,7 @@
           <a:p>
             <a:pPr algn="ctr"/>
             <a:r>
-              <a:rPr sz="1400" b="1">
+              <a:rPr sz="1500" b="1">
                 <a:solidFill>
                   <a:srgbClr val="202122"/>
                 </a:solidFill>
@@ -7716,14 +10897,47 @@
       </p:sp>
       <p:sp>
         <p:nvSpPr>
-          <p:cNvPr id="11" name="TextBox 10"/>
+          <p:cNvPr id="16" name="TextBox 15"/>
           <p:cNvSpPr txBox="1"/>
           <p:nvPr/>
         </p:nvSpPr>
         <p:spPr>
           <a:xfrm>
-            <a:off x="1234440" y="3991356"/>
-            <a:ext cx="10408615" cy="1030986"/>
+            <a:off x="1371600" y="4224528"/>
+            <a:ext cx="4404207" cy="512064"/>
+          </a:xfrm>
+          <a:prstGeom prst="rect">
+            <a:avLst/>
+          </a:prstGeom>
+          <a:noFill/>
+        </p:spPr>
+        <p:txBody>
+          <a:bodyPr wrap="square" anchor="ctr" lIns="0" rIns="0" tIns="0" bIns="0"/>
+          <a:lstStyle/>
+          <a:p>
+            <a:pPr algn="l"/>
+            <a:r>
+              <a:rPr sz="1900" b="1" i="0">
+                <a:solidFill>
+                  <a:srgbClr val="03306E"/>
+                </a:solidFill>
+                <a:latin typeface="Calibri"/>
+              </a:rPr>
+              <a:t>Function</a:t>
+            </a:r>
+          </a:p>
+        </p:txBody>
+      </p:sp>
+      <p:sp>
+        <p:nvSpPr>
+          <p:cNvPr id="17" name="TextBox 16"/>
+          <p:cNvSpPr txBox="1"/>
+          <p:nvPr/>
+        </p:nvSpPr>
+        <p:spPr>
+          <a:xfrm>
+            <a:off x="777240" y="4892040"/>
+            <a:ext cx="4952847" cy="1143000"/>
           </a:xfrm>
           <a:prstGeom prst="rect">
             <a:avLst/>
@@ -7736,38 +10950,71 @@
           <a:p>
             <a:pPr algn="l"/>
             <a:r>
-              <a:rPr sz="1800" b="0" i="0">
-                <a:solidFill>
-                  <a:srgbClr val="54595D"/>
-                </a:solidFill>
-                <a:latin typeface="Calibri"/>
-              </a:rPr>
-              <a:t>Which system uses a nearly incompressible fluid?</a:t>
-            </a:r>
-          </a:p>
-          <a:p>
-            <a:r>
-              <a:rPr sz="1800" b="1">
-                <a:solidFill>
-                  <a:srgbClr val="03306E"/>
-                </a:solidFill>
-                <a:latin typeface="Calibri"/>
-              </a:rPr>
-              <a:t>Hydraulics.</a:t>
-            </a:r>
-          </a:p>
-        </p:txBody>
-      </p:sp>
-      <p:sp>
-        <p:nvSpPr>
-          <p:cNvPr id="12" name="Oval 11"/>
+              <a:rPr sz="2000" b="0" i="0">
+                <a:solidFill>
+                  <a:srgbClr val="202122"/>
+                </a:solidFill>
+                <a:latin typeface="Calibri"/>
+              </a:rPr>
+              <a:t>Process blocks, motor driver ICs, interface devices.</a:t>
+            </a:r>
+          </a:p>
+        </p:txBody>
+      </p:sp>
+      <p:sp>
+        <p:nvSpPr>
+          <p:cNvPr id="18" name="Rounded Rectangle 17"/>
           <p:cNvSpPr/>
           <p:nvPr/>
         </p:nvSpPr>
         <p:spPr>
           <a:xfrm>
-            <a:off x="548640" y="5205221"/>
-            <a:ext cx="411480" cy="411480"/>
+            <a:off x="6233007" y="4023360"/>
+            <a:ext cx="5410047" cy="2148840"/>
+          </a:xfrm>
+          <a:prstGeom prst="roundRect">
+            <a:avLst>
+              <a:gd name="adj" fmla="val 6000"/>
+            </a:avLst>
+          </a:prstGeom>
+          <a:solidFill>
+            <a:srgbClr val="EAF3FF"/>
+          </a:solidFill>
+          <a:ln>
+            <a:noFill/>
+          </a:ln>
+          <a:effectLst/>
+        </p:spPr>
+        <p:style>
+          <a:lnRef idx="1">
+            <a:schemeClr val="accent1"/>
+          </a:lnRef>
+          <a:fillRef idx="3">
+            <a:schemeClr val="accent1"/>
+          </a:fillRef>
+          <a:effectRef idx="2">
+            <a:schemeClr val="accent1"/>
+          </a:effectRef>
+          <a:fontRef idx="minor">
+            <a:schemeClr val="lt1"/>
+          </a:fontRef>
+        </p:style>
+        <p:txBody>
+          <a:bodyPr rtlCol="0" anchor="ctr"/>
+          <a:lstStyle/>
+          <a:p/>
+        </p:txBody>
+      </p:sp>
+      <p:sp>
+        <p:nvSpPr>
+          <p:cNvPr id="19" name="Oval 18"/>
+          <p:cNvSpPr/>
+          <p:nvPr/>
+        </p:nvSpPr>
+        <p:spPr>
+          <a:xfrm>
+            <a:off x="6461607" y="4251960"/>
+            <a:ext cx="457200" cy="457200"/>
           </a:xfrm>
           <a:prstGeom prst="ellipse">
             <a:avLst/>
@@ -7800,7 +11047,7 @@
           <a:p>
             <a:pPr algn="ctr"/>
             <a:r>
-              <a:rPr sz="1400" b="1">
+              <a:rPr sz="1500" b="1">
                 <a:solidFill>
                   <a:srgbClr val="202122"/>
                 </a:solidFill>
@@ -7813,14 +11060,47 @@
       </p:sp>
       <p:sp>
         <p:nvSpPr>
-          <p:cNvPr id="13" name="TextBox 12"/>
+          <p:cNvPr id="20" name="TextBox 19"/>
           <p:cNvSpPr txBox="1"/>
           <p:nvPr/>
         </p:nvSpPr>
         <p:spPr>
           <a:xfrm>
-            <a:off x="1234440" y="5186933"/>
-            <a:ext cx="10408615" cy="1030986"/>
+            <a:off x="7055967" y="4224528"/>
+            <a:ext cx="4404207" cy="512064"/>
+          </a:xfrm>
+          <a:prstGeom prst="rect">
+            <a:avLst/>
+          </a:prstGeom>
+          <a:noFill/>
+        </p:spPr>
+        <p:txBody>
+          <a:bodyPr wrap="square" anchor="ctr" lIns="0" rIns="0" tIns="0" bIns="0"/>
+          <a:lstStyle/>
+          <a:p>
+            <a:pPr algn="l"/>
+            <a:r>
+              <a:rPr sz="1900" b="1" i="0">
+                <a:solidFill>
+                  <a:srgbClr val="03306E"/>
+                </a:solidFill>
+                <a:latin typeface="Calibri"/>
+              </a:rPr>
+              <a:t>Applications</a:t>
+            </a:r>
+          </a:p>
+        </p:txBody>
+      </p:sp>
+      <p:sp>
+        <p:nvSpPr>
+          <p:cNvPr id="21" name="TextBox 20"/>
+          <p:cNvSpPr txBox="1"/>
+          <p:nvPr/>
+        </p:nvSpPr>
+        <p:spPr>
+          <a:xfrm>
+            <a:off x="6461607" y="4892040"/>
+            <a:ext cx="4952847" cy="1143000"/>
           </a:xfrm>
           <a:prstGeom prst="rect">
             <a:avLst/>
@@ -7833,24 +11113,13 @@
           <a:p>
             <a:pPr algn="l"/>
             <a:r>
-              <a:rPr sz="1800" b="0" i="0">
-                <a:solidFill>
-                  <a:srgbClr val="54595D"/>
-                </a:solidFill>
-                <a:latin typeface="Calibri"/>
-              </a:rPr>
-              <a:t>Which motor moves in fixed steps?</a:t>
-            </a:r>
-          </a:p>
-          <a:p>
-            <a:r>
-              <a:rPr sz="1800" b="1">
-                <a:solidFill>
-                  <a:srgbClr val="03306E"/>
-                </a:solidFill>
-                <a:latin typeface="Calibri"/>
-              </a:rPr>
-              <a:t>A stepper motor.</a:t>
+              <a:rPr sz="2000" b="0" i="0">
+                <a:solidFill>
+                  <a:srgbClr val="202122"/>
+                </a:solidFill>
+                <a:latin typeface="Calibri"/>
+              </a:rPr>
+              <a:t>Robotic arms, conveyors, packaging, SCADA, remote units, animatronics.</a:t>
             </a:r>
           </a:p>
         </p:txBody>
@@ -7942,7 +11211,7 @@
                 </a:solidFill>
                 <a:latin typeface="Cambria"/>
               </a:rPr>
-              <a:t>Activity: Design a sorting system</a:t>
+              <a:t>Quick check: Programmable logic controllers (PLCs)</a:t>
             </a:r>
           </a:p>
         </p:txBody>
@@ -8015,19 +11284,17 @@
       </p:sp>
       <p:sp>
         <p:nvSpPr>
-          <p:cNvPr id="6" name="Rounded Rectangle 5"/>
+          <p:cNvPr id="6" name="Oval 5"/>
           <p:cNvSpPr/>
           <p:nvPr/>
         </p:nvSpPr>
         <p:spPr>
           <a:xfrm>
-            <a:off x="548640" y="1508760"/>
-            <a:ext cx="2011680" cy="457200"/>
-          </a:xfrm>
-          <a:prstGeom prst="roundRect">
-            <a:avLst>
-              <a:gd name="adj" fmla="val 50000"/>
-            </a:avLst>
+            <a:off x="548640" y="1691640"/>
+            <a:ext cx="502920" cy="502920"/>
+          </a:xfrm>
+          <a:prstGeom prst="ellipse">
+            <a:avLst/>
           </a:prstGeom>
           <a:solidFill>
             <a:srgbClr val="F2B705"/>
@@ -8052,9 +11319,20 @@
           </a:fontRef>
         </p:style>
         <p:txBody>
-          <a:bodyPr rtlCol="0" anchor="ctr"/>
-          <a:lstStyle/>
-          <a:p/>
+          <a:bodyPr rtlCol="0" anchor="ctr" lIns="0" rIns="0" tIns="0" bIns="0"/>
+          <a:lstStyle/>
+          <a:p>
+            <a:pPr algn="ctr"/>
+            <a:r>
+              <a:rPr sz="1600" b="1">
+                <a:solidFill>
+                  <a:srgbClr val="202122"/>
+                </a:solidFill>
+                <a:latin typeface="Calibri"/>
+              </a:rPr>
+              <a:t>1</a:t>
+            </a:r>
+          </a:p>
         </p:txBody>
       </p:sp>
       <p:sp>
@@ -8065,80 +11343,47 @@
         </p:nvSpPr>
         <p:spPr>
           <a:xfrm>
-            <a:off x="548640" y="1508760"/>
-            <a:ext cx="2011680" cy="457200"/>
-          </a:xfrm>
-          <a:prstGeom prst="rect">
-            <a:avLst/>
-          </a:prstGeom>
-          <a:noFill/>
-        </p:spPr>
-        <p:txBody>
-          <a:bodyPr wrap="square" anchor="ctr" lIns="0" rIns="0" tIns="0" bIns="0"/>
-          <a:lstStyle/>
-          <a:p>
-            <a:pPr algn="ctr"/>
-            <a:r>
-              <a:rPr sz="1400" b="1" i="0">
+            <a:off x="1371600" y="1645920"/>
+            <a:ext cx="10271455" cy="1188720"/>
+          </a:xfrm>
+          <a:prstGeom prst="rect">
+            <a:avLst/>
+          </a:prstGeom>
+          <a:noFill/>
+        </p:spPr>
+        <p:txBody>
+          <a:bodyPr wrap="square" anchor="t" lIns="0" rIns="0" tIns="0" bIns="0"/>
+          <a:lstStyle/>
+          <a:p>
+            <a:pPr algn="l"/>
+            <a:r>
+              <a:rPr sz="2400" b="0" i="0">
                 <a:solidFill>
                   <a:srgbClr val="202122"/>
                 </a:solidFill>
                 <a:latin typeface="Calibri"/>
               </a:rPr>
-              <a:t>30 minutes</a:t>
-            </a:r>
-          </a:p>
-        </p:txBody>
-      </p:sp>
-      <p:sp>
-        <p:nvSpPr>
-          <p:cNvPr id="8" name="TextBox 7"/>
-          <p:cNvSpPr txBox="1"/>
-          <p:nvPr/>
-        </p:nvSpPr>
-        <p:spPr>
-          <a:xfrm>
-            <a:off x="2743200" y="1508760"/>
-            <a:ext cx="4754880" cy="457200"/>
-          </a:xfrm>
-          <a:prstGeom prst="rect">
-            <a:avLst/>
-          </a:prstGeom>
-          <a:noFill/>
-        </p:spPr>
-        <p:txBody>
-          <a:bodyPr wrap="square" anchor="ctr" lIns="0" rIns="0" tIns="0" bIns="0"/>
-          <a:lstStyle/>
-          <a:p>
-            <a:pPr algn="l"/>
-            <a:r>
-              <a:rPr sz="1400" b="0" i="1">
-                <a:solidFill>
-                  <a:srgbClr val="54595D"/>
-                </a:solidFill>
-                <a:latin typeface="Calibri"/>
-              </a:rPr>
-              <a:t>Small groups</a:t>
-            </a:r>
-          </a:p>
-        </p:txBody>
-      </p:sp>
-      <p:sp>
-        <p:nvSpPr>
-          <p:cNvPr id="9" name="Oval 8"/>
+              <a:t>What is the difference between unitary and modular PLCs?</a:t>
+            </a:r>
+          </a:p>
+        </p:txBody>
+      </p:sp>
+      <p:sp>
+        <p:nvSpPr>
+          <p:cNvPr id="8" name="Oval 7"/>
           <p:cNvSpPr/>
           <p:nvPr/>
         </p:nvSpPr>
         <p:spPr>
           <a:xfrm>
-            <a:off x="548640" y="2482596"/>
-            <a:ext cx="384048" cy="384048"/>
+            <a:off x="548640" y="3108960"/>
+            <a:ext cx="502920" cy="502920"/>
           </a:xfrm>
           <a:prstGeom prst="ellipse">
             <a:avLst/>
           </a:prstGeom>
           <a:solidFill>
-            <a:srgbClr val="0645AD"/>
+            <a:srgbClr val="F2B705"/>
           </a:solidFill>
           <a:ln>
             <a:noFill/>
@@ -8165,66 +11410,66 @@
           <a:p>
             <a:pPr algn="ctr"/>
             <a:r>
-              <a:rPr sz="1300" b="1">
-                <a:solidFill>
-                  <a:srgbClr val="FFFFFF"/>
-                </a:solidFill>
-                <a:latin typeface="Calibri"/>
-              </a:rPr>
-              <a:t>1</a:t>
-            </a:r>
-          </a:p>
-        </p:txBody>
-      </p:sp>
-      <p:sp>
-        <p:nvSpPr>
-          <p:cNvPr id="10" name="TextBox 9"/>
+              <a:rPr sz="1600" b="1">
+                <a:solidFill>
+                  <a:srgbClr val="202122"/>
+                </a:solidFill>
+                <a:latin typeface="Calibri"/>
+              </a:rPr>
+              <a:t>2</a:t>
+            </a:r>
+          </a:p>
+        </p:txBody>
+      </p:sp>
+      <p:sp>
+        <p:nvSpPr>
+          <p:cNvPr id="9" name="TextBox 8"/>
           <p:cNvSpPr txBox="1"/>
           <p:nvPr/>
         </p:nvSpPr>
         <p:spPr>
           <a:xfrm>
-            <a:off x="1143000" y="2240280"/>
-            <a:ext cx="5943600" cy="868680"/>
-          </a:xfrm>
-          <a:prstGeom prst="rect">
-            <a:avLst/>
-          </a:prstGeom>
-          <a:noFill/>
-        </p:spPr>
-        <p:txBody>
-          <a:bodyPr wrap="square" anchor="ctr" lIns="0" rIns="0" tIns="0" bIns="0"/>
+            <a:off x="1371600" y="3063240"/>
+            <a:ext cx="10271455" cy="1188720"/>
+          </a:xfrm>
+          <a:prstGeom prst="rect">
+            <a:avLst/>
+          </a:prstGeom>
+          <a:noFill/>
+        </p:spPr>
+        <p:txBody>
+          <a:bodyPr wrap="square" anchor="t" lIns="0" rIns="0" tIns="0" bIns="0"/>
           <a:lstStyle/>
           <a:p>
             <a:pPr algn="l"/>
             <a:r>
-              <a:rPr sz="1700" b="0" i="0">
+              <a:rPr sz="2400" b="0" i="0">
                 <a:solidFill>
                   <a:srgbClr val="202122"/>
                 </a:solidFill>
                 <a:latin typeface="Calibri"/>
               </a:rPr>
-              <a:t>A conveyor must push large boxes onto a second belt and let small boxes pass.</a:t>
-            </a:r>
-          </a:p>
-        </p:txBody>
-      </p:sp>
-      <p:sp>
-        <p:nvSpPr>
-          <p:cNvPr id="11" name="Oval 10"/>
+              <a:t>Give two applications of PLCs.</a:t>
+            </a:r>
+          </a:p>
+        </p:txBody>
+      </p:sp>
+      <p:sp>
+        <p:nvSpPr>
+          <p:cNvPr id="10" name="Oval 9"/>
           <p:cNvSpPr/>
           <p:nvPr/>
         </p:nvSpPr>
         <p:spPr>
           <a:xfrm>
-            <a:off x="548640" y="3461004"/>
-            <a:ext cx="384048" cy="384048"/>
+            <a:off x="548640" y="4526280"/>
+            <a:ext cx="502920" cy="502920"/>
           </a:xfrm>
           <a:prstGeom prst="ellipse">
             <a:avLst/>
           </a:prstGeom>
           <a:solidFill>
-            <a:srgbClr val="0645AD"/>
+            <a:srgbClr val="F2B705"/>
           </a:solidFill>
           <a:ln>
             <a:noFill/>
@@ -8251,13 +11496,46 @@
           <a:p>
             <a:pPr algn="ctr"/>
             <a:r>
-              <a:rPr sz="1300" b="1">
-                <a:solidFill>
-                  <a:srgbClr val="FFFFFF"/>
-                </a:solidFill>
-                <a:latin typeface="Calibri"/>
-              </a:rPr>
-              <a:t>2</a:t>
+              <a:rPr sz="1600" b="1">
+                <a:solidFill>
+                  <a:srgbClr val="202122"/>
+                </a:solidFill>
+                <a:latin typeface="Calibri"/>
+              </a:rPr>
+              <a:t>3</a:t>
+            </a:r>
+          </a:p>
+        </p:txBody>
+      </p:sp>
+      <p:sp>
+        <p:nvSpPr>
+          <p:cNvPr id="11" name="TextBox 10"/>
+          <p:cNvSpPr txBox="1"/>
+          <p:nvPr/>
+        </p:nvSpPr>
+        <p:spPr>
+          <a:xfrm>
+            <a:off x="1371600" y="4480560"/>
+            <a:ext cx="10271455" cy="1188720"/>
+          </a:xfrm>
+          <a:prstGeom prst="rect">
+            <a:avLst/>
+          </a:prstGeom>
+          <a:noFill/>
+        </p:spPr>
+        <p:txBody>
+          <a:bodyPr wrap="square" anchor="t" lIns="0" rIns="0" tIns="0" bIns="0"/>
+          <a:lstStyle/>
+          <a:p>
+            <a:pPr algn="l"/>
+            <a:r>
+              <a:rPr sz="2400" b="0" i="0">
+                <a:solidFill>
+                  <a:srgbClr val="202122"/>
+                </a:solidFill>
+                <a:latin typeface="Calibri"/>
+              </a:rPr>
+              <a:t>Why use a PLC rather than a dedicated circuit?</a:t>
             </a:r>
           </a:p>
         </p:txBody>
@@ -8270,362 +11548,27 @@
         </p:nvSpPr>
         <p:spPr>
           <a:xfrm>
-            <a:off x="1143000" y="3218688"/>
-            <a:ext cx="5943600" cy="868680"/>
-          </a:xfrm>
-          <a:prstGeom prst="rect">
-            <a:avLst/>
-          </a:prstGeom>
-          <a:noFill/>
-        </p:spPr>
-        <p:txBody>
-          <a:bodyPr wrap="square" anchor="ctr" lIns="0" rIns="0" tIns="0" bIns="0"/>
+            <a:off x="548640" y="5852160"/>
+            <a:ext cx="11094415" cy="365760"/>
+          </a:xfrm>
+          <a:prstGeom prst="rect">
+            <a:avLst/>
+          </a:prstGeom>
+          <a:noFill/>
+        </p:spPr>
+        <p:txBody>
+          <a:bodyPr wrap="square" anchor="t" lIns="0" rIns="0" tIns="0" bIns="0"/>
           <a:lstStyle/>
           <a:p>
             <a:pPr algn="l"/>
             <a:r>
-              <a:rPr sz="1700" b="0" i="0">
-                <a:solidFill>
-                  <a:srgbClr val="202122"/>
-                </a:solidFill>
-                <a:latin typeface="Calibri"/>
-              </a:rPr>
-              <a:t>Choose sensors, a PLC type and an actuator.</a:t>
-            </a:r>
-          </a:p>
-        </p:txBody>
-      </p:sp>
-      <p:sp>
-        <p:nvSpPr>
-          <p:cNvPr id="13" name="Oval 12"/>
-          <p:cNvSpPr/>
-          <p:nvPr/>
-        </p:nvSpPr>
-        <p:spPr>
-          <a:xfrm>
-            <a:off x="548640" y="4439412"/>
-            <a:ext cx="384048" cy="384048"/>
-          </a:xfrm>
-          <a:prstGeom prst="ellipse">
-            <a:avLst/>
-          </a:prstGeom>
-          <a:solidFill>
-            <a:srgbClr val="0645AD"/>
-          </a:solidFill>
-          <a:ln>
-            <a:noFill/>
-          </a:ln>
-          <a:effectLst/>
-        </p:spPr>
-        <p:style>
-          <a:lnRef idx="1">
-            <a:schemeClr val="accent1"/>
-          </a:lnRef>
-          <a:fillRef idx="3">
-            <a:schemeClr val="accent1"/>
-          </a:fillRef>
-          <a:effectRef idx="2">
-            <a:schemeClr val="accent1"/>
-          </a:effectRef>
-          <a:fontRef idx="minor">
-            <a:schemeClr val="lt1"/>
-          </a:fontRef>
-        </p:style>
-        <p:txBody>
-          <a:bodyPr rtlCol="0" anchor="ctr" lIns="0" rIns="0" tIns="0" bIns="0"/>
-          <a:lstStyle/>
-          <a:p>
-            <a:pPr algn="ctr"/>
-            <a:r>
-              <a:rPr sz="1300" b="1">
-                <a:solidFill>
-                  <a:srgbClr val="FFFFFF"/>
-                </a:solidFill>
-                <a:latin typeface="Calibri"/>
-              </a:rPr>
-              <a:t>3</a:t>
-            </a:r>
-          </a:p>
-        </p:txBody>
-      </p:sp>
-      <p:sp>
-        <p:nvSpPr>
-          <p:cNvPr id="14" name="TextBox 13"/>
-          <p:cNvSpPr txBox="1"/>
-          <p:nvPr/>
-        </p:nvSpPr>
-        <p:spPr>
-          <a:xfrm>
-            <a:off x="1143000" y="4197096"/>
-            <a:ext cx="5943600" cy="868680"/>
-          </a:xfrm>
-          <a:prstGeom prst="rect">
-            <a:avLst/>
-          </a:prstGeom>
-          <a:noFill/>
-        </p:spPr>
-        <p:txBody>
-          <a:bodyPr wrap="square" anchor="ctr" lIns="0" rIns="0" tIns="0" bIns="0"/>
-          <a:lstStyle/>
-          <a:p>
-            <a:pPr algn="l"/>
-            <a:r>
-              <a:rPr sz="1700" b="0" i="0">
-                <a:solidFill>
-                  <a:srgbClr val="202122"/>
-                </a:solidFill>
-                <a:latin typeface="Calibri"/>
-              </a:rPr>
-              <a:t>Decide between pneumatic and hydraulic actuation and justify it.</a:t>
-            </a:r>
-          </a:p>
-        </p:txBody>
-      </p:sp>
-      <p:sp>
-        <p:nvSpPr>
-          <p:cNvPr id="15" name="Oval 14"/>
-          <p:cNvSpPr/>
-          <p:nvPr/>
-        </p:nvSpPr>
-        <p:spPr>
-          <a:xfrm>
-            <a:off x="548640" y="5417820"/>
-            <a:ext cx="384048" cy="384048"/>
-          </a:xfrm>
-          <a:prstGeom prst="ellipse">
-            <a:avLst/>
-          </a:prstGeom>
-          <a:solidFill>
-            <a:srgbClr val="0645AD"/>
-          </a:solidFill>
-          <a:ln>
-            <a:noFill/>
-          </a:ln>
-          <a:effectLst/>
-        </p:spPr>
-        <p:style>
-          <a:lnRef idx="1">
-            <a:schemeClr val="accent1"/>
-          </a:lnRef>
-          <a:fillRef idx="3">
-            <a:schemeClr val="accent1"/>
-          </a:fillRef>
-          <a:effectRef idx="2">
-            <a:schemeClr val="accent1"/>
-          </a:effectRef>
-          <a:fontRef idx="minor">
-            <a:schemeClr val="lt1"/>
-          </a:fontRef>
-        </p:style>
-        <p:txBody>
-          <a:bodyPr rtlCol="0" anchor="ctr" lIns="0" rIns="0" tIns="0" bIns="0"/>
-          <a:lstStyle/>
-          <a:p>
-            <a:pPr algn="ctr"/>
-            <a:r>
-              <a:rPr sz="1300" b="1">
-                <a:solidFill>
-                  <a:srgbClr val="FFFFFF"/>
-                </a:solidFill>
-                <a:latin typeface="Calibri"/>
-              </a:rPr>
-              <a:t>4</a:t>
-            </a:r>
-          </a:p>
-        </p:txBody>
-      </p:sp>
-      <p:sp>
-        <p:nvSpPr>
-          <p:cNvPr id="16" name="TextBox 15"/>
-          <p:cNvSpPr txBox="1"/>
-          <p:nvPr/>
-        </p:nvSpPr>
-        <p:spPr>
-          <a:xfrm>
-            <a:off x="1143000" y="5175504"/>
-            <a:ext cx="5943600" cy="868680"/>
-          </a:xfrm>
-          <a:prstGeom prst="rect">
-            <a:avLst/>
-          </a:prstGeom>
-          <a:noFill/>
-        </p:spPr>
-        <p:txBody>
-          <a:bodyPr wrap="square" anchor="ctr" lIns="0" rIns="0" tIns="0" bIns="0"/>
-          <a:lstStyle/>
-          <a:p>
-            <a:pPr algn="l"/>
-            <a:r>
-              <a:rPr sz="1700" b="0" i="0">
-                <a:solidFill>
-                  <a:srgbClr val="202122"/>
-                </a:solidFill>
-                <a:latin typeface="Calibri"/>
-              </a:rPr>
-              <a:t>Sketch a block diagram of the system.</a:t>
-            </a:r>
-          </a:p>
-        </p:txBody>
-      </p:sp>
-      <p:sp>
-        <p:nvSpPr>
-          <p:cNvPr id="17" name="Rounded Rectangle 16"/>
-          <p:cNvSpPr/>
-          <p:nvPr/>
-        </p:nvSpPr>
-        <p:spPr>
-          <a:xfrm>
-            <a:off x="7772400" y="1508760"/>
-            <a:ext cx="3867912" cy="4572000"/>
-          </a:xfrm>
-          <a:prstGeom prst="roundRect">
-            <a:avLst>
-              <a:gd name="adj" fmla="val 8000"/>
-            </a:avLst>
-          </a:prstGeom>
-          <a:solidFill>
-            <a:srgbClr val="EAF3FF"/>
-          </a:solidFill>
-          <a:ln>
-            <a:noFill/>
-          </a:ln>
-          <a:effectLst/>
-        </p:spPr>
-        <p:style>
-          <a:lnRef idx="1">
-            <a:schemeClr val="accent1"/>
-          </a:lnRef>
-          <a:fillRef idx="3">
-            <a:schemeClr val="accent1"/>
-          </a:fillRef>
-          <a:effectRef idx="2">
-            <a:schemeClr val="accent1"/>
-          </a:effectRef>
-          <a:fontRef idx="minor">
-            <a:schemeClr val="lt1"/>
-          </a:fontRef>
-        </p:style>
-        <p:txBody>
-          <a:bodyPr rtlCol="0" anchor="ctr"/>
-          <a:lstStyle/>
-          <a:p/>
-        </p:txBody>
-      </p:sp>
-      <p:sp>
-        <p:nvSpPr>
-          <p:cNvPr id="18" name="TextBox 17"/>
-          <p:cNvSpPr txBox="1"/>
-          <p:nvPr/>
-        </p:nvSpPr>
-        <p:spPr>
-          <a:xfrm>
-            <a:off x="8046720" y="1737360"/>
-            <a:ext cx="3291840" cy="365760"/>
-          </a:xfrm>
-          <a:prstGeom prst="rect">
-            <a:avLst/>
-          </a:prstGeom>
-          <a:noFill/>
-        </p:spPr>
-        <p:txBody>
-          <a:bodyPr wrap="square" anchor="t" lIns="0" rIns="0" tIns="0" bIns="0"/>
-          <a:lstStyle/>
-          <a:p>
-            <a:pPr algn="l"/>
-            <a:r>
-              <a:rPr sz="1300" b="1" i="0">
-                <a:solidFill>
-                  <a:srgbClr val="0645AD"/>
-                </a:solidFill>
-                <a:latin typeface="Calibri"/>
-              </a:rPr>
-              <a:t>SUCCESS CRITERIA</a:t>
-            </a:r>
-          </a:p>
-        </p:txBody>
-      </p:sp>
-      <p:sp>
-        <p:nvSpPr>
-          <p:cNvPr id="19" name="TextBox 18"/>
-          <p:cNvSpPr txBox="1"/>
-          <p:nvPr/>
-        </p:nvSpPr>
-        <p:spPr>
-          <a:xfrm>
-            <a:off x="8046720" y="2240280"/>
-            <a:ext cx="3337560" cy="3657600"/>
-          </a:xfrm>
-          <a:prstGeom prst="rect">
-            <a:avLst/>
-          </a:prstGeom>
-          <a:noFill/>
-        </p:spPr>
-        <p:txBody>
-          <a:bodyPr wrap="square" lIns="0" rIns="0" tIns="0" bIns="0">
-            <a:spAutoFit/>
-          </a:bodyPr>
-          <a:lstStyle/>
-          <a:p>
-            <a:pPr marL="274320" indent="-274320">
-              <a:spcAft>
-                <a:spcPts val="810"/>
-              </a:spcAft>
-              <a:buClr>
-                <a:srgbClr val="0645AD"/>
-              </a:buClr>
-              <a:buFont typeface="Arial"/>
-              <a:buChar char="•"/>
-            </a:pPr>
-            <a:r>
-              <a:rPr sz="1800" b="0">
-                <a:solidFill>
-                  <a:srgbClr val="202122"/>
-                </a:solidFill>
-                <a:latin typeface="Calibri"/>
-              </a:rPr>
-              <a:t>Input, process and output all present</a:t>
-            </a:r>
-          </a:p>
-          <a:p>
-            <a:pPr marL="274320" indent="-274320">
-              <a:spcAft>
-                <a:spcPts val="810"/>
-              </a:spcAft>
-              <a:buClr>
-                <a:srgbClr val="0645AD"/>
-              </a:buClr>
-              <a:buFont typeface="Arial"/>
-              <a:buChar char="•"/>
-            </a:pPr>
-            <a:r>
-              <a:rPr sz="1800" b="0">
-                <a:solidFill>
-                  <a:srgbClr val="202122"/>
-                </a:solidFill>
-                <a:latin typeface="Calibri"/>
-              </a:rPr>
-              <a:t>Actuator choice justified</a:t>
-            </a:r>
-          </a:p>
-          <a:p>
-            <a:pPr marL="274320" indent="-274320">
-              <a:spcAft>
-                <a:spcPts val="810"/>
-              </a:spcAft>
-              <a:buClr>
-                <a:srgbClr val="0645AD"/>
-              </a:buClr>
-              <a:buFont typeface="Arial"/>
-              <a:buChar char="•"/>
-            </a:pPr>
-            <a:r>
-              <a:rPr sz="1800" b="0">
-                <a:solidFill>
-                  <a:srgbClr val="202122"/>
-                </a:solidFill>
-                <a:latin typeface="Calibri"/>
-              </a:rPr>
-              <a:t>Diagram is clear</a:t>
+              <a:rPr sz="1300" b="0" i="1">
+                <a:solidFill>
+                  <a:srgbClr val="54595D"/>
+                </a:solidFill>
+                <a:latin typeface="Calibri"/>
+              </a:rPr>
+              <a:t>Answer on mini whiteboards or in your book. Answers are in the speaker notes.</a:t>
             </a:r>
           </a:p>
         </p:txBody>
@@ -8644,7 +11587,7 @@
     <p:bg>
       <p:bgPr>
         <a:solidFill>
-          <a:srgbClr val="03306E"/>
+          <a:srgbClr val="FFFFFF"/>
         </a:solidFill>
         <a:effectLst/>
       </p:bgPr>
@@ -8680,7 +11623,7 @@
             <a:r>
               <a:rPr sz="1100" b="1" i="0">
                 <a:solidFill>
-                  <a:srgbClr val="A9C8F0"/>
+                  <a:srgbClr val="54595D"/>
                 </a:solidFill>
                 <a:latin typeface="Calibri"/>
               </a:rPr>
@@ -8713,25 +11656,222 @@
             <a:r>
               <a:rPr sz="3200" b="1" i="0">
                 <a:solidFill>
-                  <a:srgbClr val="FFFFFF"/>
+                  <a:srgbClr val="03306E"/>
                 </a:solidFill>
                 <a:latin typeface="Cambria"/>
               </a:rPr>
-              <a:t>Exit ticket</a:t>
-            </a:r>
-          </a:p>
-        </p:txBody>
-      </p:sp>
-      <p:sp>
-        <p:nvSpPr>
-          <p:cNvPr id="4" name="Oval 3"/>
+              <a:t>Hydraulics and pneumatics</a:t>
+            </a:r>
+          </a:p>
+        </p:txBody>
+      </p:sp>
+      <p:sp>
+        <p:nvSpPr>
+          <p:cNvPr id="4" name="TextBox 3"/>
+          <p:cNvSpPr txBox="1"/>
+          <p:nvPr/>
+        </p:nvSpPr>
+        <p:spPr>
+          <a:xfrm>
+            <a:off x="548640" y="6446520"/>
+            <a:ext cx="8229600" cy="274320"/>
+          </a:xfrm>
+          <a:prstGeom prst="rect">
+            <a:avLst/>
+          </a:prstGeom>
+          <a:noFill/>
+        </p:spPr>
+        <p:txBody>
+          <a:bodyPr wrap="square" anchor="t" lIns="0" rIns="0" tIns="0" bIns="0"/>
+          <a:lstStyle/>
+          <a:p>
+            <a:pPr algn="l"/>
+            <a:r>
+              <a:rPr sz="1000" b="0" i="0">
+                <a:solidFill>
+                  <a:srgbClr val="54595D"/>
+                </a:solidFill>
+                <a:latin typeface="Calibri"/>
+              </a:rPr>
+              <a:t>Design and Development for Engineering and Manufacturing T Level  ·  Mechatronics, PLCs, Hydraulics and Pneumatics</a:t>
+            </a:r>
+          </a:p>
+        </p:txBody>
+      </p:sp>
+      <p:sp>
+        <p:nvSpPr>
+          <p:cNvPr id="5" name="TextBox 4"/>
+          <p:cNvSpPr txBox="1"/>
+          <p:nvPr/>
+        </p:nvSpPr>
+        <p:spPr>
+          <a:xfrm>
+            <a:off x="10728655" y="6446520"/>
+            <a:ext cx="914400" cy="274320"/>
+          </a:xfrm>
+          <a:prstGeom prst="rect">
+            <a:avLst/>
+          </a:prstGeom>
+          <a:noFill/>
+        </p:spPr>
+        <p:txBody>
+          <a:bodyPr wrap="square" anchor="t" lIns="0" rIns="0" tIns="0" bIns="0"/>
+          <a:lstStyle/>
+          <a:p>
+            <a:pPr algn="r"/>
+            <a:r>
+              <a:rPr sz="1000" b="0" i="0">
+                <a:solidFill>
+                  <a:srgbClr val="54595D"/>
+                </a:solidFill>
+                <a:latin typeface="Calibri"/>
+              </a:rPr>
+              <a:t>9</a:t>
+            </a:r>
+          </a:p>
+        </p:txBody>
+      </p:sp>
+      <p:sp>
+        <p:nvSpPr>
+          <p:cNvPr id="6" name="TextBox 5"/>
+          <p:cNvSpPr txBox="1"/>
+          <p:nvPr/>
+        </p:nvSpPr>
+        <p:spPr>
+          <a:xfrm>
+            <a:off x="548640" y="1554480"/>
+            <a:ext cx="6720840" cy="4617720"/>
+          </a:xfrm>
+          <a:prstGeom prst="rect">
+            <a:avLst/>
+          </a:prstGeom>
+          <a:noFill/>
+        </p:spPr>
+        <p:txBody>
+          <a:bodyPr wrap="square" lIns="0" rIns="0" tIns="0" bIns="0">
+            <a:spAutoFit/>
+          </a:bodyPr>
+          <a:lstStyle/>
+          <a:p>
+            <a:pPr>
+              <a:spcAft>
+                <a:spcPts val="1260"/>
+              </a:spcAft>
+            </a:pPr>
+            <a:r>
+              <a:rPr sz="2100" b="0">
+                <a:solidFill>
+                  <a:srgbClr val="202122"/>
+                </a:solidFill>
+                <a:latin typeface="Calibri"/>
+              </a:rPr>
+              <a:t>Both use fluid under pressure to transmit power.</a:t>
+            </a:r>
+          </a:p>
+          <a:p>
+            <a:pPr>
+              <a:spcAft>
+                <a:spcPts val="1260"/>
+              </a:spcAft>
+            </a:pPr>
+            <a:r>
+              <a:rPr sz="2100" b="0">
+                <a:solidFill>
+                  <a:srgbClr val="202122"/>
+                </a:solidFill>
+                <a:latin typeface="Calibri"/>
+              </a:rPr>
+              <a:t>Hydraulics uses oil, which is almost incompressible. It produces very large forces with precise control, but leaks are messy and the oil can be a fire risk. It's used in excavators and presses.</a:t>
+            </a:r>
+          </a:p>
+          <a:p>
+            <a:pPr>
+              <a:spcAft>
+                <a:spcPts val="1260"/>
+              </a:spcAft>
+            </a:pPr>
+            <a:r>
+              <a:rPr sz="2100" b="0">
+                <a:solidFill>
+                  <a:srgbClr val="202122"/>
+                </a:solidFill>
+                <a:latin typeface="Calibri"/>
+              </a:rPr>
+              <a:t>Pneumatics uses compressed air, which is springy (compressible). It's fast, clean and cheap, but gives lower forces and less precise positioning. It's used in pick-and-place machines and bus doors.</a:t>
+            </a:r>
+          </a:p>
+          <a:p>
+            <a:pPr>
+              <a:spcAft>
+                <a:spcPts val="1260"/>
+              </a:spcAft>
+            </a:pPr>
+            <a:r>
+              <a:rPr sz="2100" b="0">
+                <a:solidFill>
+                  <a:srgbClr val="202122"/>
+                </a:solidFill>
+                <a:latin typeface="Calibri"/>
+              </a:rPr>
+              <a:t>Components include pumps and compressors, valves, cylinders and actuators, shown with standard symbols on schematic diagrams.</a:t>
+            </a:r>
+          </a:p>
+        </p:txBody>
+      </p:sp>
+      <p:sp>
+        <p:nvSpPr>
+          <p:cNvPr id="7" name="Rounded Rectangle 6"/>
           <p:cNvSpPr/>
           <p:nvPr/>
         </p:nvSpPr>
         <p:spPr>
           <a:xfrm>
-            <a:off x="548640" y="1737360"/>
-            <a:ext cx="502920" cy="502920"/>
+            <a:off x="7772400" y="1554480"/>
+            <a:ext cx="3867912" cy="4526280"/>
+          </a:xfrm>
+          <a:prstGeom prst="roundRect">
+            <a:avLst>
+              <a:gd name="adj" fmla="val 8000"/>
+            </a:avLst>
+          </a:prstGeom>
+          <a:solidFill>
+            <a:srgbClr val="03306E"/>
+          </a:solidFill>
+          <a:ln>
+            <a:noFill/>
+          </a:ln>
+          <a:effectLst/>
+        </p:spPr>
+        <p:style>
+          <a:lnRef idx="1">
+            <a:schemeClr val="accent1"/>
+          </a:lnRef>
+          <a:fillRef idx="3">
+            <a:schemeClr val="accent1"/>
+          </a:fillRef>
+          <a:effectRef idx="2">
+            <a:schemeClr val="accent1"/>
+          </a:effectRef>
+          <a:fontRef idx="minor">
+            <a:schemeClr val="lt1"/>
+          </a:fontRef>
+        </p:style>
+        <p:txBody>
+          <a:bodyPr rtlCol="0" anchor="ctr"/>
+          <a:lstStyle/>
+          <a:p/>
+        </p:txBody>
+      </p:sp>
+      <p:sp>
+        <p:nvSpPr>
+          <p:cNvPr id="8" name="Oval 7"/>
+          <p:cNvSpPr/>
+          <p:nvPr/>
+        </p:nvSpPr>
+        <p:spPr>
+          <a:xfrm>
+            <a:off x="8046720" y="1828800"/>
+            <a:ext cx="548640" cy="548640"/>
           </a:xfrm>
           <a:prstGeom prst="ellipse">
             <a:avLst/>
@@ -8764,185 +11904,13 @@
           <a:p>
             <a:pPr algn="ctr"/>
             <a:r>
-              <a:rPr sz="1700" b="1">
+              <a:rPr sz="1300" b="1">
                 <a:solidFill>
                   <a:srgbClr val="202122"/>
                 </a:solidFill>
                 <a:latin typeface="Calibri"/>
               </a:rPr>
-              <a:t>1</a:t>
-            </a:r>
-          </a:p>
-        </p:txBody>
-      </p:sp>
-      <p:sp>
-        <p:nvSpPr>
-          <p:cNvPr id="5" name="TextBox 4"/>
-          <p:cNvSpPr txBox="1"/>
-          <p:nvPr/>
-        </p:nvSpPr>
-        <p:spPr>
-          <a:xfrm>
-            <a:off x="1325880" y="1645920"/>
-            <a:ext cx="6583680" cy="822960"/>
-          </a:xfrm>
-          <a:prstGeom prst="rect">
-            <a:avLst/>
-          </a:prstGeom>
-          <a:noFill/>
-        </p:spPr>
-        <p:txBody>
-          <a:bodyPr wrap="square" anchor="ctr" lIns="0" rIns="0" tIns="0" bIns="0"/>
-          <a:lstStyle/>
-          <a:p>
-            <a:pPr algn="l"/>
-            <a:r>
-              <a:rPr sz="2000" b="0" i="0">
-                <a:solidFill>
-                  <a:srgbClr val="FFFFFF"/>
-                </a:solidFill>
-                <a:latin typeface="Calibri"/>
-              </a:rPr>
-              <a:t>Why are PLCs popular in factories?</a:t>
-            </a:r>
-          </a:p>
-        </p:txBody>
-      </p:sp>
-      <p:sp>
-        <p:nvSpPr>
-          <p:cNvPr id="6" name="Oval 5"/>
-          <p:cNvSpPr/>
-          <p:nvPr/>
-        </p:nvSpPr>
-        <p:spPr>
-          <a:xfrm>
-            <a:off x="548640" y="2697480"/>
-            <a:ext cx="502920" cy="502920"/>
-          </a:xfrm>
-          <a:prstGeom prst="ellipse">
-            <a:avLst/>
-          </a:prstGeom>
-          <a:solidFill>
-            <a:srgbClr val="F2B705"/>
-          </a:solidFill>
-          <a:ln>
-            <a:noFill/>
-          </a:ln>
-          <a:effectLst/>
-        </p:spPr>
-        <p:style>
-          <a:lnRef idx="1">
-            <a:schemeClr val="accent1"/>
-          </a:lnRef>
-          <a:fillRef idx="3">
-            <a:schemeClr val="accent1"/>
-          </a:fillRef>
-          <a:effectRef idx="2">
-            <a:schemeClr val="accent1"/>
-          </a:effectRef>
-          <a:fontRef idx="minor">
-            <a:schemeClr val="lt1"/>
-          </a:fontRef>
-        </p:style>
-        <p:txBody>
-          <a:bodyPr rtlCol="0" anchor="ctr" lIns="0" rIns="0" tIns="0" bIns="0"/>
-          <a:lstStyle/>
-          <a:p>
-            <a:pPr algn="ctr"/>
-            <a:r>
-              <a:rPr sz="1700" b="1">
-                <a:solidFill>
-                  <a:srgbClr val="202122"/>
-                </a:solidFill>
-                <a:latin typeface="Calibri"/>
-              </a:rPr>
-              <a:t>2</a:t>
-            </a:r>
-          </a:p>
-        </p:txBody>
-      </p:sp>
-      <p:sp>
-        <p:nvSpPr>
-          <p:cNvPr id="7" name="TextBox 6"/>
-          <p:cNvSpPr txBox="1"/>
-          <p:nvPr/>
-        </p:nvSpPr>
-        <p:spPr>
-          <a:xfrm>
-            <a:off x="1325880" y="2606040"/>
-            <a:ext cx="6583680" cy="822960"/>
-          </a:xfrm>
-          <a:prstGeom prst="rect">
-            <a:avLst/>
-          </a:prstGeom>
-          <a:noFill/>
-        </p:spPr>
-        <p:txBody>
-          <a:bodyPr wrap="square" anchor="ctr" lIns="0" rIns="0" tIns="0" bIns="0"/>
-          <a:lstStyle/>
-          <a:p>
-            <a:pPr algn="l"/>
-            <a:r>
-              <a:rPr sz="2000" b="0" i="0">
-                <a:solidFill>
-                  <a:srgbClr val="FFFFFF"/>
-                </a:solidFill>
-                <a:latin typeface="Calibri"/>
-              </a:rPr>
-              <a:t>When would you choose pneumatics?</a:t>
-            </a:r>
-          </a:p>
-        </p:txBody>
-      </p:sp>
-      <p:sp>
-        <p:nvSpPr>
-          <p:cNvPr id="8" name="Oval 7"/>
-          <p:cNvSpPr/>
-          <p:nvPr/>
-        </p:nvSpPr>
-        <p:spPr>
-          <a:xfrm>
-            <a:off x="548640" y="3657600"/>
-            <a:ext cx="502920" cy="502920"/>
-          </a:xfrm>
-          <a:prstGeom prst="ellipse">
-            <a:avLst/>
-          </a:prstGeom>
-          <a:solidFill>
-            <a:srgbClr val="F2B705"/>
-          </a:solidFill>
-          <a:ln>
-            <a:noFill/>
-          </a:ln>
-          <a:effectLst/>
-        </p:spPr>
-        <p:style>
-          <a:lnRef idx="1">
-            <a:schemeClr val="accent1"/>
-          </a:lnRef>
-          <a:fillRef idx="3">
-            <a:schemeClr val="accent1"/>
-          </a:fillRef>
-          <a:effectRef idx="2">
-            <a:schemeClr val="accent1"/>
-          </a:effectRef>
-          <a:fontRef idx="minor">
-            <a:schemeClr val="lt1"/>
-          </a:fontRef>
-        </p:style>
-        <p:txBody>
-          <a:bodyPr rtlCol="0" anchor="ctr" lIns="0" rIns="0" tIns="0" bIns="0"/>
-          <a:lstStyle/>
-          <a:p>
-            <a:pPr algn="ctr"/>
-            <a:r>
-              <a:rPr sz="1700" b="1">
-                <a:solidFill>
-                  <a:srgbClr val="202122"/>
-                </a:solidFill>
-                <a:latin typeface="Calibri"/>
-              </a:rPr>
-              <a:t>3</a:t>
+              <a:t>e.g.</a:t>
             </a:r>
           </a:p>
         </p:txBody>
@@ -8955,203 +11923,60 @@
         </p:nvSpPr>
         <p:spPr>
           <a:xfrm>
-            <a:off x="1325880" y="3566160"/>
-            <a:ext cx="6583680" cy="822960"/>
-          </a:xfrm>
-          <a:prstGeom prst="rect">
-            <a:avLst/>
-          </a:prstGeom>
-          <a:noFill/>
-        </p:spPr>
-        <p:txBody>
-          <a:bodyPr wrap="square" anchor="ctr" lIns="0" rIns="0" tIns="0" bIns="0"/>
+            <a:off x="8046720" y="2560320"/>
+            <a:ext cx="3291840" cy="365760"/>
+          </a:xfrm>
+          <a:prstGeom prst="rect">
+            <a:avLst/>
+          </a:prstGeom>
+          <a:noFill/>
+        </p:spPr>
+        <p:txBody>
+          <a:bodyPr wrap="square" anchor="t" lIns="0" rIns="0" tIns="0" bIns="0"/>
           <a:lstStyle/>
           <a:p>
             <a:pPr algn="l"/>
             <a:r>
-              <a:rPr sz="2000" b="0" i="0">
+              <a:rPr sz="1300" b="1" i="0">
+                <a:solidFill>
+                  <a:srgbClr val="A9C8F0"/>
+                </a:solidFill>
+                <a:latin typeface="Calibri"/>
+              </a:rPr>
+              <a:t>EXAMPLE</a:t>
+            </a:r>
+          </a:p>
+        </p:txBody>
+      </p:sp>
+      <p:sp>
+        <p:nvSpPr>
+          <p:cNvPr id="10" name="TextBox 9"/>
+          <p:cNvSpPr txBox="1"/>
+          <p:nvPr/>
+        </p:nvSpPr>
+        <p:spPr>
+          <a:xfrm>
+            <a:off x="8046720" y="2971800"/>
+            <a:ext cx="3291840" cy="2971800"/>
+          </a:xfrm>
+          <a:prstGeom prst="rect">
+            <a:avLst/>
+          </a:prstGeom>
+          <a:noFill/>
+        </p:spPr>
+        <p:txBody>
+          <a:bodyPr wrap="square" anchor="t" lIns="0" rIns="0" tIns="0" bIns="0"/>
+          <a:lstStyle/>
+          <a:p>
+            <a:pPr algn="l"/>
+            <a:r>
+              <a:rPr sz="1900" b="0" i="0">
                 <a:solidFill>
                   <a:srgbClr val="FFFFFF"/>
                 </a:solidFill>
-                <a:latin typeface="Calibri"/>
-              </a:rPr>
-              <a:t>What does a transducer do?</a:t>
-            </a:r>
-          </a:p>
-        </p:txBody>
-      </p:sp>
-      <p:sp>
-        <p:nvSpPr>
-          <p:cNvPr id="10" name="Rounded Rectangle 9"/>
-          <p:cNvSpPr/>
-          <p:nvPr/>
-        </p:nvSpPr>
-        <p:spPr>
-          <a:xfrm>
-            <a:off x="8229600" y="1645920"/>
-            <a:ext cx="3410712" cy="2926080"/>
-          </a:xfrm>
-          <a:prstGeom prst="roundRect">
-            <a:avLst>
-              <a:gd name="adj" fmla="val 8000"/>
-            </a:avLst>
-          </a:prstGeom>
-          <a:solidFill>
-            <a:srgbClr val="0645AD"/>
-          </a:solidFill>
-          <a:ln>
-            <a:noFill/>
-          </a:ln>
-          <a:effectLst/>
-        </p:spPr>
-        <p:style>
-          <a:lnRef idx="1">
-            <a:schemeClr val="accent1"/>
-          </a:lnRef>
-          <a:fillRef idx="3">
-            <a:schemeClr val="accent1"/>
-          </a:fillRef>
-          <a:effectRef idx="2">
-            <a:schemeClr val="accent1"/>
-          </a:effectRef>
-          <a:fontRef idx="minor">
-            <a:schemeClr val="lt1"/>
-          </a:fontRef>
-        </p:style>
-        <p:txBody>
-          <a:bodyPr rtlCol="0" anchor="ctr"/>
-          <a:lstStyle/>
-          <a:p/>
-        </p:txBody>
-      </p:sp>
-      <p:sp>
-        <p:nvSpPr>
-          <p:cNvPr id="11" name="TextBox 10"/>
-          <p:cNvSpPr txBox="1"/>
-          <p:nvPr/>
-        </p:nvSpPr>
-        <p:spPr>
-          <a:xfrm>
-            <a:off x="8503920" y="1874519"/>
-            <a:ext cx="2926080" cy="365760"/>
-          </a:xfrm>
-          <a:prstGeom prst="rect">
-            <a:avLst/>
-          </a:prstGeom>
-          <a:noFill/>
-        </p:spPr>
-        <p:txBody>
-          <a:bodyPr wrap="square" anchor="t" lIns="0" rIns="0" tIns="0" bIns="0"/>
-          <a:lstStyle/>
-          <a:p>
-            <a:pPr algn="l"/>
-            <a:r>
-              <a:rPr sz="1300" b="1" i="0">
-                <a:solidFill>
-                  <a:srgbClr val="A9C8F0"/>
-                </a:solidFill>
-                <a:latin typeface="Calibri"/>
-              </a:rPr>
-              <a:t>REVISE THIS TOPIC</a:t>
-            </a:r>
-          </a:p>
-        </p:txBody>
-      </p:sp>
-      <p:sp>
-        <p:nvSpPr>
-          <p:cNvPr id="12" name="TextBox 11"/>
-          <p:cNvSpPr txBox="1"/>
-          <p:nvPr/>
-        </p:nvSpPr>
-        <p:spPr>
-          <a:xfrm>
-            <a:off x="8503920" y="2286000"/>
-            <a:ext cx="2926080" cy="548640"/>
-          </a:xfrm>
-          <a:prstGeom prst="rect">
-            <a:avLst/>
-          </a:prstGeom>
-          <a:noFill/>
-        </p:spPr>
-        <p:txBody>
-          <a:bodyPr wrap="square" anchor="t" lIns="0" rIns="0" tIns="0" bIns="0"/>
-          <a:lstStyle/>
-          <a:p>
-            <a:pPr algn="l"/>
-            <a:r>
-              <a:rPr sz="1400" b="0" i="0">
-                <a:solidFill>
-                  <a:srgbClr val="FFFFFF"/>
-                </a:solidFill>
-                <a:latin typeface="Calibri"/>
-              </a:rPr>
-              <a:t>Revision notes for this lesson are on the study wiki:</a:t>
-            </a:r>
-          </a:p>
-        </p:txBody>
-      </p:sp>
-      <p:sp>
-        <p:nvSpPr>
-          <p:cNvPr id="13" name="TextBox 12"/>
-          <p:cNvSpPr txBox="1"/>
-          <p:nvPr/>
-        </p:nvSpPr>
-        <p:spPr>
-          <a:xfrm>
-            <a:off x="8503920" y="2926080"/>
-            <a:ext cx="2926080" cy="1463040"/>
-          </a:xfrm>
-          <a:prstGeom prst="rect">
-            <a:avLst/>
-          </a:prstGeom>
-          <a:noFill/>
-        </p:spPr>
-        <p:txBody>
-          <a:bodyPr wrap="square" anchor="t" lIns="0" rIns="0" tIns="0" bIns="0"/>
-          <a:lstStyle/>
-          <a:p>
-            <a:pPr algn="l"/>
-            <a:r>
-              <a:rPr sz="2000" b="1" i="0">
-                <a:solidFill>
-                  <a:srgbClr val="FFFFFF"/>
-                </a:solidFill>
                 <a:latin typeface="Cambria"/>
               </a:rPr>
-              <a:t>Engineering Core, Part 2</a:t>
-            </a:r>
-          </a:p>
-        </p:txBody>
-      </p:sp>
-      <p:sp>
-        <p:nvSpPr>
-          <p:cNvPr id="14" name="TextBox 13"/>
-          <p:cNvSpPr txBox="1"/>
-          <p:nvPr/>
-        </p:nvSpPr>
-        <p:spPr>
-          <a:xfrm>
-            <a:off x="548640" y="5669280"/>
-            <a:ext cx="11094415" cy="548640"/>
-          </a:xfrm>
-          <a:prstGeom prst="rect">
-            <a:avLst/>
-          </a:prstGeom>
-          <a:noFill/>
-        </p:spPr>
-        <p:txBody>
-          <a:bodyPr wrap="square" anchor="t" lIns="0" rIns="0" tIns="0" bIns="0"/>
-          <a:lstStyle/>
-          <a:p>
-            <a:pPr algn="l"/>
-            <a:r>
-              <a:rPr sz="1200" b="0" i="0">
-                <a:solidFill>
-                  <a:srgbClr val="A9C8F0"/>
-                </a:solidFill>
-                <a:latin typeface="Calibri"/>
-              </a:rPr>
-              <a:t>https://lana6478.github.io/T-level-Design-Development-Engineering-Manufacturing/#/01-core-component/02-engineering-core-part2.md</a:t>
+              <a:t>A car crusher uses hydraulics for its huge force; a factory sorting line uses pneumatic cylinders to push small parts quickly.</a:t>
             </a:r>
           </a:p>
         </p:txBody>
